--- a/presentation/Dynamic Homotopy Power Flow.pptx
+++ b/presentation/Dynamic Homotopy Power Flow.pptx
@@ -9,7 +9,12 @@
   </p:notesMasterIdLst>
   <p:sldIdLst>
     <p:sldId id="256" r:id="rId2"/>
-    <p:sldId id="257" r:id="rId3"/>
+    <p:sldId id="274" r:id="rId25"/>
+    <p:sldId id="275" r:id="rId26"/>
+    <p:sldId id="276" r:id="rId27"/>
+    <p:sldId id="277" r:id="rId28"/>
+    <p:sldId id="278" r:id="rId29"/>
+    <p:sldId id="279" r:id="rId30"/>
     <p:sldId id="258" r:id="rId4"/>
     <p:sldId id="259" r:id="rId5"/>
     <p:sldId id="260" r:id="rId6"/>
@@ -1124,8 +1129,8 @@
 </p:notes>
 </file>
 
-<file path=ppt/notesSlides/notesSlide2.xml><?xml version="1.0" encoding="utf-8"?>
-<p:notes xmlns:a="http://schemas.openxmlformats.org/drawingml/2006/main" xmlns:r="http://schemas.openxmlformats.org/officeDocument/2006/relationships" xmlns:p="http://schemas.openxmlformats.org/presentationml/2006/main">
+<file path=ppt/notesSlides/notesSlide19.xml><?xml version="1.0" encoding="utf-8"?>
+<p:notes xmlns:a="http://schemas.openxmlformats.org/drawingml/2006/main" xmlns:p="http://schemas.openxmlformats.org/presentationml/2006/main" xmlns:r="http://schemas.openxmlformats.org/officeDocument/2006/relationships">
   <p:cSld>
     <p:spTree>
       <p:nvGrpSpPr>
@@ -1143,16 +1148,50 @@
       </p:grpSpPr>
       <p:sp>
         <p:nvSpPr>
-          <p:cNvPr id="2" name="Slide Image Placeholder 1"/>
+          <p:cNvPr id="3" name="Notes Placeholder 2"/>
           <p:cNvSpPr>
-            <a:spLocks noGrp="1" noRot="1" noChangeAspect="1"/>
+            <a:spLocks noGrp="1"/>
           </p:cNvSpPr>
           <p:nvPr>
-            <p:ph type="sldImg"/>
+            <p:ph type="body" idx="1"/>
           </p:nvPr>
         </p:nvSpPr>
         <p:spPr/>
+        <p:txBody>
+          <a:bodyPr/>
+          <a:lstStyle/>
+          <a:p>
+            <a:r>
+              <a:t>Every grid is a MATPOWER case file: one structure called mpc with the base power and three tables. A bus row holds the bus type and its load; a generator row the power it produces and the voltage it holds; a branch row the line's resistance, reactance, charging and transformer data. Powers are in MW and MVAr and are divided by baseMVA to get per-unit values. VM and VA are a stored voltage profile, which we use only for the reference solution. Below is our smallest example, simple2.mat, which the next slides follow by hand.</a:t>
+            </a:r>
+          </a:p>
+        </p:txBody>
       </p:sp>
+    </p:spTree>
+  </p:cSld>
+  <p:clrMapOvr>
+    <a:masterClrMapping/>
+  </p:clrMapOvr>
+</p:notes>
+</file>
+
+<file path=ppt/notesSlides/notesSlide20.xml><?xml version="1.0" encoding="utf-8"?>
+<p:notes xmlns:a="http://schemas.openxmlformats.org/drawingml/2006/main" xmlns:p="http://schemas.openxmlformats.org/presentationml/2006/main" xmlns:r="http://schemas.openxmlformats.org/officeDocument/2006/relationships">
+  <p:cSld>
+    <p:spTree>
+      <p:nvGrpSpPr>
+        <p:cNvPr id="1" name=""/>
+        <p:cNvGrpSpPr/>
+        <p:nvPr/>
+      </p:nvGrpSpPr>
+      <p:grpSpPr>
+        <a:xfrm>
+          <a:off x="0" y="0"/>
+          <a:ext cx="0" cy="0"/>
+          <a:chOff x="0" y="0"/>
+          <a:chExt cx="0" cy="0"/>
+        </a:xfrm>
+      </p:grpSpPr>
       <p:sp>
         <p:nvSpPr>
           <p:cNvPr id="3" name="Notes Placeholder 2"/>
@@ -1169,20 +1208,44 @@
           <a:lstStyle/>
           <a:p>
             <a:r>
-              <a:rPr lang="en-US" dirty="0"/>
-              <a:t>For this course the grid is simply a source of one large sparse nonlinear system. Y is the bus admittance matrix. PV buses have a generator that fixes the magnitude, so only the angle is unknown there. The flat start is the natural guess when nothing is known.</a:t>
+              <a:t>Renumbering is needed because bus labels in the files are arbitrary; the large grids use labels in the hundreds of thousands. A bus marked PV without a working generator becomes PQ. Each line is a pi model: its series admittance plus half the charging at each end, with a transformer ratio where present. The diagonal of Y is the sum of everything connected to the bus and the off-diagonal is minus the line admittance, so Y is very sparse. PYPOWER evaluates these formulas; there is no iterative method here. For the 2-bus grid: y = 1 / (0.1j) = -10j, and bus 2 must inject -0.5 - 0.2j per unit.</a:t>
             </a:r>
           </a:p>
         </p:txBody>
       </p:sp>
+    </p:spTree>
+  </p:cSld>
+  <p:clrMapOvr>
+    <a:masterClrMapping/>
+  </p:clrMapOvr>
+</p:notes>
+</file>
+
+<file path=ppt/notesSlides/notesSlide21.xml><?xml version="1.0" encoding="utf-8"?>
+<p:notes xmlns:a="http://schemas.openxmlformats.org/drawingml/2006/main" xmlns:p="http://schemas.openxmlformats.org/presentationml/2006/main" xmlns:r="http://schemas.openxmlformats.org/officeDocument/2006/relationships">
+  <p:cSld>
+    <p:spTree>
+      <p:nvGrpSpPr>
+        <p:cNvPr id="1" name=""/>
+        <p:cNvGrpSpPr/>
+        <p:nvPr/>
+      </p:nvGrpSpPr>
+      <p:grpSpPr>
+        <a:xfrm>
+          <a:off x="0" y="0"/>
+          <a:ext cx="0" cy="0"/>
+          <a:chOff x="0" y="0"/>
+          <a:chExt cx="0" cy="0"/>
+        </a:xfrm>
+      </p:grpSpPr>
       <p:sp>
         <p:nvSpPr>
-          <p:cNvPr id="4" name="Slide Number Placeholder 3"/>
+          <p:cNvPr id="3" name="Notes Placeholder 2"/>
           <p:cNvSpPr>
             <a:spLocks noGrp="1"/>
           </p:cNvSpPr>
           <p:nvPr>
-            <p:ph type="sldNum" sz="quarter" idx="10"/>
+            <p:ph type="body" idx="1"/>
           </p:nvPr>
         </p:nvSpPr>
         <p:spPr/>
@@ -1190,20 +1253,151 @@
           <a:bodyPr/>
           <a:lstStyle/>
           <a:p>
-            <a:fld id="{F7021451-1387-4CA6-816F-3879F97B5CBC}" type="slidenum">
-              <a:rPr lang="en-US"/>
-              <a:t>2</a:t>
-            </a:fld>
-            <a:endParaRPr lang="en-US"/>
+            <a:r>
+              <a:t>Each bus has four quantities: voltage size, voltage angle, active power and reactive power. Two are fixed by what is controlled there and two are unknown. The slack supplies the losses, which are not known in advance, so its powers are outputs; its voltage is the reference. A generator bus produces a set P and holds its voltage, so only its angle is unknown. A load bus has known P and Q, so its angle and size are unknown. The solver only looks for voltages; the unknown powers follow from them.</a:t>
+            </a:r>
           </a:p>
         </p:txBody>
       </p:sp>
     </p:spTree>
-    <p:extLst>
-      <p:ext uri="{BB962C8B-B14F-4D97-AF65-F5344CB8AC3E}">
-        <p14:creationId xmlns:p14="http://schemas.microsoft.com/office/powerpoint/2010/main" val="1024086991"/>
-      </p:ext>
-    </p:extLst>
+  </p:cSld>
+  <p:clrMapOvr>
+    <a:masterClrMapping/>
+  </p:clrMapOvr>
+</p:notes>
+</file>
+
+<file path=ppt/notesSlides/notesSlide22.xml><?xml version="1.0" encoding="utf-8"?>
+<p:notes xmlns:a="http://schemas.openxmlformats.org/drawingml/2006/main" xmlns:p="http://schemas.openxmlformats.org/presentationml/2006/main" xmlns:r="http://schemas.openxmlformats.org/officeDocument/2006/relationships">
+  <p:cSld>
+    <p:spTree>
+      <p:nvGrpSpPr>
+        <p:cNvPr id="1" name=""/>
+        <p:cNvGrpSpPr/>
+        <p:nvPr/>
+      </p:nvGrpSpPr>
+      <p:grpSpPr>
+        <a:xfrm>
+          <a:off x="0" y="0"/>
+          <a:ext cx="0" cy="0"/>
+          <a:chOff x="0" y="0"/>
+          <a:chExt cx="0" cy="0"/>
+        </a:xfrm>
+      </p:grpSpPr>
+      <p:sp>
+        <p:nvSpPr>
+          <p:cNvPr id="3" name="Notes Placeholder 2"/>
+          <p:cNvSpPr>
+            <a:spLocks noGrp="1"/>
+          </p:cNvSpPr>
+          <p:nvPr>
+            <p:ph type="body" idx="1"/>
+          </p:nvPr>
+        </p:nvSpPr>
+        <p:spPr/>
+        <p:txBody>
+          <a:bodyPr/>
+          <a:lstStyle/>
+          <a:p>
+            <a:r>
+              <a:t>Current comes from Ohm's law for the whole grid, I = YV, and the power a bus injects is its voltage times the conjugate of its current. Split into real and imaginary parts this gives the classical power flow equations. The mismatch is computed minus specified power. Only the balances that are real conditions are kept: P at PV and PQ buses, Q at PQ buses. That gives exactly as many equations as unknowns. In the code the whole mismatch is one line with a sparse matrix product. The Jacobian comes from exact derivative formulas and is tested against central finite differences.</a:t>
+            </a:r>
+          </a:p>
+        </p:txBody>
+      </p:sp>
+    </p:spTree>
+  </p:cSld>
+  <p:clrMapOvr>
+    <a:masterClrMapping/>
+  </p:clrMapOvr>
+</p:notes>
+</file>
+
+<file path=ppt/notesSlides/notesSlide23.xml><?xml version="1.0" encoding="utf-8"?>
+<p:notes xmlns:a="http://schemas.openxmlformats.org/drawingml/2006/main" xmlns:p="http://schemas.openxmlformats.org/presentationml/2006/main" xmlns:r="http://schemas.openxmlformats.org/officeDocument/2006/relationships">
+  <p:cSld>
+    <p:spTree>
+      <p:nvGrpSpPr>
+        <p:cNvPr id="1" name=""/>
+        <p:cNvGrpSpPr/>
+        <p:nvPr/>
+      </p:nvGrpSpPr>
+      <p:grpSpPr>
+        <a:xfrm>
+          <a:off x="0" y="0"/>
+          <a:ext cx="0" cy="0"/>
+          <a:chOff x="0" y="0"/>
+          <a:chExt cx="0" cy="0"/>
+        </a:xfrm>
+      </p:grpSpPr>
+      <p:sp>
+        <p:nvSpPr>
+          <p:cNvPr id="3" name="Notes Placeholder 2"/>
+          <p:cNvSpPr>
+            <a:spLocks noGrp="1"/>
+          </p:cNvSpPr>
+          <p:nvPr>
+            <p:ph type="body" idx="1"/>
+          </p:nvPr>
+        </p:nvSpPr>
+        <p:spPr/>
+        <p:txBody>
+          <a:bodyPr/>
+          <a:lstStyle/>
+          <a:p>
+            <a:r>
+              <a:t>The file from before: a slack generator at bus 1, one line with reactance 0.1, and a 50 MW plus 20 MVAr load at bus 2. With G = 0 and B21 = 10 the power formulas reduce to the two equations shown. The first says the power arriving at bus 2 must equal the 0.5 taken out, so theta 2 must be negative. The second balances reactive power, which pulls |V2| a little below 1. At the flat start J is 10 times the identity, so the first Newton step is simply minus g over 10. The error roughly squares each iteration. The line absorbs 0.03 pu of reactive power, which the slack supplies. Our code prints the same numbers.</a:t>
+            </a:r>
+          </a:p>
+        </p:txBody>
+      </p:sp>
+    </p:spTree>
+  </p:cSld>
+  <p:clrMapOvr>
+    <a:masterClrMapping/>
+  </p:clrMapOvr>
+</p:notes>
+</file>
+
+<file path=ppt/notesSlides/notesSlide24.xml><?xml version="1.0" encoding="utf-8"?>
+<p:notes xmlns:a="http://schemas.openxmlformats.org/drawingml/2006/main" xmlns:p="http://schemas.openxmlformats.org/presentationml/2006/main" xmlns:r="http://schemas.openxmlformats.org/officeDocument/2006/relationships">
+  <p:cSld>
+    <p:spTree>
+      <p:nvGrpSpPr>
+        <p:cNvPr id="1" name=""/>
+        <p:cNvGrpSpPr/>
+        <p:nvPr/>
+      </p:nvGrpSpPr>
+      <p:grpSpPr>
+        <a:xfrm>
+          <a:off x="0" y="0"/>
+          <a:ext cx="0" cy="0"/>
+          <a:chOff x="0" y="0"/>
+          <a:chExt cx="0" cy="0"/>
+        </a:xfrm>
+      </p:grpSpPr>
+      <p:sp>
+        <p:nvSpPr>
+          <p:cNvPr id="3" name="Notes Placeholder 2"/>
+          <p:cNvSpPr>
+            <a:spLocks noGrp="1"/>
+          </p:cNvSpPr>
+          <p:nvPr>
+            <p:ph type="body" idx="1"/>
+          </p:nvPr>
+        </p:nvSpPr>
+        <p:spPr/>
+        <p:txBody>
+          <a:bodyPr/>
+          <a:lstStyle/>
+          <a:p>
+            <a:r>
+              <a:t>The ill-conditioned grids are built by joining copies of real European PEGASE grids, for example case18482 is case9241pegase twice. The flat-start mismatch is the first number in the paper's Tables 2 to 5, so matching it checks the whole model. At the flat start almost no power flows, so the mismatch is about minus the specified power, which scales with one over the base: going from 100 to 10 MVA multiplies it by 10. In the figure a cross means Newton from the flat start fails, which is where the next slide picks up.</a:t>
+            </a:r>
+          </a:p>
+        </p:txBody>
+      </p:sp>
+    </p:spTree>
   </p:cSld>
   <p:clrMapOvr>
     <a:masterClrMapping/>
@@ -2774,7 +2968,7 @@
                 <a:ea typeface="IBM Plex Sans" pitchFamily="34" charset="-122"/>
                 <a:cs typeface="IBM Plex Sans" pitchFamily="34" charset="-120"/>
               </a:rPr>
-              <a:t>11</a:t>
+              <a:t>15</a:t>
             </a:r>
             <a:endParaRPr lang="en-US" sz="1200" dirty="0"/>
           </a:p>
@@ -3996,7 +4190,7 @@
                 <a:ea typeface="IBM Plex Sans" pitchFamily="34" charset="-122"/>
                 <a:cs typeface="IBM Plex Sans" pitchFamily="34" charset="-120"/>
               </a:rPr>
-              <a:t>12</a:t>
+              <a:t>16</a:t>
             </a:r>
             <a:endParaRPr lang="en-US" sz="1200" dirty="0"/>
           </a:p>
@@ -4381,7 +4575,7 @@
                 <a:ea typeface="IBM Plex Sans" pitchFamily="34" charset="-122"/>
                 <a:cs typeface="IBM Plex Sans" pitchFamily="34" charset="-120"/>
               </a:rPr>
-              <a:t>13</a:t>
+              <a:t>17</a:t>
             </a:r>
             <a:endParaRPr lang="en-US" sz="1200" dirty="0"/>
           </a:p>
@@ -4832,7 +5026,7 @@
                 <a:ea typeface="IBM Plex Sans" pitchFamily="34" charset="-122"/>
                 <a:cs typeface="IBM Plex Sans" pitchFamily="34" charset="-120"/>
               </a:rPr>
-              <a:t>14</a:t>
+              <a:t>18</a:t>
             </a:r>
             <a:endParaRPr lang="en-US" sz="1200" dirty="0"/>
           </a:p>
@@ -5283,7 +5477,7 @@
                 <a:ea typeface="IBM Plex Sans" pitchFamily="34" charset="-122"/>
                 <a:cs typeface="IBM Plex Sans" pitchFamily="34" charset="-120"/>
               </a:rPr>
-              <a:t>15</a:t>
+              <a:t>19</a:t>
             </a:r>
             <a:endParaRPr lang="en-US" sz="1200" dirty="0"/>
           </a:p>
@@ -7558,7 +7752,7 @@
                 <a:ea typeface="IBM Plex Sans" pitchFamily="34" charset="-122"/>
                 <a:cs typeface="IBM Plex Sans" pitchFamily="34" charset="-120"/>
               </a:rPr>
-              <a:t>16</a:t>
+              <a:t>20</a:t>
             </a:r>
             <a:endParaRPr lang="en-US" sz="1200" dirty="0"/>
           </a:p>
@@ -9114,7 +9308,7 @@
                 <a:ea typeface="IBM Plex Sans" pitchFamily="34" charset="-122"/>
                 <a:cs typeface="IBM Plex Sans" pitchFamily="34" charset="-120"/>
               </a:rPr>
-              <a:t>17</a:t>
+              <a:t>21</a:t>
             </a:r>
             <a:endParaRPr lang="en-US" sz="1200" dirty="0"/>
           </a:p>
@@ -9433,7 +9627,7 @@
                 <a:ea typeface="IBM Plex Sans" pitchFamily="34" charset="-122"/>
                 <a:cs typeface="IBM Plex Sans" pitchFamily="34" charset="-120"/>
               </a:rPr>
-              <a:t>18</a:t>
+              <a:t>22</a:t>
             </a:r>
             <a:endParaRPr lang="en-US" sz="1200" dirty="0"/>
           </a:p>
@@ -9750,7 +9944,7 @@
                 <a:ea typeface="IBM Plex Sans" pitchFamily="34" charset="-122"/>
                 <a:cs typeface="IBM Plex Sans" pitchFamily="34" charset="-120"/>
               </a:rPr>
-              <a:t>19</a:t>
+              <a:t>23</a:t>
             </a:r>
             <a:endParaRPr lang="en-US" sz="1200" dirty="0"/>
           </a:p>
@@ -9764,9 +9958,9 @@
 </p:sld>
 </file>
 
-<file path=ppt/slides/slide2.xml><?xml version="1.0" encoding="utf-8"?>
-<p:sld xmlns:a="http://schemas.openxmlformats.org/drawingml/2006/main" xmlns:r="http://schemas.openxmlformats.org/officeDocument/2006/relationships" xmlns:p="http://schemas.openxmlformats.org/presentationml/2006/main">
-  <p:cSld name="Slide 2">
+<file path=ppt/slides/slide19.xml><?xml version="1.0" encoding="utf-8"?>
+<p:sld xmlns:a="http://schemas.openxmlformats.org/drawingml/2006/main" xmlns:p="http://schemas.openxmlformats.org/presentationml/2006/main" xmlns:r="http://schemas.openxmlformats.org/officeDocument/2006/relationships">
+  <p:cSld>
     <p:bg>
       <p:bgPr>
         <a:solidFill>
@@ -9781,74 +9975,63 @@
         <p:cNvGrpSpPr/>
         <p:nvPr/>
       </p:nvGrpSpPr>
-      <p:grpSpPr>
-        <a:xfrm>
-          <a:off x="0" y="0"/>
-          <a:ext cx="0" cy="0"/>
-          <a:chOff x="0" y="0"/>
-          <a:chExt cx="0" cy="0"/>
-        </a:xfrm>
-      </p:grpSpPr>
+      <p:grpSpPr/>
       <p:sp>
         <p:nvSpPr>
-          <p:cNvPr id="2" name="Text 0"/>
-          <p:cNvSpPr/>
+          <p:cNvPr id="2" name="TextBox 1"/>
+          <p:cNvSpPr txBox="1"/>
           <p:nvPr/>
         </p:nvSpPr>
         <p:spPr>
           <a:xfrm>
-            <a:off x="812800" y="711200"/>
-            <a:ext cx="10883392" cy="434340"/>
+            <a:off x="813816" y="713232"/>
+            <a:ext cx="10881360" cy="429768"/>
           </a:xfrm>
           <a:prstGeom prst="rect">
             <a:avLst/>
           </a:prstGeom>
           <a:noFill/>
-          <a:ln/>
         </p:spPr>
         <p:txBody>
-          <a:bodyPr wrap="square" lIns="0" tIns="0" rIns="0" bIns="0" rtlCol="0" anchor="t">
-            <a:normAutofit/>
+          <a:bodyPr wrap="square" lIns="0" rIns="0" tIns="0" bIns="0">
+            <a:spAutoFit/>
           </a:bodyPr>
           <a:lstStyle/>
           <a:p>
-            <a:pPr marL="0" indent="0" algn="l">
-              <a:lnSpc>
-                <a:spcPts val="3220"/>
-              </a:lnSpc>
+            <a:pPr algn="l" marL="0" indent="0">
               <a:buNone/>
             </a:pPr>
             <a:r>
-              <a:rPr lang="en-US" sz="2800" b="1" dirty="0">
+              <a:rPr sz="2800" b="1" i="0">
                 <a:solidFill>
                   <a:srgbClr val="1F3A5F"/>
                 </a:solidFill>
-                <a:latin typeface="IBM Plex Sans" pitchFamily="34" charset="0"/>
-                <a:ea typeface="IBM Plex Sans" pitchFamily="34" charset="-122"/>
-                <a:cs typeface="IBM Plex Sans" pitchFamily="34" charset="-120"/>
+                <a:latin typeface="IBM Plex Sans"/>
+                <a:ea typeface="IBM Plex Sans"/>
+                <a:cs typeface="IBM Plex Sans"/>
               </a:rPr>
-              <a:t>Power flow as a nonlinear system</a:t>
+              <a:t>What is stored in a .mat case file</a:t>
             </a:r>
-            <a:endParaRPr lang="en-US" sz="2800" dirty="0"/>
           </a:p>
         </p:txBody>
       </p:sp>
       <p:pic>
         <p:nvPicPr>
-          <p:cNvPr id="3" name="Image 0" descr="line"/>
+          <p:cNvPr id="3" name="Picture 2" descr="image.png"/>
           <p:cNvPicPr>
             <a:picLocks noChangeAspect="1"/>
           </p:cNvPicPr>
           <p:nvPr/>
         </p:nvPicPr>
         <p:blipFill>
-          <a:blip r:embed="rId3"/>
-          <a:srcRect t="-3333" b="-3333"/>
-          <a:stretch/>
+          <a:blip r:embed="rId2"/>
+          <a:stretch>
+            <a:fillRect/>
+          </a:stretch>
         </p:blipFill>
         <p:spPr>
           <a:xfrm>
-            <a:off x="812800" y="1221740"/>
+            <a:off x="812800" y="1221741"/>
             <a:ext cx="10566400" cy="20320"/>
           </a:xfrm>
           <a:prstGeom prst="rect">
@@ -9858,28 +10041,3908 @@
       </p:pic>
       <p:sp>
         <p:nvSpPr>
-          <p:cNvPr id="4" name="Text 1"/>
+          <p:cNvPr id="4" name="TextBox 3"/>
+          <p:cNvSpPr txBox="1"/>
+          <p:nvPr/>
+        </p:nvSpPr>
+        <p:spPr>
+          <a:xfrm>
+            <a:off x="813816" y="6236208"/>
+            <a:ext cx="7845552" cy="237744"/>
+          </a:xfrm>
+          <a:prstGeom prst="rect">
+            <a:avLst/>
+          </a:prstGeom>
+          <a:noFill/>
+        </p:spPr>
+        <p:txBody>
+          <a:bodyPr wrap="square" lIns="0" rIns="0" tIns="0" bIns="0">
+            <a:spAutoFit/>
+          </a:bodyPr>
+          <a:lstStyle/>
+          <a:p>
+            <a:pPr algn="l" marL="0" indent="0">
+              <a:buNone/>
+            </a:pPr>
+            <a:r>
+              <a:rPr sz="1200" b="0" i="0">
+                <a:solidFill>
+                  <a:srgbClr val="6B7280"/>
+                </a:solidFill>
+                <a:latin typeface="IBM Plex Sans"/>
+                <a:ea typeface="IBM Plex Sans"/>
+                <a:cs typeface="IBM Plex Sans"/>
+              </a:rPr>
+              <a:t>Lima-Silva &amp; Freitas (2024): reproduction and improvements</a:t>
+            </a:r>
+          </a:p>
+        </p:txBody>
+      </p:sp>
+      <p:sp>
+        <p:nvSpPr>
+          <p:cNvPr id="5" name="TextBox 4"/>
+          <p:cNvSpPr txBox="1"/>
+          <p:nvPr/>
+        </p:nvSpPr>
+        <p:spPr>
+          <a:xfrm>
+            <a:off x="10058400" y="6236208"/>
+            <a:ext cx="1316736" cy="237744"/>
+          </a:xfrm>
+          <a:prstGeom prst="rect">
+            <a:avLst/>
+          </a:prstGeom>
+          <a:noFill/>
+        </p:spPr>
+        <p:txBody>
+          <a:bodyPr wrap="square" lIns="0" rIns="0" tIns="0" bIns="0">
+            <a:spAutoFit/>
+          </a:bodyPr>
+          <a:lstStyle/>
+          <a:p>
+            <a:pPr algn="r" marL="0" indent="0">
+              <a:buNone/>
+            </a:pPr>
+            <a:r>
+              <a:rPr sz="1200" b="0" i="0">
+                <a:solidFill>
+                  <a:srgbClr val="6B7280"/>
+                </a:solidFill>
+                <a:latin typeface="IBM Plex Sans"/>
+                <a:ea typeface="IBM Plex Sans"/>
+                <a:cs typeface="IBM Plex Sans"/>
+              </a:rPr>
+              <a:t>2</a:t>
+            </a:r>
+          </a:p>
+        </p:txBody>
+      </p:sp>
+      <p:sp>
+        <p:nvSpPr>
+          <p:cNvPr id="6" name="TextBox 5"/>
+          <p:cNvSpPr txBox="1"/>
+          <p:nvPr/>
+        </p:nvSpPr>
+        <p:spPr>
+          <a:xfrm>
+            <a:off x="813816" y="1463040"/>
+            <a:ext cx="10881360" cy="329184"/>
+          </a:xfrm>
+          <a:prstGeom prst="rect">
+            <a:avLst/>
+          </a:prstGeom>
+          <a:noFill/>
+        </p:spPr>
+        <p:txBody>
+          <a:bodyPr wrap="square" lIns="0" rIns="0" tIns="0" bIns="0">
+            <a:spAutoFit/>
+          </a:bodyPr>
+          <a:lstStyle/>
+          <a:p>
+            <a:pPr algn="l" marL="0" indent="0">
+              <a:buNone/>
+            </a:pPr>
+            <a:r>
+              <a:rPr sz="1600" b="0" i="0">
+                <a:solidFill>
+                  <a:srgbClr val="1B1F2A"/>
+                </a:solidFill>
+                <a:latin typeface="IBM Plex Sans"/>
+                <a:ea typeface="IBM Plex Sans"/>
+                <a:cs typeface="IBM Plex Sans"/>
+              </a:rPr>
+              <a:t>Each grid is one MATPOWER file: a structure mpc with baseMVA and three tables</a:t>
+            </a:r>
+          </a:p>
+        </p:txBody>
+      </p:sp>
+      <p:graphicFrame>
+        <p:nvGraphicFramePr>
+          <p:cNvPr id="7" name="Table 6"/>
+          <p:cNvGraphicFramePr>
+            <a:graphicFrameLocks noGrp="1"/>
+          </p:cNvGraphicFramePr>
+          <p:nvPr/>
+        </p:nvGraphicFramePr>
+        <p:xfrm>
+          <a:off x="822960" y="1901952"/>
+          <a:ext cx="10552176" cy="1828800"/>
+        </p:xfrm>
+        <a:graphic>
+          <a:graphicData uri="http://schemas.openxmlformats.org/drawingml/2006/table">
+            <a:tbl>
+              <a:tblPr/>
+              <a:tblGrid>
+                <a:gridCol w="1463040"/>
+                <a:gridCol w="2286000"/>
+                <a:gridCol w="6803136"/>
+              </a:tblGrid>
+              <a:tr h="365760">
+                <a:tc>
+                  <a:txBody>
+                    <a:bodyPr/>
+                    <a:lstStyle/>
+                    <a:p>
+                      <a:r>
+                        <a:rPr sz="1400" b="1" i="0">
+                          <a:solidFill>
+                            <a:srgbClr val="1B1F2A"/>
+                          </a:solidFill>
+                          <a:latin typeface="IBM Plex Sans"/>
+                          <a:ea typeface="IBM Plex Sans"/>
+                          <a:cs typeface="IBM Plex Sans"/>
+                        </a:rPr>
+                        <a:t>Table</a:t>
+                      </a:r>
+                    </a:p>
+                  </a:txBody>
+                  <a:tcPr marL="66675" marR="66675" marT="66675" marB="66675">
+                    <a:lnL w="12700" cap="flat" cmpd="sng" algn="ctr">
+                      <a:solidFill>
+                        <a:srgbClr val="C8C8C6"/>
+                      </a:solidFill>
+                      <a:prstDash val="solid"/>
+                      <a:round/>
+                      <a:headEnd type="none" w="med" len="med"/>
+                      <a:tailEnd type="none" w="med" len="med"/>
+                    </a:lnL>
+                    <a:lnR w="12700" cap="flat" cmpd="sng" algn="ctr">
+                      <a:solidFill>
+                        <a:srgbClr val="BABAB8"/>
+                      </a:solidFill>
+                      <a:prstDash val="solid"/>
+                      <a:round/>
+                      <a:headEnd type="none" w="med" len="med"/>
+                      <a:tailEnd type="none" w="med" len="med"/>
+                    </a:lnR>
+                    <a:lnT w="12700" cap="flat" cmpd="sng" algn="ctr">
+                      <a:solidFill>
+                        <a:srgbClr val="C8C8C6"/>
+                      </a:solidFill>
+                      <a:prstDash val="solid"/>
+                      <a:round/>
+                      <a:headEnd type="none" w="med" len="med"/>
+                      <a:tailEnd type="none" w="med" len="med"/>
+                    </a:lnT>
+                    <a:lnB w="12700" cap="flat" cmpd="sng" algn="ctr">
+                      <a:solidFill>
+                        <a:srgbClr val="BABAB8"/>
+                      </a:solidFill>
+                      <a:prstDash val="solid"/>
+                      <a:round/>
+                      <a:headEnd type="none" w="med" len="med"/>
+                      <a:tailEnd type="none" w="med" len="med"/>
+                    </a:lnB>
+                    <a:solidFill>
+                      <a:srgbClr val="E9E9E7"/>
+                    </a:solidFill>
+                  </a:tcPr>
+                </a:tc>
+                <a:tc>
+                  <a:txBody>
+                    <a:bodyPr/>
+                    <a:lstStyle/>
+                    <a:p>
+                      <a:r>
+                        <a:rPr sz="1400" b="1" i="0">
+                          <a:solidFill>
+                            <a:srgbClr val="1B1F2A"/>
+                          </a:solidFill>
+                          <a:latin typeface="IBM Plex Sans"/>
+                          <a:ea typeface="IBM Plex Sans"/>
+                          <a:cs typeface="IBM Plex Sans"/>
+                        </a:rPr>
+                        <a:t>One row per</a:t>
+                      </a:r>
+                    </a:p>
+                  </a:txBody>
+                  <a:tcPr marL="66675" marR="66675" marT="66675" marB="66675">
+                    <a:lnL w="12700" cap="flat" cmpd="sng" algn="ctr">
+                      <a:solidFill>
+                        <a:srgbClr val="C8C8C6"/>
+                      </a:solidFill>
+                      <a:prstDash val="solid"/>
+                      <a:round/>
+                      <a:headEnd type="none" w="med" len="med"/>
+                      <a:tailEnd type="none" w="med" len="med"/>
+                    </a:lnL>
+                    <a:lnR w="12700" cap="flat" cmpd="sng" algn="ctr">
+                      <a:solidFill>
+                        <a:srgbClr val="BABAB8"/>
+                      </a:solidFill>
+                      <a:prstDash val="solid"/>
+                      <a:round/>
+                      <a:headEnd type="none" w="med" len="med"/>
+                      <a:tailEnd type="none" w="med" len="med"/>
+                    </a:lnR>
+                    <a:lnT w="12700" cap="flat" cmpd="sng" algn="ctr">
+                      <a:solidFill>
+                        <a:srgbClr val="C8C8C6"/>
+                      </a:solidFill>
+                      <a:prstDash val="solid"/>
+                      <a:round/>
+                      <a:headEnd type="none" w="med" len="med"/>
+                      <a:tailEnd type="none" w="med" len="med"/>
+                    </a:lnT>
+                    <a:lnB w="12700" cap="flat" cmpd="sng" algn="ctr">
+                      <a:solidFill>
+                        <a:srgbClr val="BABAB8"/>
+                      </a:solidFill>
+                      <a:prstDash val="solid"/>
+                      <a:round/>
+                      <a:headEnd type="none" w="med" len="med"/>
+                      <a:tailEnd type="none" w="med" len="med"/>
+                    </a:lnB>
+                    <a:solidFill>
+                      <a:srgbClr val="E9E9E7"/>
+                    </a:solidFill>
+                  </a:tcPr>
+                </a:tc>
+                <a:tc>
+                  <a:txBody>
+                    <a:bodyPr/>
+                    <a:lstStyle/>
+                    <a:p>
+                      <a:r>
+                        <a:rPr sz="1400" b="1" i="0">
+                          <a:solidFill>
+                            <a:srgbClr val="1B1F2A"/>
+                          </a:solidFill>
+                          <a:latin typeface="IBM Plex Sans"/>
+                          <a:ea typeface="IBM Plex Sans"/>
+                          <a:cs typeface="IBM Plex Sans"/>
+                        </a:rPr>
+                        <a:t>Columns we use</a:t>
+                      </a:r>
+                    </a:p>
+                  </a:txBody>
+                  <a:tcPr marL="66675" marR="66675" marT="66675" marB="66675">
+                    <a:lnL w="12700" cap="flat" cmpd="sng" algn="ctr">
+                      <a:solidFill>
+                        <a:srgbClr val="C8C8C6"/>
+                      </a:solidFill>
+                      <a:prstDash val="solid"/>
+                      <a:round/>
+                      <a:headEnd type="none" w="med" len="med"/>
+                      <a:tailEnd type="none" w="med" len="med"/>
+                    </a:lnL>
+                    <a:lnR w="12700" cap="flat" cmpd="sng" algn="ctr">
+                      <a:solidFill>
+                        <a:srgbClr val="BABAB8"/>
+                      </a:solidFill>
+                      <a:prstDash val="solid"/>
+                      <a:round/>
+                      <a:headEnd type="none" w="med" len="med"/>
+                      <a:tailEnd type="none" w="med" len="med"/>
+                    </a:lnR>
+                    <a:lnT w="12700" cap="flat" cmpd="sng" algn="ctr">
+                      <a:solidFill>
+                        <a:srgbClr val="C8C8C6"/>
+                      </a:solidFill>
+                      <a:prstDash val="solid"/>
+                      <a:round/>
+                      <a:headEnd type="none" w="med" len="med"/>
+                      <a:tailEnd type="none" w="med" len="med"/>
+                    </a:lnT>
+                    <a:lnB w="12700" cap="flat" cmpd="sng" algn="ctr">
+                      <a:solidFill>
+                        <a:srgbClr val="BABAB8"/>
+                      </a:solidFill>
+                      <a:prstDash val="solid"/>
+                      <a:round/>
+                      <a:headEnd type="none" w="med" len="med"/>
+                      <a:tailEnd type="none" w="med" len="med"/>
+                    </a:lnB>
+                    <a:solidFill>
+                      <a:srgbClr val="E9E9E7"/>
+                    </a:solidFill>
+                  </a:tcPr>
+                </a:tc>
+              </a:tr>
+              <a:tr h="365760">
+                <a:tc>
+                  <a:txBody>
+                    <a:bodyPr/>
+                    <a:lstStyle/>
+                    <a:p>
+                      <a:r>
+                        <a:rPr sz="1400" b="0" i="0">
+                          <a:solidFill>
+                            <a:srgbClr val="1B1F2A"/>
+                          </a:solidFill>
+                          <a:latin typeface="IBM Plex Sans"/>
+                          <a:ea typeface="IBM Plex Sans"/>
+                          <a:cs typeface="IBM Plex Sans"/>
+                        </a:rPr>
+                        <a:t>bus</a:t>
+                      </a:r>
+                    </a:p>
+                  </a:txBody>
+                  <a:tcPr marL="66675" marR="66675" marT="66675" marB="66675">
+                    <a:lnL w="12700" cap="flat" cmpd="sng" algn="ctr">
+                      <a:solidFill>
+                        <a:srgbClr val="C8C8C6"/>
+                      </a:solidFill>
+                      <a:prstDash val="solid"/>
+                      <a:round/>
+                      <a:headEnd type="none" w="med" len="med"/>
+                      <a:tailEnd type="none" w="med" len="med"/>
+                    </a:lnL>
+                    <a:lnR w="12700" cap="flat" cmpd="sng" algn="ctr">
+                      <a:solidFill>
+                        <a:srgbClr val="C8C8C6"/>
+                      </a:solidFill>
+                      <a:prstDash val="solid"/>
+                      <a:round/>
+                      <a:headEnd type="none" w="med" len="med"/>
+                      <a:tailEnd type="none" w="med" len="med"/>
+                    </a:lnR>
+                    <a:lnT w="12700" cap="flat" cmpd="sng" algn="ctr">
+                      <a:solidFill>
+                        <a:srgbClr val="BABAB8"/>
+                      </a:solidFill>
+                      <a:prstDash val="solid"/>
+                      <a:round/>
+                      <a:headEnd type="none" w="med" len="med"/>
+                      <a:tailEnd type="none" w="med" len="med"/>
+                    </a:lnT>
+                    <a:lnB w="12700" cap="flat" cmpd="sng" algn="ctr">
+                      <a:solidFill>
+                        <a:srgbClr val="C8C8C6"/>
+                      </a:solidFill>
+                      <a:prstDash val="solid"/>
+                      <a:round/>
+                      <a:headEnd type="none" w="med" len="med"/>
+                      <a:tailEnd type="none" w="med" len="med"/>
+                    </a:lnB>
+                  </a:tcPr>
+                </a:tc>
+                <a:tc>
+                  <a:txBody>
+                    <a:bodyPr/>
+                    <a:lstStyle/>
+                    <a:p>
+                      <a:r>
+                        <a:rPr sz="1400" b="0" i="0">
+                          <a:solidFill>
+                            <a:srgbClr val="1B1F2A"/>
+                          </a:solidFill>
+                          <a:latin typeface="IBM Plex Sans"/>
+                          <a:ea typeface="IBM Plex Sans"/>
+                          <a:cs typeface="IBM Plex Sans"/>
+                        </a:rPr>
+                        <a:t>bus (node)</a:t>
+                      </a:r>
+                    </a:p>
+                  </a:txBody>
+                  <a:tcPr marL="66675" marR="66675" marT="66675" marB="66675">
+                    <a:lnL w="12700" cap="flat" cmpd="sng" algn="ctr">
+                      <a:solidFill>
+                        <a:srgbClr val="C8C8C6"/>
+                      </a:solidFill>
+                      <a:prstDash val="solid"/>
+                      <a:round/>
+                      <a:headEnd type="none" w="med" len="med"/>
+                      <a:tailEnd type="none" w="med" len="med"/>
+                    </a:lnL>
+                    <a:lnR w="12700" cap="flat" cmpd="sng" algn="ctr">
+                      <a:solidFill>
+                        <a:srgbClr val="C8C8C6"/>
+                      </a:solidFill>
+                      <a:prstDash val="solid"/>
+                      <a:round/>
+                      <a:headEnd type="none" w="med" len="med"/>
+                      <a:tailEnd type="none" w="med" len="med"/>
+                    </a:lnR>
+                    <a:lnT w="12700" cap="flat" cmpd="sng" algn="ctr">
+                      <a:solidFill>
+                        <a:srgbClr val="BABAB8"/>
+                      </a:solidFill>
+                      <a:prstDash val="solid"/>
+                      <a:round/>
+                      <a:headEnd type="none" w="med" len="med"/>
+                      <a:tailEnd type="none" w="med" len="med"/>
+                    </a:lnT>
+                    <a:lnB w="12700" cap="flat" cmpd="sng" algn="ctr">
+                      <a:solidFill>
+                        <a:srgbClr val="C8C8C6"/>
+                      </a:solidFill>
+                      <a:prstDash val="solid"/>
+                      <a:round/>
+                      <a:headEnd type="none" w="med" len="med"/>
+                      <a:tailEnd type="none" w="med" len="med"/>
+                    </a:lnB>
+                  </a:tcPr>
+                </a:tc>
+                <a:tc>
+                  <a:txBody>
+                    <a:bodyPr/>
+                    <a:lstStyle/>
+                    <a:p>
+                      <a:r>
+                        <a:rPr sz="1400" b="0" i="0">
+                          <a:solidFill>
+                            <a:srgbClr val="1B1F2A"/>
+                          </a:solidFill>
+                          <a:latin typeface="IBM Plex Sans"/>
+                          <a:ea typeface="IBM Plex Sans"/>
+                          <a:cs typeface="IBM Plex Sans"/>
+                        </a:rPr>
+                        <a:t>number, type (1 = PQ, 2 = PV, 3 = slack), load PD, QD, shunt GS, BS, stored VM, VA</a:t>
+                      </a:r>
+                    </a:p>
+                  </a:txBody>
+                  <a:tcPr marL="66675" marR="66675" marT="66675" marB="66675">
+                    <a:lnL w="12700" cap="flat" cmpd="sng" algn="ctr">
+                      <a:solidFill>
+                        <a:srgbClr val="C8C8C6"/>
+                      </a:solidFill>
+                      <a:prstDash val="solid"/>
+                      <a:round/>
+                      <a:headEnd type="none" w="med" len="med"/>
+                      <a:tailEnd type="none" w="med" len="med"/>
+                    </a:lnL>
+                    <a:lnR w="12700" cap="flat" cmpd="sng" algn="ctr">
+                      <a:solidFill>
+                        <a:srgbClr val="C8C8C6"/>
+                      </a:solidFill>
+                      <a:prstDash val="solid"/>
+                      <a:round/>
+                      <a:headEnd type="none" w="med" len="med"/>
+                      <a:tailEnd type="none" w="med" len="med"/>
+                    </a:lnR>
+                    <a:lnT w="12700" cap="flat" cmpd="sng" algn="ctr">
+                      <a:solidFill>
+                        <a:srgbClr val="BABAB8"/>
+                      </a:solidFill>
+                      <a:prstDash val="solid"/>
+                      <a:round/>
+                      <a:headEnd type="none" w="med" len="med"/>
+                      <a:tailEnd type="none" w="med" len="med"/>
+                    </a:lnT>
+                    <a:lnB w="12700" cap="flat" cmpd="sng" algn="ctr">
+                      <a:solidFill>
+                        <a:srgbClr val="C8C8C6"/>
+                      </a:solidFill>
+                      <a:prstDash val="solid"/>
+                      <a:round/>
+                      <a:headEnd type="none" w="med" len="med"/>
+                      <a:tailEnd type="none" w="med" len="med"/>
+                    </a:lnB>
+                  </a:tcPr>
+                </a:tc>
+              </a:tr>
+              <a:tr h="365760">
+                <a:tc>
+                  <a:txBody>
+                    <a:bodyPr/>
+                    <a:lstStyle/>
+                    <a:p>
+                      <a:r>
+                        <a:rPr sz="1400" b="0" i="0">
+                          <a:solidFill>
+                            <a:srgbClr val="1B1F2A"/>
+                          </a:solidFill>
+                          <a:latin typeface="IBM Plex Sans"/>
+                          <a:ea typeface="IBM Plex Sans"/>
+                          <a:cs typeface="IBM Plex Sans"/>
+                        </a:rPr>
+                        <a:t>gen</a:t>
+                      </a:r>
+                    </a:p>
+                  </a:txBody>
+                  <a:tcPr marL="66675" marR="66675" marT="66675" marB="66675">
+                    <a:lnL w="12700" cap="flat" cmpd="sng" algn="ctr">
+                      <a:solidFill>
+                        <a:srgbClr val="C8C8C6"/>
+                      </a:solidFill>
+                      <a:prstDash val="solid"/>
+                      <a:round/>
+                      <a:headEnd type="none" w="med" len="med"/>
+                      <a:tailEnd type="none" w="med" len="med"/>
+                    </a:lnL>
+                    <a:lnR w="12700" cap="flat" cmpd="sng" algn="ctr">
+                      <a:solidFill>
+                        <a:srgbClr val="C8C8C6"/>
+                      </a:solidFill>
+                      <a:prstDash val="solid"/>
+                      <a:round/>
+                      <a:headEnd type="none" w="med" len="med"/>
+                      <a:tailEnd type="none" w="med" len="med"/>
+                    </a:lnR>
+                    <a:lnT w="12700" cap="flat" cmpd="sng" algn="ctr">
+                      <a:solidFill>
+                        <a:srgbClr val="BABAB8"/>
+                      </a:solidFill>
+                      <a:prstDash val="solid"/>
+                      <a:round/>
+                      <a:headEnd type="none" w="med" len="med"/>
+                      <a:tailEnd type="none" w="med" len="med"/>
+                    </a:lnT>
+                    <a:lnB w="12700" cap="flat" cmpd="sng" algn="ctr">
+                      <a:solidFill>
+                        <a:srgbClr val="C8C8C6"/>
+                      </a:solidFill>
+                      <a:prstDash val="solid"/>
+                      <a:round/>
+                      <a:headEnd type="none" w="med" len="med"/>
+                      <a:tailEnd type="none" w="med" len="med"/>
+                    </a:lnB>
+                  </a:tcPr>
+                </a:tc>
+                <a:tc>
+                  <a:txBody>
+                    <a:bodyPr/>
+                    <a:lstStyle/>
+                    <a:p>
+                      <a:r>
+                        <a:rPr sz="1400" b="0" i="0">
+                          <a:solidFill>
+                            <a:srgbClr val="1B1F2A"/>
+                          </a:solidFill>
+                          <a:latin typeface="IBM Plex Sans"/>
+                          <a:ea typeface="IBM Plex Sans"/>
+                          <a:cs typeface="IBM Plex Sans"/>
+                        </a:rPr>
+                        <a:t>generator</a:t>
+                      </a:r>
+                    </a:p>
+                  </a:txBody>
+                  <a:tcPr marL="66675" marR="66675" marT="66675" marB="66675">
+                    <a:lnL w="12700" cap="flat" cmpd="sng" algn="ctr">
+                      <a:solidFill>
+                        <a:srgbClr val="C8C8C6"/>
+                      </a:solidFill>
+                      <a:prstDash val="solid"/>
+                      <a:round/>
+                      <a:headEnd type="none" w="med" len="med"/>
+                      <a:tailEnd type="none" w="med" len="med"/>
+                    </a:lnL>
+                    <a:lnR w="12700" cap="flat" cmpd="sng" algn="ctr">
+                      <a:solidFill>
+                        <a:srgbClr val="C8C8C6"/>
+                      </a:solidFill>
+                      <a:prstDash val="solid"/>
+                      <a:round/>
+                      <a:headEnd type="none" w="med" len="med"/>
+                      <a:tailEnd type="none" w="med" len="med"/>
+                    </a:lnR>
+                    <a:lnT w="12700" cap="flat" cmpd="sng" algn="ctr">
+                      <a:solidFill>
+                        <a:srgbClr val="BABAB8"/>
+                      </a:solidFill>
+                      <a:prstDash val="solid"/>
+                      <a:round/>
+                      <a:headEnd type="none" w="med" len="med"/>
+                      <a:tailEnd type="none" w="med" len="med"/>
+                    </a:lnT>
+                    <a:lnB w="12700" cap="flat" cmpd="sng" algn="ctr">
+                      <a:solidFill>
+                        <a:srgbClr val="C8C8C6"/>
+                      </a:solidFill>
+                      <a:prstDash val="solid"/>
+                      <a:round/>
+                      <a:headEnd type="none" w="med" len="med"/>
+                      <a:tailEnd type="none" w="med" len="med"/>
+                    </a:lnB>
+                  </a:tcPr>
+                </a:tc>
+                <a:tc>
+                  <a:txBody>
+                    <a:bodyPr/>
+                    <a:lstStyle/>
+                    <a:p>
+                      <a:r>
+                        <a:rPr sz="1400" b="0" i="0">
+                          <a:solidFill>
+                            <a:srgbClr val="1B1F2A"/>
+                          </a:solidFill>
+                          <a:latin typeface="IBM Plex Sans"/>
+                          <a:ea typeface="IBM Plex Sans"/>
+                          <a:cs typeface="IBM Plex Sans"/>
+                        </a:rPr>
+                        <a:t>bus, output PG, QG, held voltage VG, status</a:t>
+                      </a:r>
+                    </a:p>
+                  </a:txBody>
+                  <a:tcPr marL="66675" marR="66675" marT="66675" marB="66675">
+                    <a:lnL w="12700" cap="flat" cmpd="sng" algn="ctr">
+                      <a:solidFill>
+                        <a:srgbClr val="C8C8C6"/>
+                      </a:solidFill>
+                      <a:prstDash val="solid"/>
+                      <a:round/>
+                      <a:headEnd type="none" w="med" len="med"/>
+                      <a:tailEnd type="none" w="med" len="med"/>
+                    </a:lnL>
+                    <a:lnR w="12700" cap="flat" cmpd="sng" algn="ctr">
+                      <a:solidFill>
+                        <a:srgbClr val="C8C8C6"/>
+                      </a:solidFill>
+                      <a:prstDash val="solid"/>
+                      <a:round/>
+                      <a:headEnd type="none" w="med" len="med"/>
+                      <a:tailEnd type="none" w="med" len="med"/>
+                    </a:lnR>
+                    <a:lnT w="12700" cap="flat" cmpd="sng" algn="ctr">
+                      <a:solidFill>
+                        <a:srgbClr val="BABAB8"/>
+                      </a:solidFill>
+                      <a:prstDash val="solid"/>
+                      <a:round/>
+                      <a:headEnd type="none" w="med" len="med"/>
+                      <a:tailEnd type="none" w="med" len="med"/>
+                    </a:lnT>
+                    <a:lnB w="12700" cap="flat" cmpd="sng" algn="ctr">
+                      <a:solidFill>
+                        <a:srgbClr val="C8C8C6"/>
+                      </a:solidFill>
+                      <a:prstDash val="solid"/>
+                      <a:round/>
+                      <a:headEnd type="none" w="med" len="med"/>
+                      <a:tailEnd type="none" w="med" len="med"/>
+                    </a:lnB>
+                  </a:tcPr>
+                </a:tc>
+              </a:tr>
+              <a:tr h="365760">
+                <a:tc>
+                  <a:txBody>
+                    <a:bodyPr/>
+                    <a:lstStyle/>
+                    <a:p>
+                      <a:r>
+                        <a:rPr sz="1400" b="0" i="0">
+                          <a:solidFill>
+                            <a:srgbClr val="1B1F2A"/>
+                          </a:solidFill>
+                          <a:latin typeface="IBM Plex Sans"/>
+                          <a:ea typeface="IBM Plex Sans"/>
+                          <a:cs typeface="IBM Plex Sans"/>
+                        </a:rPr>
+                        <a:t>branch</a:t>
+                      </a:r>
+                    </a:p>
+                  </a:txBody>
+                  <a:tcPr marL="66675" marR="66675" marT="66675" marB="66675">
+                    <a:lnL w="12700" cap="flat" cmpd="sng" algn="ctr">
+                      <a:solidFill>
+                        <a:srgbClr val="C8C8C6"/>
+                      </a:solidFill>
+                      <a:prstDash val="solid"/>
+                      <a:round/>
+                      <a:headEnd type="none" w="med" len="med"/>
+                      <a:tailEnd type="none" w="med" len="med"/>
+                    </a:lnL>
+                    <a:lnR w="12700" cap="flat" cmpd="sng" algn="ctr">
+                      <a:solidFill>
+                        <a:srgbClr val="C8C8C6"/>
+                      </a:solidFill>
+                      <a:prstDash val="solid"/>
+                      <a:round/>
+                      <a:headEnd type="none" w="med" len="med"/>
+                      <a:tailEnd type="none" w="med" len="med"/>
+                    </a:lnR>
+                    <a:lnT w="12700" cap="flat" cmpd="sng" algn="ctr">
+                      <a:solidFill>
+                        <a:srgbClr val="BABAB8"/>
+                      </a:solidFill>
+                      <a:prstDash val="solid"/>
+                      <a:round/>
+                      <a:headEnd type="none" w="med" len="med"/>
+                      <a:tailEnd type="none" w="med" len="med"/>
+                    </a:lnT>
+                    <a:lnB w="12700" cap="flat" cmpd="sng" algn="ctr">
+                      <a:solidFill>
+                        <a:srgbClr val="C8C8C6"/>
+                      </a:solidFill>
+                      <a:prstDash val="solid"/>
+                      <a:round/>
+                      <a:headEnd type="none" w="med" len="med"/>
+                      <a:tailEnd type="none" w="med" len="med"/>
+                    </a:lnB>
+                  </a:tcPr>
+                </a:tc>
+                <a:tc>
+                  <a:txBody>
+                    <a:bodyPr/>
+                    <a:lstStyle/>
+                    <a:p>
+                      <a:r>
+                        <a:rPr sz="1400" b="0" i="0">
+                          <a:solidFill>
+                            <a:srgbClr val="1B1F2A"/>
+                          </a:solidFill>
+                          <a:latin typeface="IBM Plex Sans"/>
+                          <a:ea typeface="IBM Plex Sans"/>
+                          <a:cs typeface="IBM Plex Sans"/>
+                        </a:rPr>
+                        <a:t>line or transformer</a:t>
+                      </a:r>
+                    </a:p>
+                  </a:txBody>
+                  <a:tcPr marL="66675" marR="66675" marT="66675" marB="66675">
+                    <a:lnL w="12700" cap="flat" cmpd="sng" algn="ctr">
+                      <a:solidFill>
+                        <a:srgbClr val="C8C8C6"/>
+                      </a:solidFill>
+                      <a:prstDash val="solid"/>
+                      <a:round/>
+                      <a:headEnd type="none" w="med" len="med"/>
+                      <a:tailEnd type="none" w="med" len="med"/>
+                    </a:lnL>
+                    <a:lnR w="12700" cap="flat" cmpd="sng" algn="ctr">
+                      <a:solidFill>
+                        <a:srgbClr val="C8C8C6"/>
+                      </a:solidFill>
+                      <a:prstDash val="solid"/>
+                      <a:round/>
+                      <a:headEnd type="none" w="med" len="med"/>
+                      <a:tailEnd type="none" w="med" len="med"/>
+                    </a:lnR>
+                    <a:lnT w="12700" cap="flat" cmpd="sng" algn="ctr">
+                      <a:solidFill>
+                        <a:srgbClr val="BABAB8"/>
+                      </a:solidFill>
+                      <a:prstDash val="solid"/>
+                      <a:round/>
+                      <a:headEnd type="none" w="med" len="med"/>
+                      <a:tailEnd type="none" w="med" len="med"/>
+                    </a:lnT>
+                    <a:lnB w="12700" cap="flat" cmpd="sng" algn="ctr">
+                      <a:solidFill>
+                        <a:srgbClr val="C8C8C6"/>
+                      </a:solidFill>
+                      <a:prstDash val="solid"/>
+                      <a:round/>
+                      <a:headEnd type="none" w="med" len="med"/>
+                      <a:tailEnd type="none" w="med" len="med"/>
+                    </a:lnB>
+                  </a:tcPr>
+                </a:tc>
+                <a:tc>
+                  <a:txBody>
+                    <a:bodyPr/>
+                    <a:lstStyle/>
+                    <a:p>
+                      <a:r>
+                        <a:rPr sz="1400" b="0" i="0">
+                          <a:solidFill>
+                            <a:srgbClr val="1B1F2A"/>
+                          </a:solidFill>
+                          <a:latin typeface="IBM Plex Sans"/>
+                          <a:ea typeface="IBM Plex Sans"/>
+                          <a:cs typeface="IBM Plex Sans"/>
+                        </a:rPr>
+                        <a:t>from bus, to bus, r, x, charging b, tap ratio, phase shift, status</a:t>
+                      </a:r>
+                    </a:p>
+                  </a:txBody>
+                  <a:tcPr marL="66675" marR="66675" marT="66675" marB="66675">
+                    <a:lnL w="12700" cap="flat" cmpd="sng" algn="ctr">
+                      <a:solidFill>
+                        <a:srgbClr val="C8C8C6"/>
+                      </a:solidFill>
+                      <a:prstDash val="solid"/>
+                      <a:round/>
+                      <a:headEnd type="none" w="med" len="med"/>
+                      <a:tailEnd type="none" w="med" len="med"/>
+                    </a:lnL>
+                    <a:lnR w="12700" cap="flat" cmpd="sng" algn="ctr">
+                      <a:solidFill>
+                        <a:srgbClr val="C8C8C6"/>
+                      </a:solidFill>
+                      <a:prstDash val="solid"/>
+                      <a:round/>
+                      <a:headEnd type="none" w="med" len="med"/>
+                      <a:tailEnd type="none" w="med" len="med"/>
+                    </a:lnR>
+                    <a:lnT w="12700" cap="flat" cmpd="sng" algn="ctr">
+                      <a:solidFill>
+                        <a:srgbClr val="BABAB8"/>
+                      </a:solidFill>
+                      <a:prstDash val="solid"/>
+                      <a:round/>
+                      <a:headEnd type="none" w="med" len="med"/>
+                      <a:tailEnd type="none" w="med" len="med"/>
+                    </a:lnT>
+                    <a:lnB w="12700" cap="flat" cmpd="sng" algn="ctr">
+                      <a:solidFill>
+                        <a:srgbClr val="C8C8C6"/>
+                      </a:solidFill>
+                      <a:prstDash val="solid"/>
+                      <a:round/>
+                      <a:headEnd type="none" w="med" len="med"/>
+                      <a:tailEnd type="none" w="med" len="med"/>
+                    </a:lnB>
+                  </a:tcPr>
+                </a:tc>
+              </a:tr>
+              <a:tr h="365760">
+                <a:tc>
+                  <a:txBody>
+                    <a:bodyPr/>
+                    <a:lstStyle/>
+                    <a:p>
+                      <a:r>
+                        <a:rPr sz="1400" b="0" i="0">
+                          <a:solidFill>
+                            <a:srgbClr val="1B1F2A"/>
+                          </a:solidFill>
+                          <a:latin typeface="IBM Plex Sans"/>
+                          <a:ea typeface="IBM Plex Sans"/>
+                          <a:cs typeface="IBM Plex Sans"/>
+                        </a:rPr>
+                        <a:t>baseMVA</a:t>
+                      </a:r>
+                    </a:p>
+                  </a:txBody>
+                  <a:tcPr marL="66675" marR="66675" marT="66675" marB="66675">
+                    <a:lnL w="12700" cap="flat" cmpd="sng" algn="ctr">
+                      <a:solidFill>
+                        <a:srgbClr val="C8C8C6"/>
+                      </a:solidFill>
+                      <a:prstDash val="solid"/>
+                      <a:round/>
+                      <a:headEnd type="none" w="med" len="med"/>
+                      <a:tailEnd type="none" w="med" len="med"/>
+                    </a:lnL>
+                    <a:lnR w="12700" cap="flat" cmpd="sng" algn="ctr">
+                      <a:solidFill>
+                        <a:srgbClr val="C8C8C6"/>
+                      </a:solidFill>
+                      <a:prstDash val="solid"/>
+                      <a:round/>
+                      <a:headEnd type="none" w="med" len="med"/>
+                      <a:tailEnd type="none" w="med" len="med"/>
+                    </a:lnR>
+                    <a:lnT w="12700" cap="flat" cmpd="sng" algn="ctr">
+                      <a:solidFill>
+                        <a:srgbClr val="BABAB8"/>
+                      </a:solidFill>
+                      <a:prstDash val="solid"/>
+                      <a:round/>
+                      <a:headEnd type="none" w="med" len="med"/>
+                      <a:tailEnd type="none" w="med" len="med"/>
+                    </a:lnT>
+                    <a:lnB w="12700" cap="flat" cmpd="sng" algn="ctr">
+                      <a:solidFill>
+                        <a:srgbClr val="C8C8C6"/>
+                      </a:solidFill>
+                      <a:prstDash val="solid"/>
+                      <a:round/>
+                      <a:headEnd type="none" w="med" len="med"/>
+                      <a:tailEnd type="none" w="med" len="med"/>
+                    </a:lnB>
+                  </a:tcPr>
+                </a:tc>
+                <a:tc>
+                  <a:txBody>
+                    <a:bodyPr/>
+                    <a:lstStyle/>
+                    <a:p>
+                      <a:r>
+                        <a:rPr sz="1400" b="0" i="0">
+                          <a:solidFill>
+                            <a:srgbClr val="1B1F2A"/>
+                          </a:solidFill>
+                          <a:latin typeface="IBM Plex Sans"/>
+                          <a:ea typeface="IBM Plex Sans"/>
+                          <a:cs typeface="IBM Plex Sans"/>
+                        </a:rPr>
+                        <a:t>whole grid</a:t>
+                      </a:r>
+                    </a:p>
+                  </a:txBody>
+                  <a:tcPr marL="66675" marR="66675" marT="66675" marB="66675">
+                    <a:lnL w="12700" cap="flat" cmpd="sng" algn="ctr">
+                      <a:solidFill>
+                        <a:srgbClr val="C8C8C6"/>
+                      </a:solidFill>
+                      <a:prstDash val="solid"/>
+                      <a:round/>
+                      <a:headEnd type="none" w="med" len="med"/>
+                      <a:tailEnd type="none" w="med" len="med"/>
+                    </a:lnL>
+                    <a:lnR w="12700" cap="flat" cmpd="sng" algn="ctr">
+                      <a:solidFill>
+                        <a:srgbClr val="C8C8C6"/>
+                      </a:solidFill>
+                      <a:prstDash val="solid"/>
+                      <a:round/>
+                      <a:headEnd type="none" w="med" len="med"/>
+                      <a:tailEnd type="none" w="med" len="med"/>
+                    </a:lnR>
+                    <a:lnT w="12700" cap="flat" cmpd="sng" algn="ctr">
+                      <a:solidFill>
+                        <a:srgbClr val="BABAB8"/>
+                      </a:solidFill>
+                      <a:prstDash val="solid"/>
+                      <a:round/>
+                      <a:headEnd type="none" w="med" len="med"/>
+                      <a:tailEnd type="none" w="med" len="med"/>
+                    </a:lnT>
+                    <a:lnB w="12700" cap="flat" cmpd="sng" algn="ctr">
+                      <a:solidFill>
+                        <a:srgbClr val="C8C8C6"/>
+                      </a:solidFill>
+                      <a:prstDash val="solid"/>
+                      <a:round/>
+                      <a:headEnd type="none" w="med" len="med"/>
+                      <a:tailEnd type="none" w="med" len="med"/>
+                    </a:lnB>
+                  </a:tcPr>
+                </a:tc>
+                <a:tc>
+                  <a:txBody>
+                    <a:bodyPr/>
+                    <a:lstStyle/>
+                    <a:p>
+                      <a:r>
+                        <a:rPr sz="1400" b="0" i="0">
+                          <a:solidFill>
+                            <a:srgbClr val="1B1F2A"/>
+                          </a:solidFill>
+                          <a:latin typeface="IBM Plex Sans"/>
+                          <a:ea typeface="IBM Plex Sans"/>
+                          <a:cs typeface="IBM Plex Sans"/>
+                        </a:rPr>
+                        <a:t>usually 100: MW and MVAr are divided by it (per unit)</a:t>
+                      </a:r>
+                    </a:p>
+                  </a:txBody>
+                  <a:tcPr marL="66675" marR="66675" marT="66675" marB="66675">
+                    <a:lnL w="12700" cap="flat" cmpd="sng" algn="ctr">
+                      <a:solidFill>
+                        <a:srgbClr val="C8C8C6"/>
+                      </a:solidFill>
+                      <a:prstDash val="solid"/>
+                      <a:round/>
+                      <a:headEnd type="none" w="med" len="med"/>
+                      <a:tailEnd type="none" w="med" len="med"/>
+                    </a:lnL>
+                    <a:lnR w="12700" cap="flat" cmpd="sng" algn="ctr">
+                      <a:solidFill>
+                        <a:srgbClr val="C8C8C6"/>
+                      </a:solidFill>
+                      <a:prstDash val="solid"/>
+                      <a:round/>
+                      <a:headEnd type="none" w="med" len="med"/>
+                      <a:tailEnd type="none" w="med" len="med"/>
+                    </a:lnR>
+                    <a:lnT w="12700" cap="flat" cmpd="sng" algn="ctr">
+                      <a:solidFill>
+                        <a:srgbClr val="BABAB8"/>
+                      </a:solidFill>
+                      <a:prstDash val="solid"/>
+                      <a:round/>
+                      <a:headEnd type="none" w="med" len="med"/>
+                      <a:tailEnd type="none" w="med" len="med"/>
+                    </a:lnT>
+                    <a:lnB w="12700" cap="flat" cmpd="sng" algn="ctr">
+                      <a:solidFill>
+                        <a:srgbClr val="C8C8C6"/>
+                      </a:solidFill>
+                      <a:prstDash val="solid"/>
+                      <a:round/>
+                      <a:headEnd type="none" w="med" len="med"/>
+                      <a:tailEnd type="none" w="med" len="med"/>
+                    </a:lnB>
+                  </a:tcPr>
+                </a:tc>
+              </a:tr>
+            </a:tbl>
+          </a:graphicData>
+        </a:graphic>
+      </p:graphicFrame>
+      <p:sp>
+        <p:nvSpPr>
+          <p:cNvPr id="8" name="TextBox 7"/>
+          <p:cNvSpPr txBox="1"/>
+          <p:nvPr/>
+        </p:nvSpPr>
+        <p:spPr>
+          <a:xfrm>
+            <a:off x="813816" y="3913632"/>
+            <a:ext cx="10881360" cy="274320"/>
+          </a:xfrm>
+          <a:prstGeom prst="rect">
+            <a:avLst/>
+          </a:prstGeom>
+          <a:noFill/>
+        </p:spPr>
+        <p:txBody>
+          <a:bodyPr wrap="square" lIns="0" rIns="0" tIns="0" bIns="0">
+            <a:spAutoFit/>
+          </a:bodyPr>
+          <a:lstStyle/>
+          <a:p>
+            <a:pPr algn="l" marL="0" indent="0">
+              <a:buNone/>
+            </a:pPr>
+            <a:r>
+              <a:rPr sz="1500" b="0" i="0">
+                <a:solidFill>
+                  <a:srgbClr val="333A48"/>
+                </a:solidFill>
+                <a:latin typeface="IBM Plex Sans"/>
+                <a:ea typeface="IBM Plex Sans"/>
+                <a:cs typeface="IBM Plex Sans"/>
+              </a:rPr>
+              <a:t>Our smallest example, simple2.mat (base 100 MVA):</a:t>
+            </a:r>
+          </a:p>
+        </p:txBody>
+      </p:sp>
+      <p:sp>
+        <p:nvSpPr>
+          <p:cNvPr id="9" name="TextBox 8"/>
+          <p:cNvSpPr txBox="1"/>
+          <p:nvPr/>
+        </p:nvSpPr>
+        <p:spPr>
+          <a:xfrm>
+            <a:off x="813816" y="4261104"/>
+            <a:ext cx="10552176" cy="1463040"/>
+          </a:xfrm>
+          <a:prstGeom prst="rect">
+            <a:avLst/>
+          </a:prstGeom>
+          <a:solidFill>
+            <a:srgbClr val="F1EFEA"/>
+          </a:solidFill>
+        </p:spPr>
+        <p:txBody>
+          <a:bodyPr wrap="square" lIns="137160" rIns="137160" tIns="137160" bIns="137160">
+            <a:spAutoFit/>
+          </a:bodyPr>
+          <a:lstStyle/>
+          <a:p>
+            <a:pPr algn="l" marL="0" indent="0">
+              <a:lnSpc>
+                <a:spcPts val="2100"/>
+              </a:lnSpc>
+              <a:buNone/>
+            </a:pPr>
+            <a:r>
+              <a:rPr sz="1300" b="0" i="0">
+                <a:solidFill>
+                  <a:srgbClr val="1B1F2A"/>
+                </a:solidFill>
+                <a:latin typeface="Courier New"/>
+                <a:ea typeface="Courier New"/>
+                <a:cs typeface="Courier New"/>
+              </a:rPr>
+              <a:t>bus    = [ 1  3   0   0  ...  VM 1.0  VA 0 ]    bus 1: slack, no load</a:t>
+            </a:r>
+          </a:p>
+          <a:p>
+            <a:pPr algn="l" marL="0" indent="0">
+              <a:lnSpc>
+                <a:spcPts val="2100"/>
+              </a:lnSpc>
+              <a:buNone/>
+            </a:pPr>
+            <a:r>
+              <a:rPr sz="1300" b="0" i="0">
+                <a:solidFill>
+                  <a:srgbClr val="1B1F2A"/>
+                </a:solidFill>
+                <a:latin typeface="Courier New"/>
+                <a:ea typeface="Courier New"/>
+                <a:cs typeface="Courier New"/>
+              </a:rPr>
+              <a:t>bus    = [ 2  1  50  20  ...  VM 1.0  VA 0 ]    bus 2: PQ, load 50 MW + 20 MVAr</a:t>
+            </a:r>
+          </a:p>
+          <a:p>
+            <a:pPr algn="l" marL="0" indent="0">
+              <a:lnSpc>
+                <a:spcPts val="2100"/>
+              </a:lnSpc>
+              <a:buNone/>
+            </a:pPr>
+            <a:r>
+              <a:rPr sz="1300" b="0" i="0">
+                <a:solidFill>
+                  <a:srgbClr val="1B1F2A"/>
+                </a:solidFill>
+                <a:latin typeface="Courier New"/>
+                <a:ea typeface="Courier New"/>
+                <a:cs typeface="Courier New"/>
+              </a:rPr>
+              <a:t>gen    = [ 1  0   0  ...  VG 1.0  ...  1 ]      generator at bus 1 holds 1.0 pu</a:t>
+            </a:r>
+          </a:p>
+          <a:p>
+            <a:pPr algn="l" marL="0" indent="0">
+              <a:lnSpc>
+                <a:spcPts val="2100"/>
+              </a:lnSpc>
+              <a:buNone/>
+            </a:pPr>
+            <a:r>
+              <a:rPr sz="1300" b="0" i="0">
+                <a:solidFill>
+                  <a:srgbClr val="1B1F2A"/>
+                </a:solidFill>
+                <a:latin typeface="Courier New"/>
+                <a:ea typeface="Courier New"/>
+                <a:cs typeface="Courier New"/>
+              </a:rPr>
+              <a:t>branch = [ 1  2  r 0  x 0.1  b 0  ...  1 ]      one line from bus 1 to bus 2</a:t>
+            </a:r>
+          </a:p>
+        </p:txBody>
+      </p:sp>
+    </p:spTree>
+  </p:cSld>
+  <p:clrMapOvr>
+    <a:masterClrMapping/>
+  </p:clrMapOvr>
+</p:sld>
+</file>
+
+<file path=ppt/slides/slide20.xml><?xml version="1.0" encoding="utf-8"?>
+<p:sld xmlns:a="http://schemas.openxmlformats.org/drawingml/2006/main" xmlns:p="http://schemas.openxmlformats.org/presentationml/2006/main" xmlns:r="http://schemas.openxmlformats.org/officeDocument/2006/relationships">
+  <p:cSld>
+    <p:bg>
+      <p:bgPr>
+        <a:solidFill>
+          <a:srgbClr val="FBFBF9"/>
+        </a:solidFill>
+        <a:effectLst/>
+      </p:bgPr>
+    </p:bg>
+    <p:spTree>
+      <p:nvGrpSpPr>
+        <p:cNvPr id="1" name=""/>
+        <p:cNvGrpSpPr/>
+        <p:nvPr/>
+      </p:nvGrpSpPr>
+      <p:grpSpPr/>
+      <p:sp>
+        <p:nvSpPr>
+          <p:cNvPr id="2" name="TextBox 1"/>
+          <p:cNvSpPr txBox="1"/>
+          <p:nvPr/>
+        </p:nvSpPr>
+        <p:spPr>
+          <a:xfrm>
+            <a:off x="813816" y="713232"/>
+            <a:ext cx="10881360" cy="429768"/>
+          </a:xfrm>
+          <a:prstGeom prst="rect">
+            <a:avLst/>
+          </a:prstGeom>
+          <a:noFill/>
+        </p:spPr>
+        <p:txBody>
+          <a:bodyPr wrap="square" lIns="0" rIns="0" tIns="0" bIns="0">
+            <a:spAutoFit/>
+          </a:bodyPr>
+          <a:lstStyle/>
+          <a:p>
+            <a:pPr algn="l" marL="0" indent="0">
+              <a:buNone/>
+            </a:pPr>
+            <a:r>
+              <a:rPr sz="2800" b="1" i="0">
+                <a:solidFill>
+                  <a:srgbClr val="1F3A5F"/>
+                </a:solidFill>
+                <a:latin typeface="IBM Plex Sans"/>
+                <a:ea typeface="IBM Plex Sans"/>
+                <a:cs typeface="IBM Plex Sans"/>
+              </a:rPr>
+              <a:t>Processing: from the file to Y and S</a:t>
+            </a:r>
+          </a:p>
+        </p:txBody>
+      </p:sp>
+      <p:pic>
+        <p:nvPicPr>
+          <p:cNvPr id="3" name="Picture 2" descr="image.png"/>
+          <p:cNvPicPr>
+            <a:picLocks noChangeAspect="1"/>
+          </p:cNvPicPr>
+          <p:nvPr/>
+        </p:nvPicPr>
+        <p:blipFill>
+          <a:blip r:embed="rId2"/>
+          <a:stretch>
+            <a:fillRect/>
+          </a:stretch>
+        </p:blipFill>
+        <p:spPr>
+          <a:xfrm>
+            <a:off x="812800" y="1221741"/>
+            <a:ext cx="10566400" cy="20320"/>
+          </a:xfrm>
+          <a:prstGeom prst="rect">
+            <a:avLst/>
+          </a:prstGeom>
+        </p:spPr>
+      </p:pic>
+      <p:sp>
+        <p:nvSpPr>
+          <p:cNvPr id="4" name="TextBox 3"/>
+          <p:cNvSpPr txBox="1"/>
+          <p:nvPr/>
+        </p:nvSpPr>
+        <p:spPr>
+          <a:xfrm>
+            <a:off x="813816" y="6236208"/>
+            <a:ext cx="7845552" cy="237744"/>
+          </a:xfrm>
+          <a:prstGeom prst="rect">
+            <a:avLst/>
+          </a:prstGeom>
+          <a:noFill/>
+        </p:spPr>
+        <p:txBody>
+          <a:bodyPr wrap="square" lIns="0" rIns="0" tIns="0" bIns="0">
+            <a:spAutoFit/>
+          </a:bodyPr>
+          <a:lstStyle/>
+          <a:p>
+            <a:pPr algn="l" marL="0" indent="0">
+              <a:buNone/>
+            </a:pPr>
+            <a:r>
+              <a:rPr sz="1200" b="0" i="0">
+                <a:solidFill>
+                  <a:srgbClr val="6B7280"/>
+                </a:solidFill>
+                <a:latin typeface="IBM Plex Sans"/>
+                <a:ea typeface="IBM Plex Sans"/>
+                <a:cs typeface="IBM Plex Sans"/>
+              </a:rPr>
+              <a:t>Lima-Silva &amp; Freitas (2024): reproduction and improvements</a:t>
+            </a:r>
+          </a:p>
+        </p:txBody>
+      </p:sp>
+      <p:sp>
+        <p:nvSpPr>
+          <p:cNvPr id="5" name="TextBox 4"/>
+          <p:cNvSpPr txBox="1"/>
+          <p:nvPr/>
+        </p:nvSpPr>
+        <p:spPr>
+          <a:xfrm>
+            <a:off x="10058400" y="6236208"/>
+            <a:ext cx="1316736" cy="237744"/>
+          </a:xfrm>
+          <a:prstGeom prst="rect">
+            <a:avLst/>
+          </a:prstGeom>
+          <a:noFill/>
+        </p:spPr>
+        <p:txBody>
+          <a:bodyPr wrap="square" lIns="0" rIns="0" tIns="0" bIns="0">
+            <a:spAutoFit/>
+          </a:bodyPr>
+          <a:lstStyle/>
+          <a:p>
+            <a:pPr algn="r" marL="0" indent="0">
+              <a:buNone/>
+            </a:pPr>
+            <a:r>
+              <a:rPr sz="1200" b="0" i="0">
+                <a:solidFill>
+                  <a:srgbClr val="6B7280"/>
+                </a:solidFill>
+                <a:latin typeface="IBM Plex Sans"/>
+                <a:ea typeface="IBM Plex Sans"/>
+                <a:cs typeface="IBM Plex Sans"/>
+              </a:rPr>
+              <a:t>3</a:t>
+            </a:r>
+          </a:p>
+        </p:txBody>
+      </p:sp>
+      <p:sp>
+        <p:nvSpPr>
+          <p:cNvPr id="6" name="TextBox 5"/>
+          <p:cNvSpPr txBox="1"/>
+          <p:nvPr/>
+        </p:nvSpPr>
+        <p:spPr>
+          <a:xfrm>
+            <a:off x="813816" y="1517904"/>
+            <a:ext cx="5120640" cy="2377440"/>
+          </a:xfrm>
+          <a:prstGeom prst="rect">
+            <a:avLst/>
+          </a:prstGeom>
+          <a:noFill/>
+        </p:spPr>
+        <p:txBody>
+          <a:bodyPr wrap="square" lIns="0" rIns="0" tIns="0" bIns="0">
+            <a:spAutoFit/>
+          </a:bodyPr>
+          <a:lstStyle/>
+          <a:p>
+            <a:pPr algn="l" marL="243840" indent="-196342">
+              <a:lnSpc>
+                <a:spcPts val="2700"/>
+              </a:lnSpc>
+              <a:buSzPct val="100000"/>
+              <a:buChar char="•"/>
+            </a:pPr>
+            <a:r>
+              <a:rPr sz="1600" b="0" i="0">
+                <a:solidFill>
+                  <a:srgbClr val="1B1F2A"/>
+                </a:solidFill>
+                <a:latin typeface="IBM Plex Sans"/>
+                <a:ea typeface="IBM Plex Sans"/>
+                <a:cs typeface="IBM Plex Sans"/>
+              </a:rPr>
+              <a:t>Load the .mat file (SciPy)</a:t>
+            </a:r>
+          </a:p>
+          <a:p>
+            <a:pPr algn="l" marL="243840" indent="-196342">
+              <a:lnSpc>
+                <a:spcPts val="2700"/>
+              </a:lnSpc>
+              <a:buSzPct val="100000"/>
+              <a:buChar char="•"/>
+            </a:pPr>
+            <a:r>
+              <a:rPr sz="1600" b="0" i="0">
+                <a:solidFill>
+                  <a:srgbClr val="1B1F2A"/>
+                </a:solidFill>
+                <a:latin typeface="IBM Plex Sans"/>
+                <a:ea typeface="IBM Plex Sans"/>
+                <a:cs typeface="IBM Plex Sans"/>
+              </a:rPr>
+              <a:t>Remove switched-off equipment; renumber buses 0, 1, 2, …</a:t>
+            </a:r>
+          </a:p>
+          <a:p>
+            <a:pPr algn="l" marL="243840" indent="-196342">
+              <a:lnSpc>
+                <a:spcPts val="2700"/>
+              </a:lnSpc>
+              <a:buSzPct val="100000"/>
+              <a:buChar char="•"/>
+            </a:pPr>
+            <a:r>
+              <a:rPr sz="1600" b="0" i="0">
+                <a:solidFill>
+                  <a:srgbClr val="1B1F2A"/>
+                </a:solidFill>
+                <a:latin typeface="IBM Plex Sans"/>
+                <a:ea typeface="IBM Plex Sans"/>
+                <a:cs typeface="IBM Plex Sans"/>
+              </a:rPr>
+              <a:t>Classify buses: slack, PV (generator), PQ (load)</a:t>
+            </a:r>
+          </a:p>
+          <a:p>
+            <a:pPr algn="l" marL="243840" indent="-196342">
+              <a:lnSpc>
+                <a:spcPts val="2700"/>
+              </a:lnSpc>
+              <a:buSzPct val="100000"/>
+              <a:buChar char="•"/>
+            </a:pPr>
+            <a:r>
+              <a:rPr sz="1600" b="0" i="0">
+                <a:solidFill>
+                  <a:srgbClr val="1B1F2A"/>
+                </a:solidFill>
+                <a:latin typeface="IBM Plex Sans"/>
+                <a:ea typeface="IBM Plex Sans"/>
+                <a:cs typeface="IBM Plex Sans"/>
+              </a:rPr>
+              <a:t>Build the admittance matrix Y from the branches</a:t>
+            </a:r>
+          </a:p>
+          <a:p>
+            <a:pPr algn="l" marL="243840" indent="-196342">
+              <a:lnSpc>
+                <a:spcPts val="2700"/>
+              </a:lnSpc>
+              <a:buSzPct val="100000"/>
+              <a:buChar char="•"/>
+            </a:pPr>
+            <a:r>
+              <a:rPr sz="1600" b="0" i="0">
+                <a:solidFill>
+                  <a:srgbClr val="1B1F2A"/>
+                </a:solidFill>
+                <a:latin typeface="IBM Plex Sans"/>
+                <a:ea typeface="IBM Plex Sans"/>
+                <a:cs typeface="IBM Plex Sans"/>
+              </a:rPr>
+              <a:t>Build the specified injections S(spec) from generators and loads</a:t>
+            </a:r>
+          </a:p>
+        </p:txBody>
+      </p:sp>
+      <p:sp>
+        <p:nvSpPr>
+          <p:cNvPr id="7" name="TextBox 6"/>
+          <p:cNvSpPr txBox="1"/>
+          <p:nvPr/>
+        </p:nvSpPr>
+        <p:spPr>
+          <a:xfrm>
+            <a:off x="6309360" y="1517904"/>
+            <a:ext cx="5120640" cy="274320"/>
+          </a:xfrm>
+          <a:prstGeom prst="rect">
+            <a:avLst/>
+          </a:prstGeom>
+          <a:noFill/>
+        </p:spPr>
+        <p:txBody>
+          <a:bodyPr wrap="square" lIns="0" rIns="0" tIns="0" bIns="0">
+            <a:spAutoFit/>
+          </a:bodyPr>
+          <a:lstStyle/>
+          <a:p>
+            <a:pPr algn="l" marL="0" indent="0">
+              <a:buNone/>
+            </a:pPr>
+            <a:r>
+              <a:rPr sz="1600" b="1" i="0">
+                <a:solidFill>
+                  <a:srgbClr val="1B1F2A"/>
+                </a:solidFill>
+                <a:latin typeface="IBM Plex Sans"/>
+                <a:ea typeface="IBM Plex Sans"/>
+                <a:cs typeface="IBM Plex Sans"/>
+              </a:rPr>
+              <a:t>Formulas</a:t>
+            </a:r>
+          </a:p>
+        </p:txBody>
+      </p:sp>
+      <p:pic>
+        <p:nvPicPr>
+          <p:cNvPr id="8" name="Picture 7" descr="image.png"/>
+          <p:cNvPicPr>
+            <a:picLocks noChangeAspect="1"/>
+          </p:cNvPicPr>
+          <p:nvPr/>
+        </p:nvPicPr>
+        <p:blipFill>
+          <a:blip r:embed="rId4"/>
+          <a:stretch>
+            <a:fillRect/>
+          </a:stretch>
+        </p:blipFill>
+        <p:spPr>
+          <a:xfrm>
+            <a:off x="8316468" y="1847088"/>
+            <a:ext cx="1014984" cy="646176"/>
+          </a:xfrm>
+          <a:prstGeom prst="rect">
+            <a:avLst/>
+          </a:prstGeom>
+        </p:spPr>
+      </p:pic>
+      <p:pic>
+        <p:nvPicPr>
+          <p:cNvPr id="9" name="Picture 8" descr="image.png"/>
+          <p:cNvPicPr>
+            <a:picLocks noChangeAspect="1"/>
+          </p:cNvPicPr>
+          <p:nvPr/>
+        </p:nvPicPr>
+        <p:blipFill>
+          <a:blip r:embed="rId5"/>
+          <a:stretch>
+            <a:fillRect/>
+          </a:stretch>
+        </p:blipFill>
+        <p:spPr>
+          <a:xfrm>
+            <a:off x="7098792" y="2432304"/>
+            <a:ext cx="3450336" cy="469392"/>
+          </a:xfrm>
+          <a:prstGeom prst="rect">
+            <a:avLst/>
+          </a:prstGeom>
+        </p:spPr>
+      </p:pic>
+      <p:pic>
+        <p:nvPicPr>
+          <p:cNvPr id="10" name="Picture 9" descr="image.png"/>
+          <p:cNvPicPr>
+            <a:picLocks noChangeAspect="1"/>
+          </p:cNvPicPr>
+          <p:nvPr/>
+        </p:nvPicPr>
+        <p:blipFill>
+          <a:blip r:embed="rId6"/>
+          <a:stretch>
+            <a:fillRect/>
+          </a:stretch>
+        </p:blipFill>
+        <p:spPr>
+          <a:xfrm>
+            <a:off x="8455152" y="2907792"/>
+            <a:ext cx="737616" cy="289560"/>
+          </a:xfrm>
+          <a:prstGeom prst="rect">
+            <a:avLst/>
+          </a:prstGeom>
+        </p:spPr>
+      </p:pic>
+      <p:pic>
+        <p:nvPicPr>
+          <p:cNvPr id="11" name="Picture 10" descr="image.png"/>
+          <p:cNvPicPr>
+            <a:picLocks noChangeAspect="1"/>
+          </p:cNvPicPr>
+          <p:nvPr/>
+        </p:nvPicPr>
+        <p:blipFill>
+          <a:blip r:embed="rId7"/>
+          <a:stretch>
+            <a:fillRect/>
+          </a:stretch>
+        </p:blipFill>
+        <p:spPr>
+          <a:xfrm>
+            <a:off x="7517892" y="3310128"/>
+            <a:ext cx="2612136" cy="597408"/>
+          </a:xfrm>
+          <a:prstGeom prst="rect">
+            <a:avLst/>
+          </a:prstGeom>
+        </p:spPr>
+      </p:pic>
+      <p:sp>
+        <p:nvSpPr>
+          <p:cNvPr id="12" name="TextBox 11"/>
+          <p:cNvSpPr txBox="1"/>
+          <p:nvPr/>
+        </p:nvSpPr>
+        <p:spPr>
+          <a:xfrm>
+            <a:off x="813816" y="4206240"/>
+            <a:ext cx="10881360" cy="274320"/>
+          </a:xfrm>
+          <a:prstGeom prst="rect">
+            <a:avLst/>
+          </a:prstGeom>
+          <a:noFill/>
+        </p:spPr>
+        <p:txBody>
+          <a:bodyPr wrap="square" lIns="0" rIns="0" tIns="0" bIns="0">
+            <a:spAutoFit/>
+          </a:bodyPr>
+          <a:lstStyle/>
+          <a:p>
+            <a:pPr algn="l" marL="0" indent="0">
+              <a:buNone/>
+            </a:pPr>
+            <a:r>
+              <a:rPr sz="1600" b="1" i="0">
+                <a:solidFill>
+                  <a:srgbClr val="1B1F2A"/>
+                </a:solidFill>
+                <a:latin typeface="IBM Plex Sans"/>
+                <a:ea typeface="IBM Plex Sans"/>
+                <a:cs typeface="IBM Plex Sans"/>
+              </a:rPr>
+              <a:t>2-bus example</a:t>
+            </a:r>
+          </a:p>
+        </p:txBody>
+      </p:sp>
+      <p:pic>
+        <p:nvPicPr>
+          <p:cNvPr id="13" name="Picture 12" descr="image.png"/>
+          <p:cNvPicPr>
+            <a:picLocks noChangeAspect="1"/>
+          </p:cNvPicPr>
+          <p:nvPr/>
+        </p:nvPicPr>
+        <p:blipFill>
+          <a:blip r:embed="rId8"/>
+          <a:stretch>
+            <a:fillRect/>
+          </a:stretch>
+        </p:blipFill>
+        <p:spPr>
+          <a:xfrm>
+            <a:off x="3102864" y="4526280"/>
+            <a:ext cx="5992368" cy="646176"/>
+          </a:xfrm>
+          <a:prstGeom prst="rect">
+            <a:avLst/>
+          </a:prstGeom>
+        </p:spPr>
+      </p:pic>
+      <p:pic>
+        <p:nvPicPr>
+          <p:cNvPr id="14" name="Picture 13" descr="image.png"/>
+          <p:cNvPicPr>
+            <a:picLocks noChangeAspect="1"/>
+          </p:cNvPicPr>
+          <p:nvPr/>
+        </p:nvPicPr>
+        <p:blipFill>
+          <a:blip r:embed="rId9"/>
+          <a:stretch>
+            <a:fillRect/>
+          </a:stretch>
+        </p:blipFill>
+        <p:spPr>
+          <a:xfrm>
+            <a:off x="3950208" y="5212080"/>
+            <a:ext cx="4297680" cy="600456"/>
+          </a:xfrm>
+          <a:prstGeom prst="rect">
+            <a:avLst/>
+          </a:prstGeom>
+        </p:spPr>
+      </p:pic>
+    </p:spTree>
+  </p:cSld>
+  <p:clrMapOvr>
+    <a:masterClrMapping/>
+  </p:clrMapOvr>
+</p:sld>
+</file>
+
+<file path=ppt/slides/slide21.xml><?xml version="1.0" encoding="utf-8"?>
+<p:sld xmlns:a="http://schemas.openxmlformats.org/drawingml/2006/main" xmlns:p="http://schemas.openxmlformats.org/presentationml/2006/main" xmlns:r="http://schemas.openxmlformats.org/officeDocument/2006/relationships">
+  <p:cSld>
+    <p:bg>
+      <p:bgPr>
+        <a:solidFill>
+          <a:srgbClr val="FBFBF9"/>
+        </a:solidFill>
+        <a:effectLst/>
+      </p:bgPr>
+    </p:bg>
+    <p:spTree>
+      <p:nvGrpSpPr>
+        <p:cNvPr id="1" name=""/>
+        <p:cNvGrpSpPr/>
+        <p:nvPr/>
+      </p:nvGrpSpPr>
+      <p:grpSpPr/>
+      <p:sp>
+        <p:nvSpPr>
+          <p:cNvPr id="2" name="TextBox 1"/>
+          <p:cNvSpPr txBox="1"/>
+          <p:nvPr/>
+        </p:nvSpPr>
+        <p:spPr>
+          <a:xfrm>
+            <a:off x="813816" y="713232"/>
+            <a:ext cx="10881360" cy="429768"/>
+          </a:xfrm>
+          <a:prstGeom prst="rect">
+            <a:avLst/>
+          </a:prstGeom>
+          <a:noFill/>
+        </p:spPr>
+        <p:txBody>
+          <a:bodyPr wrap="square" lIns="0" rIns="0" tIns="0" bIns="0">
+            <a:spAutoFit/>
+          </a:bodyPr>
+          <a:lstStyle/>
+          <a:p>
+            <a:pPr algn="l" marL="0" indent="0">
+              <a:buNone/>
+            </a:pPr>
+            <a:r>
+              <a:rPr sz="2800" b="1" i="0">
+                <a:solidFill>
+                  <a:srgbClr val="1F3A5F"/>
+                </a:solidFill>
+                <a:latin typeface="IBM Plex Sans"/>
+                <a:ea typeface="IBM Plex Sans"/>
+                <a:cs typeface="IBM Plex Sans"/>
+              </a:rPr>
+              <a:t>What is unknown</a:t>
+            </a:r>
+          </a:p>
+        </p:txBody>
+      </p:sp>
+      <p:pic>
+        <p:nvPicPr>
+          <p:cNvPr id="3" name="Picture 2" descr="image.png"/>
+          <p:cNvPicPr>
+            <a:picLocks noChangeAspect="1"/>
+          </p:cNvPicPr>
+          <p:nvPr/>
+        </p:nvPicPr>
+        <p:blipFill>
+          <a:blip r:embed="rId2"/>
+          <a:stretch>
+            <a:fillRect/>
+          </a:stretch>
+        </p:blipFill>
+        <p:spPr>
+          <a:xfrm>
+            <a:off x="812800" y="1221741"/>
+            <a:ext cx="10566400" cy="20320"/>
+          </a:xfrm>
+          <a:prstGeom prst="rect">
+            <a:avLst/>
+          </a:prstGeom>
+        </p:spPr>
+      </p:pic>
+      <p:sp>
+        <p:nvSpPr>
+          <p:cNvPr id="4" name="TextBox 3"/>
+          <p:cNvSpPr txBox="1"/>
+          <p:nvPr/>
+        </p:nvSpPr>
+        <p:spPr>
+          <a:xfrm>
+            <a:off x="813816" y="6236208"/>
+            <a:ext cx="7845552" cy="237744"/>
+          </a:xfrm>
+          <a:prstGeom prst="rect">
+            <a:avLst/>
+          </a:prstGeom>
+          <a:noFill/>
+        </p:spPr>
+        <p:txBody>
+          <a:bodyPr wrap="square" lIns="0" rIns="0" tIns="0" bIns="0">
+            <a:spAutoFit/>
+          </a:bodyPr>
+          <a:lstStyle/>
+          <a:p>
+            <a:pPr algn="l" marL="0" indent="0">
+              <a:buNone/>
+            </a:pPr>
+            <a:r>
+              <a:rPr sz="1200" b="0" i="0">
+                <a:solidFill>
+                  <a:srgbClr val="6B7280"/>
+                </a:solidFill>
+                <a:latin typeface="IBM Plex Sans"/>
+                <a:ea typeface="IBM Plex Sans"/>
+                <a:cs typeface="IBM Plex Sans"/>
+              </a:rPr>
+              <a:t>Lima-Silva &amp; Freitas (2024): reproduction and improvements</a:t>
+            </a:r>
+          </a:p>
+        </p:txBody>
+      </p:sp>
+      <p:sp>
+        <p:nvSpPr>
+          <p:cNvPr id="5" name="TextBox 4"/>
+          <p:cNvSpPr txBox="1"/>
+          <p:nvPr/>
+        </p:nvSpPr>
+        <p:spPr>
+          <a:xfrm>
+            <a:off x="10058400" y="6236208"/>
+            <a:ext cx="1316736" cy="237744"/>
+          </a:xfrm>
+          <a:prstGeom prst="rect">
+            <a:avLst/>
+          </a:prstGeom>
+          <a:noFill/>
+        </p:spPr>
+        <p:txBody>
+          <a:bodyPr wrap="square" lIns="0" rIns="0" tIns="0" bIns="0">
+            <a:spAutoFit/>
+          </a:bodyPr>
+          <a:lstStyle/>
+          <a:p>
+            <a:pPr algn="r" marL="0" indent="0">
+              <a:buNone/>
+            </a:pPr>
+            <a:r>
+              <a:rPr sz="1200" b="0" i="0">
+                <a:solidFill>
+                  <a:srgbClr val="6B7280"/>
+                </a:solidFill>
+                <a:latin typeface="IBM Plex Sans"/>
+                <a:ea typeface="IBM Plex Sans"/>
+                <a:cs typeface="IBM Plex Sans"/>
+              </a:rPr>
+              <a:t>4</a:t>
+            </a:r>
+          </a:p>
+        </p:txBody>
+      </p:sp>
+      <p:sp>
+        <p:nvSpPr>
+          <p:cNvPr id="6" name="TextBox 5"/>
+          <p:cNvSpPr txBox="1"/>
+          <p:nvPr/>
+        </p:nvSpPr>
+        <p:spPr>
+          <a:xfrm>
+            <a:off x="813816" y="1463040"/>
+            <a:ext cx="10881360" cy="566928"/>
+          </a:xfrm>
+          <a:prstGeom prst="rect">
+            <a:avLst/>
+          </a:prstGeom>
+          <a:noFill/>
+        </p:spPr>
+        <p:txBody>
+          <a:bodyPr wrap="square" lIns="0" rIns="0" tIns="0" bIns="0">
+            <a:spAutoFit/>
+          </a:bodyPr>
+          <a:lstStyle/>
+          <a:p>
+            <a:pPr algn="l" marL="0" indent="0">
+              <a:lnSpc>
+                <a:spcPts val="2400"/>
+              </a:lnSpc>
+              <a:buNone/>
+            </a:pPr>
+            <a:r>
+              <a:rPr sz="1600" b="0" i="0">
+                <a:solidFill>
+                  <a:srgbClr val="1B1F2A"/>
+                </a:solidFill>
+                <a:latin typeface="IBM Plex Sans"/>
+                <a:ea typeface="IBM Plex Sans"/>
+                <a:cs typeface="IBM Plex Sans"/>
+              </a:rPr>
+              <a:t>Each bus has four quantities: |V|, θ, P, Q. Two are fixed by what is controlled there; the solver finds the unknown voltages.</a:t>
+            </a:r>
+          </a:p>
+        </p:txBody>
+      </p:sp>
+      <p:graphicFrame>
+        <p:nvGraphicFramePr>
+          <p:cNvPr id="7" name="Table 6"/>
+          <p:cNvGraphicFramePr>
+            <a:graphicFrameLocks noGrp="1"/>
+          </p:cNvGraphicFramePr>
+          <p:nvPr/>
+        </p:nvGraphicFramePr>
+        <p:xfrm>
+          <a:off x="822960" y="2157984"/>
+          <a:ext cx="10552176" cy="1536192"/>
+        </p:xfrm>
+        <a:graphic>
+          <a:graphicData uri="http://schemas.openxmlformats.org/drawingml/2006/table">
+            <a:tbl>
+              <a:tblPr/>
+              <a:tblGrid>
+                <a:gridCol w="1737360"/>
+                <a:gridCol w="2103120"/>
+                <a:gridCol w="1920240"/>
+                <a:gridCol w="4791456"/>
+              </a:tblGrid>
+              <a:tr h="384048">
+                <a:tc>
+                  <a:txBody>
+                    <a:bodyPr/>
+                    <a:lstStyle/>
+                    <a:p>
+                      <a:r>
+                        <a:rPr sz="1400" b="1" i="0">
+                          <a:solidFill>
+                            <a:srgbClr val="1B1F2A"/>
+                          </a:solidFill>
+                          <a:latin typeface="IBM Plex Sans"/>
+                          <a:ea typeface="IBM Plex Sans"/>
+                          <a:cs typeface="IBM Plex Sans"/>
+                        </a:rPr>
+                        <a:t>Bus type</a:t>
+                      </a:r>
+                    </a:p>
+                  </a:txBody>
+                  <a:tcPr marL="66675" marR="66675" marT="66675" marB="66675">
+                    <a:lnL w="12700" cap="flat" cmpd="sng" algn="ctr">
+                      <a:solidFill>
+                        <a:srgbClr val="C8C8C6"/>
+                      </a:solidFill>
+                      <a:prstDash val="solid"/>
+                      <a:round/>
+                      <a:headEnd type="none" w="med" len="med"/>
+                      <a:tailEnd type="none" w="med" len="med"/>
+                    </a:lnL>
+                    <a:lnR w="12700" cap="flat" cmpd="sng" algn="ctr">
+                      <a:solidFill>
+                        <a:srgbClr val="BABAB8"/>
+                      </a:solidFill>
+                      <a:prstDash val="solid"/>
+                      <a:round/>
+                      <a:headEnd type="none" w="med" len="med"/>
+                      <a:tailEnd type="none" w="med" len="med"/>
+                    </a:lnR>
+                    <a:lnT w="12700" cap="flat" cmpd="sng" algn="ctr">
+                      <a:solidFill>
+                        <a:srgbClr val="C8C8C6"/>
+                      </a:solidFill>
+                      <a:prstDash val="solid"/>
+                      <a:round/>
+                      <a:headEnd type="none" w="med" len="med"/>
+                      <a:tailEnd type="none" w="med" len="med"/>
+                    </a:lnT>
+                    <a:lnB w="12700" cap="flat" cmpd="sng" algn="ctr">
+                      <a:solidFill>
+                        <a:srgbClr val="BABAB8"/>
+                      </a:solidFill>
+                      <a:prstDash val="solid"/>
+                      <a:round/>
+                      <a:headEnd type="none" w="med" len="med"/>
+                      <a:tailEnd type="none" w="med" len="med"/>
+                    </a:lnB>
+                    <a:solidFill>
+                      <a:srgbClr val="E9E9E7"/>
+                    </a:solidFill>
+                  </a:tcPr>
+                </a:tc>
+                <a:tc>
+                  <a:txBody>
+                    <a:bodyPr/>
+                    <a:lstStyle/>
+                    <a:p>
+                      <a:r>
+                        <a:rPr sz="1400" b="1" i="0">
+                          <a:solidFill>
+                            <a:srgbClr val="1B1F2A"/>
+                          </a:solidFill>
+                          <a:latin typeface="IBM Plex Sans"/>
+                          <a:ea typeface="IBM Plex Sans"/>
+                          <a:cs typeface="IBM Plex Sans"/>
+                        </a:rPr>
+                        <a:t>Fixed</a:t>
+                      </a:r>
+                    </a:p>
+                  </a:txBody>
+                  <a:tcPr marL="66675" marR="66675" marT="66675" marB="66675">
+                    <a:lnL w="12700" cap="flat" cmpd="sng" algn="ctr">
+                      <a:solidFill>
+                        <a:srgbClr val="C8C8C6"/>
+                      </a:solidFill>
+                      <a:prstDash val="solid"/>
+                      <a:round/>
+                      <a:headEnd type="none" w="med" len="med"/>
+                      <a:tailEnd type="none" w="med" len="med"/>
+                    </a:lnL>
+                    <a:lnR w="12700" cap="flat" cmpd="sng" algn="ctr">
+                      <a:solidFill>
+                        <a:srgbClr val="BABAB8"/>
+                      </a:solidFill>
+                      <a:prstDash val="solid"/>
+                      <a:round/>
+                      <a:headEnd type="none" w="med" len="med"/>
+                      <a:tailEnd type="none" w="med" len="med"/>
+                    </a:lnR>
+                    <a:lnT w="12700" cap="flat" cmpd="sng" algn="ctr">
+                      <a:solidFill>
+                        <a:srgbClr val="C8C8C6"/>
+                      </a:solidFill>
+                      <a:prstDash val="solid"/>
+                      <a:round/>
+                      <a:headEnd type="none" w="med" len="med"/>
+                      <a:tailEnd type="none" w="med" len="med"/>
+                    </a:lnT>
+                    <a:lnB w="12700" cap="flat" cmpd="sng" algn="ctr">
+                      <a:solidFill>
+                        <a:srgbClr val="BABAB8"/>
+                      </a:solidFill>
+                      <a:prstDash val="solid"/>
+                      <a:round/>
+                      <a:headEnd type="none" w="med" len="med"/>
+                      <a:tailEnd type="none" w="med" len="med"/>
+                    </a:lnB>
+                    <a:solidFill>
+                      <a:srgbClr val="E9E9E7"/>
+                    </a:solidFill>
+                  </a:tcPr>
+                </a:tc>
+                <a:tc>
+                  <a:txBody>
+                    <a:bodyPr/>
+                    <a:lstStyle/>
+                    <a:p>
+                      <a:r>
+                        <a:rPr sz="1400" b="1" i="0">
+                          <a:solidFill>
+                            <a:srgbClr val="1B1F2A"/>
+                          </a:solidFill>
+                          <a:latin typeface="IBM Plex Sans"/>
+                          <a:ea typeface="IBM Plex Sans"/>
+                          <a:cs typeface="IBM Plex Sans"/>
+                        </a:rPr>
+                        <a:t>Unknown</a:t>
+                      </a:r>
+                    </a:p>
+                  </a:txBody>
+                  <a:tcPr marL="66675" marR="66675" marT="66675" marB="66675">
+                    <a:lnL w="12700" cap="flat" cmpd="sng" algn="ctr">
+                      <a:solidFill>
+                        <a:srgbClr val="C8C8C6"/>
+                      </a:solidFill>
+                      <a:prstDash val="solid"/>
+                      <a:round/>
+                      <a:headEnd type="none" w="med" len="med"/>
+                      <a:tailEnd type="none" w="med" len="med"/>
+                    </a:lnL>
+                    <a:lnR w="12700" cap="flat" cmpd="sng" algn="ctr">
+                      <a:solidFill>
+                        <a:srgbClr val="BABAB8"/>
+                      </a:solidFill>
+                      <a:prstDash val="solid"/>
+                      <a:round/>
+                      <a:headEnd type="none" w="med" len="med"/>
+                      <a:tailEnd type="none" w="med" len="med"/>
+                    </a:lnR>
+                    <a:lnT w="12700" cap="flat" cmpd="sng" algn="ctr">
+                      <a:solidFill>
+                        <a:srgbClr val="C8C8C6"/>
+                      </a:solidFill>
+                      <a:prstDash val="solid"/>
+                      <a:round/>
+                      <a:headEnd type="none" w="med" len="med"/>
+                      <a:tailEnd type="none" w="med" len="med"/>
+                    </a:lnT>
+                    <a:lnB w="12700" cap="flat" cmpd="sng" algn="ctr">
+                      <a:solidFill>
+                        <a:srgbClr val="BABAB8"/>
+                      </a:solidFill>
+                      <a:prstDash val="solid"/>
+                      <a:round/>
+                      <a:headEnd type="none" w="med" len="med"/>
+                      <a:tailEnd type="none" w="med" len="med"/>
+                    </a:lnB>
+                    <a:solidFill>
+                      <a:srgbClr val="E9E9E7"/>
+                    </a:solidFill>
+                  </a:tcPr>
+                </a:tc>
+                <a:tc>
+                  <a:txBody>
+                    <a:bodyPr/>
+                    <a:lstStyle/>
+                    <a:p>
+                      <a:r>
+                        <a:rPr sz="1400" b="1" i="0">
+                          <a:solidFill>
+                            <a:srgbClr val="1B1F2A"/>
+                          </a:solidFill>
+                          <a:latin typeface="IBM Plex Sans"/>
+                          <a:ea typeface="IBM Plex Sans"/>
+                          <a:cs typeface="IBM Plex Sans"/>
+                        </a:rPr>
+                        <a:t>Why</a:t>
+                      </a:r>
+                    </a:p>
+                  </a:txBody>
+                  <a:tcPr marL="66675" marR="66675" marT="66675" marB="66675">
+                    <a:lnL w="12700" cap="flat" cmpd="sng" algn="ctr">
+                      <a:solidFill>
+                        <a:srgbClr val="C8C8C6"/>
+                      </a:solidFill>
+                      <a:prstDash val="solid"/>
+                      <a:round/>
+                      <a:headEnd type="none" w="med" len="med"/>
+                      <a:tailEnd type="none" w="med" len="med"/>
+                    </a:lnL>
+                    <a:lnR w="12700" cap="flat" cmpd="sng" algn="ctr">
+                      <a:solidFill>
+                        <a:srgbClr val="BABAB8"/>
+                      </a:solidFill>
+                      <a:prstDash val="solid"/>
+                      <a:round/>
+                      <a:headEnd type="none" w="med" len="med"/>
+                      <a:tailEnd type="none" w="med" len="med"/>
+                    </a:lnR>
+                    <a:lnT w="12700" cap="flat" cmpd="sng" algn="ctr">
+                      <a:solidFill>
+                        <a:srgbClr val="C8C8C6"/>
+                      </a:solidFill>
+                      <a:prstDash val="solid"/>
+                      <a:round/>
+                      <a:headEnd type="none" w="med" len="med"/>
+                      <a:tailEnd type="none" w="med" len="med"/>
+                    </a:lnT>
+                    <a:lnB w="12700" cap="flat" cmpd="sng" algn="ctr">
+                      <a:solidFill>
+                        <a:srgbClr val="BABAB8"/>
+                      </a:solidFill>
+                      <a:prstDash val="solid"/>
+                      <a:round/>
+                      <a:headEnd type="none" w="med" len="med"/>
+                      <a:tailEnd type="none" w="med" len="med"/>
+                    </a:lnB>
+                    <a:solidFill>
+                      <a:srgbClr val="E9E9E7"/>
+                    </a:solidFill>
+                  </a:tcPr>
+                </a:tc>
+              </a:tr>
+              <a:tr h="384048">
+                <a:tc>
+                  <a:txBody>
+                    <a:bodyPr/>
+                    <a:lstStyle/>
+                    <a:p>
+                      <a:r>
+                        <a:rPr sz="1400" b="0" i="0">
+                          <a:solidFill>
+                            <a:srgbClr val="1B1F2A"/>
+                          </a:solidFill>
+                          <a:latin typeface="IBM Plex Sans"/>
+                          <a:ea typeface="IBM Plex Sans"/>
+                          <a:cs typeface="IBM Plex Sans"/>
+                        </a:rPr>
+                        <a:t>Slack</a:t>
+                      </a:r>
+                    </a:p>
+                  </a:txBody>
+                  <a:tcPr marL="66675" marR="66675" marT="66675" marB="66675">
+                    <a:lnL w="12700" cap="flat" cmpd="sng" algn="ctr">
+                      <a:solidFill>
+                        <a:srgbClr val="C8C8C6"/>
+                      </a:solidFill>
+                      <a:prstDash val="solid"/>
+                      <a:round/>
+                      <a:headEnd type="none" w="med" len="med"/>
+                      <a:tailEnd type="none" w="med" len="med"/>
+                    </a:lnL>
+                    <a:lnR w="12700" cap="flat" cmpd="sng" algn="ctr">
+                      <a:solidFill>
+                        <a:srgbClr val="C8C8C6"/>
+                      </a:solidFill>
+                      <a:prstDash val="solid"/>
+                      <a:round/>
+                      <a:headEnd type="none" w="med" len="med"/>
+                      <a:tailEnd type="none" w="med" len="med"/>
+                    </a:lnR>
+                    <a:lnT w="12700" cap="flat" cmpd="sng" algn="ctr">
+                      <a:solidFill>
+                        <a:srgbClr val="BABAB8"/>
+                      </a:solidFill>
+                      <a:prstDash val="solid"/>
+                      <a:round/>
+                      <a:headEnd type="none" w="med" len="med"/>
+                      <a:tailEnd type="none" w="med" len="med"/>
+                    </a:lnT>
+                    <a:lnB w="12700" cap="flat" cmpd="sng" algn="ctr">
+                      <a:solidFill>
+                        <a:srgbClr val="C8C8C6"/>
+                      </a:solidFill>
+                      <a:prstDash val="solid"/>
+                      <a:round/>
+                      <a:headEnd type="none" w="med" len="med"/>
+                      <a:tailEnd type="none" w="med" len="med"/>
+                    </a:lnB>
+                  </a:tcPr>
+                </a:tc>
+                <a:tc>
+                  <a:txBody>
+                    <a:bodyPr/>
+                    <a:lstStyle/>
+                    <a:p>
+                      <a:r>
+                        <a:rPr sz="1400" b="0" i="0">
+                          <a:solidFill>
+                            <a:srgbClr val="1B1F2A"/>
+                          </a:solidFill>
+                          <a:latin typeface="IBM Plex Sans"/>
+                          <a:ea typeface="IBM Plex Sans"/>
+                          <a:cs typeface="IBM Plex Sans"/>
+                        </a:rPr>
+                        <a:t>|V|, θ = 0</a:t>
+                      </a:r>
+                    </a:p>
+                  </a:txBody>
+                  <a:tcPr marL="66675" marR="66675" marT="66675" marB="66675">
+                    <a:lnL w="12700" cap="flat" cmpd="sng" algn="ctr">
+                      <a:solidFill>
+                        <a:srgbClr val="C8C8C6"/>
+                      </a:solidFill>
+                      <a:prstDash val="solid"/>
+                      <a:round/>
+                      <a:headEnd type="none" w="med" len="med"/>
+                      <a:tailEnd type="none" w="med" len="med"/>
+                    </a:lnL>
+                    <a:lnR w="12700" cap="flat" cmpd="sng" algn="ctr">
+                      <a:solidFill>
+                        <a:srgbClr val="C8C8C6"/>
+                      </a:solidFill>
+                      <a:prstDash val="solid"/>
+                      <a:round/>
+                      <a:headEnd type="none" w="med" len="med"/>
+                      <a:tailEnd type="none" w="med" len="med"/>
+                    </a:lnR>
+                    <a:lnT w="12700" cap="flat" cmpd="sng" algn="ctr">
+                      <a:solidFill>
+                        <a:srgbClr val="BABAB8"/>
+                      </a:solidFill>
+                      <a:prstDash val="solid"/>
+                      <a:round/>
+                      <a:headEnd type="none" w="med" len="med"/>
+                      <a:tailEnd type="none" w="med" len="med"/>
+                    </a:lnT>
+                    <a:lnB w="12700" cap="flat" cmpd="sng" algn="ctr">
+                      <a:solidFill>
+                        <a:srgbClr val="C8C8C6"/>
+                      </a:solidFill>
+                      <a:prstDash val="solid"/>
+                      <a:round/>
+                      <a:headEnd type="none" w="med" len="med"/>
+                      <a:tailEnd type="none" w="med" len="med"/>
+                    </a:lnB>
+                  </a:tcPr>
+                </a:tc>
+                <a:tc>
+                  <a:txBody>
+                    <a:bodyPr/>
+                    <a:lstStyle/>
+                    <a:p>
+                      <a:r>
+                        <a:rPr sz="1400" b="0" i="0">
+                          <a:solidFill>
+                            <a:srgbClr val="1B1F2A"/>
+                          </a:solidFill>
+                          <a:latin typeface="IBM Plex Sans"/>
+                          <a:ea typeface="IBM Plex Sans"/>
+                          <a:cs typeface="IBM Plex Sans"/>
+                        </a:rPr>
+                        <a:t>none (P, Q are outputs)</a:t>
+                      </a:r>
+                    </a:p>
+                  </a:txBody>
+                  <a:tcPr marL="66675" marR="66675" marT="66675" marB="66675">
+                    <a:lnL w="12700" cap="flat" cmpd="sng" algn="ctr">
+                      <a:solidFill>
+                        <a:srgbClr val="C8C8C6"/>
+                      </a:solidFill>
+                      <a:prstDash val="solid"/>
+                      <a:round/>
+                      <a:headEnd type="none" w="med" len="med"/>
+                      <a:tailEnd type="none" w="med" len="med"/>
+                    </a:lnL>
+                    <a:lnR w="12700" cap="flat" cmpd="sng" algn="ctr">
+                      <a:solidFill>
+                        <a:srgbClr val="C8C8C6"/>
+                      </a:solidFill>
+                      <a:prstDash val="solid"/>
+                      <a:round/>
+                      <a:headEnd type="none" w="med" len="med"/>
+                      <a:tailEnd type="none" w="med" len="med"/>
+                    </a:lnR>
+                    <a:lnT w="12700" cap="flat" cmpd="sng" algn="ctr">
+                      <a:solidFill>
+                        <a:srgbClr val="BABAB8"/>
+                      </a:solidFill>
+                      <a:prstDash val="solid"/>
+                      <a:round/>
+                      <a:headEnd type="none" w="med" len="med"/>
+                      <a:tailEnd type="none" w="med" len="med"/>
+                    </a:lnT>
+                    <a:lnB w="12700" cap="flat" cmpd="sng" algn="ctr">
+                      <a:solidFill>
+                        <a:srgbClr val="C8C8C6"/>
+                      </a:solidFill>
+                      <a:prstDash val="solid"/>
+                      <a:round/>
+                      <a:headEnd type="none" w="med" len="med"/>
+                      <a:tailEnd type="none" w="med" len="med"/>
+                    </a:lnB>
+                  </a:tcPr>
+                </a:tc>
+                <a:tc>
+                  <a:txBody>
+                    <a:bodyPr/>
+                    <a:lstStyle/>
+                    <a:p>
+                      <a:r>
+                        <a:rPr sz="1400" b="0" i="0">
+                          <a:solidFill>
+                            <a:srgbClr val="1B1F2A"/>
+                          </a:solidFill>
+                          <a:latin typeface="IBM Plex Sans"/>
+                          <a:ea typeface="IBM Plex Sans"/>
+                          <a:cs typeface="IBM Plex Sans"/>
+                        </a:rPr>
+                        <a:t>supplies the losses; angle reference</a:t>
+                      </a:r>
+                    </a:p>
+                  </a:txBody>
+                  <a:tcPr marL="66675" marR="66675" marT="66675" marB="66675">
+                    <a:lnL w="12700" cap="flat" cmpd="sng" algn="ctr">
+                      <a:solidFill>
+                        <a:srgbClr val="C8C8C6"/>
+                      </a:solidFill>
+                      <a:prstDash val="solid"/>
+                      <a:round/>
+                      <a:headEnd type="none" w="med" len="med"/>
+                      <a:tailEnd type="none" w="med" len="med"/>
+                    </a:lnL>
+                    <a:lnR w="12700" cap="flat" cmpd="sng" algn="ctr">
+                      <a:solidFill>
+                        <a:srgbClr val="C8C8C6"/>
+                      </a:solidFill>
+                      <a:prstDash val="solid"/>
+                      <a:round/>
+                      <a:headEnd type="none" w="med" len="med"/>
+                      <a:tailEnd type="none" w="med" len="med"/>
+                    </a:lnR>
+                    <a:lnT w="12700" cap="flat" cmpd="sng" algn="ctr">
+                      <a:solidFill>
+                        <a:srgbClr val="BABAB8"/>
+                      </a:solidFill>
+                      <a:prstDash val="solid"/>
+                      <a:round/>
+                      <a:headEnd type="none" w="med" len="med"/>
+                      <a:tailEnd type="none" w="med" len="med"/>
+                    </a:lnT>
+                    <a:lnB w="12700" cap="flat" cmpd="sng" algn="ctr">
+                      <a:solidFill>
+                        <a:srgbClr val="C8C8C6"/>
+                      </a:solidFill>
+                      <a:prstDash val="solid"/>
+                      <a:round/>
+                      <a:headEnd type="none" w="med" len="med"/>
+                      <a:tailEnd type="none" w="med" len="med"/>
+                    </a:lnB>
+                  </a:tcPr>
+                </a:tc>
+              </a:tr>
+              <a:tr h="384048">
+                <a:tc>
+                  <a:txBody>
+                    <a:bodyPr/>
+                    <a:lstStyle/>
+                    <a:p>
+                      <a:r>
+                        <a:rPr sz="1400" b="0" i="0">
+                          <a:solidFill>
+                            <a:srgbClr val="1B1F2A"/>
+                          </a:solidFill>
+                          <a:latin typeface="IBM Plex Sans"/>
+                          <a:ea typeface="IBM Plex Sans"/>
+                          <a:cs typeface="IBM Plex Sans"/>
+                        </a:rPr>
+                        <a:t>PV (generator)</a:t>
+                      </a:r>
+                    </a:p>
+                  </a:txBody>
+                  <a:tcPr marL="66675" marR="66675" marT="66675" marB="66675">
+                    <a:lnL w="12700" cap="flat" cmpd="sng" algn="ctr">
+                      <a:solidFill>
+                        <a:srgbClr val="C8C8C6"/>
+                      </a:solidFill>
+                      <a:prstDash val="solid"/>
+                      <a:round/>
+                      <a:headEnd type="none" w="med" len="med"/>
+                      <a:tailEnd type="none" w="med" len="med"/>
+                    </a:lnL>
+                    <a:lnR w="12700" cap="flat" cmpd="sng" algn="ctr">
+                      <a:solidFill>
+                        <a:srgbClr val="C8C8C6"/>
+                      </a:solidFill>
+                      <a:prstDash val="solid"/>
+                      <a:round/>
+                      <a:headEnd type="none" w="med" len="med"/>
+                      <a:tailEnd type="none" w="med" len="med"/>
+                    </a:lnR>
+                    <a:lnT w="12700" cap="flat" cmpd="sng" algn="ctr">
+                      <a:solidFill>
+                        <a:srgbClr val="BABAB8"/>
+                      </a:solidFill>
+                      <a:prstDash val="solid"/>
+                      <a:round/>
+                      <a:headEnd type="none" w="med" len="med"/>
+                      <a:tailEnd type="none" w="med" len="med"/>
+                    </a:lnT>
+                    <a:lnB w="12700" cap="flat" cmpd="sng" algn="ctr">
+                      <a:solidFill>
+                        <a:srgbClr val="C8C8C6"/>
+                      </a:solidFill>
+                      <a:prstDash val="solid"/>
+                      <a:round/>
+                      <a:headEnd type="none" w="med" len="med"/>
+                      <a:tailEnd type="none" w="med" len="med"/>
+                    </a:lnB>
+                  </a:tcPr>
+                </a:tc>
+                <a:tc>
+                  <a:txBody>
+                    <a:bodyPr/>
+                    <a:lstStyle/>
+                    <a:p>
+                      <a:r>
+                        <a:rPr sz="1400" b="0" i="0">
+                          <a:solidFill>
+                            <a:srgbClr val="1B1F2A"/>
+                          </a:solidFill>
+                          <a:latin typeface="IBM Plex Sans"/>
+                          <a:ea typeface="IBM Plex Sans"/>
+                          <a:cs typeface="IBM Plex Sans"/>
+                        </a:rPr>
+                        <a:t>P, |V|</a:t>
+                      </a:r>
+                    </a:p>
+                  </a:txBody>
+                  <a:tcPr marL="66675" marR="66675" marT="66675" marB="66675">
+                    <a:lnL w="12700" cap="flat" cmpd="sng" algn="ctr">
+                      <a:solidFill>
+                        <a:srgbClr val="C8C8C6"/>
+                      </a:solidFill>
+                      <a:prstDash val="solid"/>
+                      <a:round/>
+                      <a:headEnd type="none" w="med" len="med"/>
+                      <a:tailEnd type="none" w="med" len="med"/>
+                    </a:lnL>
+                    <a:lnR w="12700" cap="flat" cmpd="sng" algn="ctr">
+                      <a:solidFill>
+                        <a:srgbClr val="C8C8C6"/>
+                      </a:solidFill>
+                      <a:prstDash val="solid"/>
+                      <a:round/>
+                      <a:headEnd type="none" w="med" len="med"/>
+                      <a:tailEnd type="none" w="med" len="med"/>
+                    </a:lnR>
+                    <a:lnT w="12700" cap="flat" cmpd="sng" algn="ctr">
+                      <a:solidFill>
+                        <a:srgbClr val="BABAB8"/>
+                      </a:solidFill>
+                      <a:prstDash val="solid"/>
+                      <a:round/>
+                      <a:headEnd type="none" w="med" len="med"/>
+                      <a:tailEnd type="none" w="med" len="med"/>
+                    </a:lnT>
+                    <a:lnB w="12700" cap="flat" cmpd="sng" algn="ctr">
+                      <a:solidFill>
+                        <a:srgbClr val="C8C8C6"/>
+                      </a:solidFill>
+                      <a:prstDash val="solid"/>
+                      <a:round/>
+                      <a:headEnd type="none" w="med" len="med"/>
+                      <a:tailEnd type="none" w="med" len="med"/>
+                    </a:lnB>
+                  </a:tcPr>
+                </a:tc>
+                <a:tc>
+                  <a:txBody>
+                    <a:bodyPr/>
+                    <a:lstStyle/>
+                    <a:p>
+                      <a:r>
+                        <a:rPr sz="1400" b="0" i="0">
+                          <a:solidFill>
+                            <a:srgbClr val="1B1F2A"/>
+                          </a:solidFill>
+                          <a:latin typeface="IBM Plex Sans"/>
+                          <a:ea typeface="IBM Plex Sans"/>
+                          <a:cs typeface="IBM Plex Sans"/>
+                        </a:rPr>
+                        <a:t>θ</a:t>
+                      </a:r>
+                    </a:p>
+                  </a:txBody>
+                  <a:tcPr marL="66675" marR="66675" marT="66675" marB="66675">
+                    <a:lnL w="12700" cap="flat" cmpd="sng" algn="ctr">
+                      <a:solidFill>
+                        <a:srgbClr val="C8C8C6"/>
+                      </a:solidFill>
+                      <a:prstDash val="solid"/>
+                      <a:round/>
+                      <a:headEnd type="none" w="med" len="med"/>
+                      <a:tailEnd type="none" w="med" len="med"/>
+                    </a:lnL>
+                    <a:lnR w="12700" cap="flat" cmpd="sng" algn="ctr">
+                      <a:solidFill>
+                        <a:srgbClr val="C8C8C6"/>
+                      </a:solidFill>
+                      <a:prstDash val="solid"/>
+                      <a:round/>
+                      <a:headEnd type="none" w="med" len="med"/>
+                      <a:tailEnd type="none" w="med" len="med"/>
+                    </a:lnR>
+                    <a:lnT w="12700" cap="flat" cmpd="sng" algn="ctr">
+                      <a:solidFill>
+                        <a:srgbClr val="BABAB8"/>
+                      </a:solidFill>
+                      <a:prstDash val="solid"/>
+                      <a:round/>
+                      <a:headEnd type="none" w="med" len="med"/>
+                      <a:tailEnd type="none" w="med" len="med"/>
+                    </a:lnT>
+                    <a:lnB w="12700" cap="flat" cmpd="sng" algn="ctr">
+                      <a:solidFill>
+                        <a:srgbClr val="C8C8C6"/>
+                      </a:solidFill>
+                      <a:prstDash val="solid"/>
+                      <a:round/>
+                      <a:headEnd type="none" w="med" len="med"/>
+                      <a:tailEnd type="none" w="med" len="med"/>
+                    </a:lnB>
+                  </a:tcPr>
+                </a:tc>
+                <a:tc>
+                  <a:txBody>
+                    <a:bodyPr/>
+                    <a:lstStyle/>
+                    <a:p>
+                      <a:r>
+                        <a:rPr sz="1400" b="0" i="0">
+                          <a:solidFill>
+                            <a:srgbClr val="1B1F2A"/>
+                          </a:solidFill>
+                          <a:latin typeface="IBM Plex Sans"/>
+                          <a:ea typeface="IBM Plex Sans"/>
+                          <a:cs typeface="IBM Plex Sans"/>
+                        </a:rPr>
+                        <a:t>the plant sets P and holds its voltage</a:t>
+                      </a:r>
+                    </a:p>
+                  </a:txBody>
+                  <a:tcPr marL="66675" marR="66675" marT="66675" marB="66675">
+                    <a:lnL w="12700" cap="flat" cmpd="sng" algn="ctr">
+                      <a:solidFill>
+                        <a:srgbClr val="C8C8C6"/>
+                      </a:solidFill>
+                      <a:prstDash val="solid"/>
+                      <a:round/>
+                      <a:headEnd type="none" w="med" len="med"/>
+                      <a:tailEnd type="none" w="med" len="med"/>
+                    </a:lnL>
+                    <a:lnR w="12700" cap="flat" cmpd="sng" algn="ctr">
+                      <a:solidFill>
+                        <a:srgbClr val="C8C8C6"/>
+                      </a:solidFill>
+                      <a:prstDash val="solid"/>
+                      <a:round/>
+                      <a:headEnd type="none" w="med" len="med"/>
+                      <a:tailEnd type="none" w="med" len="med"/>
+                    </a:lnR>
+                    <a:lnT w="12700" cap="flat" cmpd="sng" algn="ctr">
+                      <a:solidFill>
+                        <a:srgbClr val="BABAB8"/>
+                      </a:solidFill>
+                      <a:prstDash val="solid"/>
+                      <a:round/>
+                      <a:headEnd type="none" w="med" len="med"/>
+                      <a:tailEnd type="none" w="med" len="med"/>
+                    </a:lnT>
+                    <a:lnB w="12700" cap="flat" cmpd="sng" algn="ctr">
+                      <a:solidFill>
+                        <a:srgbClr val="C8C8C6"/>
+                      </a:solidFill>
+                      <a:prstDash val="solid"/>
+                      <a:round/>
+                      <a:headEnd type="none" w="med" len="med"/>
+                      <a:tailEnd type="none" w="med" len="med"/>
+                    </a:lnB>
+                  </a:tcPr>
+                </a:tc>
+              </a:tr>
+              <a:tr h="384048">
+                <a:tc>
+                  <a:txBody>
+                    <a:bodyPr/>
+                    <a:lstStyle/>
+                    <a:p>
+                      <a:r>
+                        <a:rPr sz="1400" b="0" i="0">
+                          <a:solidFill>
+                            <a:srgbClr val="1B1F2A"/>
+                          </a:solidFill>
+                          <a:latin typeface="IBM Plex Sans"/>
+                          <a:ea typeface="IBM Plex Sans"/>
+                          <a:cs typeface="IBM Plex Sans"/>
+                        </a:rPr>
+                        <a:t>PQ (load)</a:t>
+                      </a:r>
+                    </a:p>
+                  </a:txBody>
+                  <a:tcPr marL="66675" marR="66675" marT="66675" marB="66675">
+                    <a:lnL w="12700" cap="flat" cmpd="sng" algn="ctr">
+                      <a:solidFill>
+                        <a:srgbClr val="C8C8C6"/>
+                      </a:solidFill>
+                      <a:prstDash val="solid"/>
+                      <a:round/>
+                      <a:headEnd type="none" w="med" len="med"/>
+                      <a:tailEnd type="none" w="med" len="med"/>
+                    </a:lnL>
+                    <a:lnR w="12700" cap="flat" cmpd="sng" algn="ctr">
+                      <a:solidFill>
+                        <a:srgbClr val="C8C8C6"/>
+                      </a:solidFill>
+                      <a:prstDash val="solid"/>
+                      <a:round/>
+                      <a:headEnd type="none" w="med" len="med"/>
+                      <a:tailEnd type="none" w="med" len="med"/>
+                    </a:lnR>
+                    <a:lnT w="12700" cap="flat" cmpd="sng" algn="ctr">
+                      <a:solidFill>
+                        <a:srgbClr val="BABAB8"/>
+                      </a:solidFill>
+                      <a:prstDash val="solid"/>
+                      <a:round/>
+                      <a:headEnd type="none" w="med" len="med"/>
+                      <a:tailEnd type="none" w="med" len="med"/>
+                    </a:lnT>
+                    <a:lnB w="12700" cap="flat" cmpd="sng" algn="ctr">
+                      <a:solidFill>
+                        <a:srgbClr val="C8C8C6"/>
+                      </a:solidFill>
+                      <a:prstDash val="solid"/>
+                      <a:round/>
+                      <a:headEnd type="none" w="med" len="med"/>
+                      <a:tailEnd type="none" w="med" len="med"/>
+                    </a:lnB>
+                  </a:tcPr>
+                </a:tc>
+                <a:tc>
+                  <a:txBody>
+                    <a:bodyPr/>
+                    <a:lstStyle/>
+                    <a:p>
+                      <a:r>
+                        <a:rPr sz="1400" b="0" i="0">
+                          <a:solidFill>
+                            <a:srgbClr val="1B1F2A"/>
+                          </a:solidFill>
+                          <a:latin typeface="IBM Plex Sans"/>
+                          <a:ea typeface="IBM Plex Sans"/>
+                          <a:cs typeface="IBM Plex Sans"/>
+                        </a:rPr>
+                        <a:t>P, Q</a:t>
+                      </a:r>
+                    </a:p>
+                  </a:txBody>
+                  <a:tcPr marL="66675" marR="66675" marT="66675" marB="66675">
+                    <a:lnL w="12700" cap="flat" cmpd="sng" algn="ctr">
+                      <a:solidFill>
+                        <a:srgbClr val="C8C8C6"/>
+                      </a:solidFill>
+                      <a:prstDash val="solid"/>
+                      <a:round/>
+                      <a:headEnd type="none" w="med" len="med"/>
+                      <a:tailEnd type="none" w="med" len="med"/>
+                    </a:lnL>
+                    <a:lnR w="12700" cap="flat" cmpd="sng" algn="ctr">
+                      <a:solidFill>
+                        <a:srgbClr val="C8C8C6"/>
+                      </a:solidFill>
+                      <a:prstDash val="solid"/>
+                      <a:round/>
+                      <a:headEnd type="none" w="med" len="med"/>
+                      <a:tailEnd type="none" w="med" len="med"/>
+                    </a:lnR>
+                    <a:lnT w="12700" cap="flat" cmpd="sng" algn="ctr">
+                      <a:solidFill>
+                        <a:srgbClr val="BABAB8"/>
+                      </a:solidFill>
+                      <a:prstDash val="solid"/>
+                      <a:round/>
+                      <a:headEnd type="none" w="med" len="med"/>
+                      <a:tailEnd type="none" w="med" len="med"/>
+                    </a:lnT>
+                    <a:lnB w="12700" cap="flat" cmpd="sng" algn="ctr">
+                      <a:solidFill>
+                        <a:srgbClr val="C8C8C6"/>
+                      </a:solidFill>
+                      <a:prstDash val="solid"/>
+                      <a:round/>
+                      <a:headEnd type="none" w="med" len="med"/>
+                      <a:tailEnd type="none" w="med" len="med"/>
+                    </a:lnB>
+                  </a:tcPr>
+                </a:tc>
+                <a:tc>
+                  <a:txBody>
+                    <a:bodyPr/>
+                    <a:lstStyle/>
+                    <a:p>
+                      <a:r>
+                        <a:rPr sz="1400" b="0" i="0">
+                          <a:solidFill>
+                            <a:srgbClr val="1B1F2A"/>
+                          </a:solidFill>
+                          <a:latin typeface="IBM Plex Sans"/>
+                          <a:ea typeface="IBM Plex Sans"/>
+                          <a:cs typeface="IBM Plex Sans"/>
+                        </a:rPr>
+                        <a:t>θ, |V|</a:t>
+                      </a:r>
+                    </a:p>
+                  </a:txBody>
+                  <a:tcPr marL="66675" marR="66675" marT="66675" marB="66675">
+                    <a:lnL w="12700" cap="flat" cmpd="sng" algn="ctr">
+                      <a:solidFill>
+                        <a:srgbClr val="C8C8C6"/>
+                      </a:solidFill>
+                      <a:prstDash val="solid"/>
+                      <a:round/>
+                      <a:headEnd type="none" w="med" len="med"/>
+                      <a:tailEnd type="none" w="med" len="med"/>
+                    </a:lnL>
+                    <a:lnR w="12700" cap="flat" cmpd="sng" algn="ctr">
+                      <a:solidFill>
+                        <a:srgbClr val="C8C8C6"/>
+                      </a:solidFill>
+                      <a:prstDash val="solid"/>
+                      <a:round/>
+                      <a:headEnd type="none" w="med" len="med"/>
+                      <a:tailEnd type="none" w="med" len="med"/>
+                    </a:lnR>
+                    <a:lnT w="12700" cap="flat" cmpd="sng" algn="ctr">
+                      <a:solidFill>
+                        <a:srgbClr val="BABAB8"/>
+                      </a:solidFill>
+                      <a:prstDash val="solid"/>
+                      <a:round/>
+                      <a:headEnd type="none" w="med" len="med"/>
+                      <a:tailEnd type="none" w="med" len="med"/>
+                    </a:lnT>
+                    <a:lnB w="12700" cap="flat" cmpd="sng" algn="ctr">
+                      <a:solidFill>
+                        <a:srgbClr val="C8C8C6"/>
+                      </a:solidFill>
+                      <a:prstDash val="solid"/>
+                      <a:round/>
+                      <a:headEnd type="none" w="med" len="med"/>
+                      <a:tailEnd type="none" w="med" len="med"/>
+                    </a:lnB>
+                  </a:tcPr>
+                </a:tc>
+                <a:tc>
+                  <a:txBody>
+                    <a:bodyPr/>
+                    <a:lstStyle/>
+                    <a:p>
+                      <a:r>
+                        <a:rPr sz="1400" b="0" i="0">
+                          <a:solidFill>
+                            <a:srgbClr val="1B1F2A"/>
+                          </a:solidFill>
+                          <a:latin typeface="IBM Plex Sans"/>
+                          <a:ea typeface="IBM Plex Sans"/>
+                          <a:cs typeface="IBM Plex Sans"/>
+                        </a:rPr>
+                        <a:t>the consumption is known</a:t>
+                      </a:r>
+                    </a:p>
+                  </a:txBody>
+                  <a:tcPr marL="66675" marR="66675" marT="66675" marB="66675">
+                    <a:lnL w="12700" cap="flat" cmpd="sng" algn="ctr">
+                      <a:solidFill>
+                        <a:srgbClr val="C8C8C6"/>
+                      </a:solidFill>
+                      <a:prstDash val="solid"/>
+                      <a:round/>
+                      <a:headEnd type="none" w="med" len="med"/>
+                      <a:tailEnd type="none" w="med" len="med"/>
+                    </a:lnL>
+                    <a:lnR w="12700" cap="flat" cmpd="sng" algn="ctr">
+                      <a:solidFill>
+                        <a:srgbClr val="C8C8C6"/>
+                      </a:solidFill>
+                      <a:prstDash val="solid"/>
+                      <a:round/>
+                      <a:headEnd type="none" w="med" len="med"/>
+                      <a:tailEnd type="none" w="med" len="med"/>
+                    </a:lnR>
+                    <a:lnT w="12700" cap="flat" cmpd="sng" algn="ctr">
+                      <a:solidFill>
+                        <a:srgbClr val="BABAB8"/>
+                      </a:solidFill>
+                      <a:prstDash val="solid"/>
+                      <a:round/>
+                      <a:headEnd type="none" w="med" len="med"/>
+                      <a:tailEnd type="none" w="med" len="med"/>
+                    </a:lnT>
+                    <a:lnB w="12700" cap="flat" cmpd="sng" algn="ctr">
+                      <a:solidFill>
+                        <a:srgbClr val="C8C8C6"/>
+                      </a:solidFill>
+                      <a:prstDash val="solid"/>
+                      <a:round/>
+                      <a:headEnd type="none" w="med" len="med"/>
+                      <a:tailEnd type="none" w="med" len="med"/>
+                    </a:lnB>
+                  </a:tcPr>
+                </a:tc>
+              </a:tr>
+            </a:tbl>
+          </a:graphicData>
+        </a:graphic>
+      </p:graphicFrame>
+      <p:pic>
+        <p:nvPicPr>
+          <p:cNvPr id="8" name="Picture 7" descr="image.png"/>
+          <p:cNvPicPr>
+            <a:picLocks noChangeAspect="1"/>
+          </p:cNvPicPr>
+          <p:nvPr/>
+        </p:nvPicPr>
+        <p:blipFill>
+          <a:blip r:embed="rId4"/>
+          <a:stretch>
+            <a:fillRect/>
+          </a:stretch>
+        </p:blipFill>
+        <p:spPr>
+          <a:xfrm>
+            <a:off x="4689348" y="3913632"/>
+            <a:ext cx="2819400" cy="326136"/>
+          </a:xfrm>
+          <a:prstGeom prst="rect">
+            <a:avLst/>
+          </a:prstGeom>
+        </p:spPr>
+      </p:pic>
+      <p:pic>
+        <p:nvPicPr>
+          <p:cNvPr id="9" name="Picture 8" descr="image.png"/>
+          <p:cNvPicPr>
+            <a:picLocks noChangeAspect="1"/>
+          </p:cNvPicPr>
+          <p:nvPr/>
+        </p:nvPicPr>
+        <p:blipFill>
+          <a:blip r:embed="rId5"/>
+          <a:stretch>
+            <a:fillRect/>
+          </a:stretch>
+        </p:blipFill>
+        <p:spPr>
+          <a:xfrm>
+            <a:off x="5212080" y="4434840"/>
+            <a:ext cx="1773936" cy="326136"/>
+          </a:xfrm>
+          <a:prstGeom prst="rect">
+            <a:avLst/>
+          </a:prstGeom>
+        </p:spPr>
+      </p:pic>
+      <p:sp>
+        <p:nvSpPr>
+          <p:cNvPr id="10" name="TextBox 9"/>
+          <p:cNvSpPr txBox="1"/>
+          <p:nvPr/>
+        </p:nvSpPr>
+        <p:spPr>
+          <a:xfrm>
+            <a:off x="813816" y="5029200"/>
+            <a:ext cx="10881360" cy="640080"/>
+          </a:xfrm>
+          <a:prstGeom prst="rect">
+            <a:avLst/>
+          </a:prstGeom>
+          <a:noFill/>
+        </p:spPr>
+        <p:txBody>
+          <a:bodyPr wrap="square" lIns="0" rIns="0" tIns="0" bIns="0">
+            <a:spAutoFit/>
+          </a:bodyPr>
+          <a:lstStyle/>
+          <a:p>
+            <a:pPr algn="l" marL="243840" indent="-196342">
+              <a:lnSpc>
+                <a:spcPts val="2600"/>
+              </a:lnSpc>
+              <a:buSzPct val="100000"/>
+              <a:buChar char="•"/>
+            </a:pPr>
+            <a:r>
+              <a:rPr sz="1600" b="0" i="0">
+                <a:solidFill>
+                  <a:srgbClr val="1B1F2A"/>
+                </a:solidFill>
+                <a:latin typeface="IBM Plex Sans"/>
+                <a:ea typeface="IBM Plex Sans"/>
+                <a:cs typeface="IBM Plex Sans"/>
+              </a:rPr>
+              <a:t>2-bus grid: x = [θ₂, |V₂|], n = 2</a:t>
+            </a:r>
+          </a:p>
+          <a:p>
+            <a:pPr algn="l" marL="243840" indent="-196342">
+              <a:lnSpc>
+                <a:spcPts val="2600"/>
+              </a:lnSpc>
+              <a:buSzPct val="100000"/>
+              <a:buChar char="•"/>
+            </a:pPr>
+            <a:r>
+              <a:rPr sz="1600" b="0" i="0">
+                <a:solidFill>
+                  <a:srgbClr val="1B1F2A"/>
+                </a:solidFill>
+                <a:latin typeface="IBM Plex Sans"/>
+                <a:ea typeface="IBM Plex Sans"/>
+                <a:cs typeface="IBM Plex Sans"/>
+              </a:rPr>
+              <a:t>case18482: 2,889 PV + 2 × 15,592 PQ = 34,073 unknowns; case109272: 185,807</a:t>
+            </a:r>
+          </a:p>
+        </p:txBody>
+      </p:sp>
+    </p:spTree>
+  </p:cSld>
+  <p:clrMapOvr>
+    <a:masterClrMapping/>
+  </p:clrMapOvr>
+</p:sld>
+</file>
+
+<file path=ppt/slides/slide22.xml><?xml version="1.0" encoding="utf-8"?>
+<p:sld xmlns:a="http://schemas.openxmlformats.org/drawingml/2006/main" xmlns:p="http://schemas.openxmlformats.org/presentationml/2006/main" xmlns:r="http://schemas.openxmlformats.org/officeDocument/2006/relationships">
+  <p:cSld>
+    <p:bg>
+      <p:bgPr>
+        <a:solidFill>
+          <a:srgbClr val="FBFBF9"/>
+        </a:solidFill>
+        <a:effectLst/>
+      </p:bgPr>
+    </p:bg>
+    <p:spTree>
+      <p:nvGrpSpPr>
+        <p:cNvPr id="1" name=""/>
+        <p:cNvGrpSpPr/>
+        <p:nvPr/>
+      </p:nvGrpSpPr>
+      <p:grpSpPr/>
+      <p:sp>
+        <p:nvSpPr>
+          <p:cNvPr id="2" name="TextBox 1"/>
+          <p:cNvSpPr txBox="1"/>
+          <p:nvPr/>
+        </p:nvSpPr>
+        <p:spPr>
+          <a:xfrm>
+            <a:off x="813816" y="713232"/>
+            <a:ext cx="10881360" cy="429768"/>
+          </a:xfrm>
+          <a:prstGeom prst="rect">
+            <a:avLst/>
+          </a:prstGeom>
+          <a:noFill/>
+        </p:spPr>
+        <p:txBody>
+          <a:bodyPr wrap="square" lIns="0" rIns="0" tIns="0" bIns="0">
+            <a:spAutoFit/>
+          </a:bodyPr>
+          <a:lstStyle/>
+          <a:p>
+            <a:pPr algn="l" marL="0" indent="0">
+              <a:buNone/>
+            </a:pPr>
+            <a:r>
+              <a:rPr sz="2800" b="1" i="0">
+                <a:solidFill>
+                  <a:srgbClr val="1F3A5F"/>
+                </a:solidFill>
+                <a:latin typeface="IBM Plex Sans"/>
+                <a:ea typeface="IBM Plex Sans"/>
+                <a:cs typeface="IBM Plex Sans"/>
+              </a:rPr>
+              <a:t>How the equations are formed</a:t>
+            </a:r>
+          </a:p>
+        </p:txBody>
+      </p:sp>
+      <p:pic>
+        <p:nvPicPr>
+          <p:cNvPr id="3" name="Picture 2" descr="image.png"/>
+          <p:cNvPicPr>
+            <a:picLocks noChangeAspect="1"/>
+          </p:cNvPicPr>
+          <p:nvPr/>
+        </p:nvPicPr>
+        <p:blipFill>
+          <a:blip r:embed="rId2"/>
+          <a:stretch>
+            <a:fillRect/>
+          </a:stretch>
+        </p:blipFill>
+        <p:spPr>
+          <a:xfrm>
+            <a:off x="812800" y="1221741"/>
+            <a:ext cx="10566400" cy="20320"/>
+          </a:xfrm>
+          <a:prstGeom prst="rect">
+            <a:avLst/>
+          </a:prstGeom>
+        </p:spPr>
+      </p:pic>
+      <p:sp>
+        <p:nvSpPr>
+          <p:cNvPr id="4" name="TextBox 3"/>
+          <p:cNvSpPr txBox="1"/>
+          <p:nvPr/>
+        </p:nvSpPr>
+        <p:spPr>
+          <a:xfrm>
+            <a:off x="813816" y="6236208"/>
+            <a:ext cx="7845552" cy="237744"/>
+          </a:xfrm>
+          <a:prstGeom prst="rect">
+            <a:avLst/>
+          </a:prstGeom>
+          <a:noFill/>
+        </p:spPr>
+        <p:txBody>
+          <a:bodyPr wrap="square" lIns="0" rIns="0" tIns="0" bIns="0">
+            <a:spAutoFit/>
+          </a:bodyPr>
+          <a:lstStyle/>
+          <a:p>
+            <a:pPr algn="l" marL="0" indent="0">
+              <a:buNone/>
+            </a:pPr>
+            <a:r>
+              <a:rPr sz="1200" b="0" i="0">
+                <a:solidFill>
+                  <a:srgbClr val="6B7280"/>
+                </a:solidFill>
+                <a:latin typeface="IBM Plex Sans"/>
+                <a:ea typeface="IBM Plex Sans"/>
+                <a:cs typeface="IBM Plex Sans"/>
+              </a:rPr>
+              <a:t>Lima-Silva &amp; Freitas (2024): reproduction and improvements</a:t>
+            </a:r>
+          </a:p>
+        </p:txBody>
+      </p:sp>
+      <p:sp>
+        <p:nvSpPr>
+          <p:cNvPr id="5" name="TextBox 4"/>
+          <p:cNvSpPr txBox="1"/>
+          <p:nvPr/>
+        </p:nvSpPr>
+        <p:spPr>
+          <a:xfrm>
+            <a:off x="10058400" y="6236208"/>
+            <a:ext cx="1316736" cy="237744"/>
+          </a:xfrm>
+          <a:prstGeom prst="rect">
+            <a:avLst/>
+          </a:prstGeom>
+          <a:noFill/>
+        </p:spPr>
+        <p:txBody>
+          <a:bodyPr wrap="square" lIns="0" rIns="0" tIns="0" bIns="0">
+            <a:spAutoFit/>
+          </a:bodyPr>
+          <a:lstStyle/>
+          <a:p>
+            <a:pPr algn="r" marL="0" indent="0">
+              <a:buNone/>
+            </a:pPr>
+            <a:r>
+              <a:rPr sz="1200" b="0" i="0">
+                <a:solidFill>
+                  <a:srgbClr val="6B7280"/>
+                </a:solidFill>
+                <a:latin typeface="IBM Plex Sans"/>
+                <a:ea typeface="IBM Plex Sans"/>
+                <a:cs typeface="IBM Plex Sans"/>
+              </a:rPr>
+              <a:t>5</a:t>
+            </a:r>
+          </a:p>
+        </p:txBody>
+      </p:sp>
+      <p:sp>
+        <p:nvSpPr>
+          <p:cNvPr id="6" name="TextBox 5"/>
+          <p:cNvSpPr txBox="1"/>
+          <p:nvPr/>
+        </p:nvSpPr>
+        <p:spPr>
+          <a:xfrm>
+            <a:off x="813816" y="1463040"/>
+            <a:ext cx="10881360" cy="310896"/>
+          </a:xfrm>
+          <a:prstGeom prst="rect">
+            <a:avLst/>
+          </a:prstGeom>
+          <a:noFill/>
+        </p:spPr>
+        <p:txBody>
+          <a:bodyPr wrap="square" lIns="0" rIns="0" tIns="0" bIns="0">
+            <a:spAutoFit/>
+          </a:bodyPr>
+          <a:lstStyle/>
+          <a:p>
+            <a:pPr algn="l" marL="0" indent="0">
+              <a:buNone/>
+            </a:pPr>
+            <a:r>
+              <a:rPr sz="1600" b="0" i="0">
+                <a:solidFill>
+                  <a:srgbClr val="1B1F2A"/>
+                </a:solidFill>
+                <a:latin typeface="IBM Plex Sans"/>
+                <a:ea typeface="IBM Plex Sans"/>
+                <a:cs typeface="IBM Plex Sans"/>
+              </a:rPr>
+              <a:t>Power injected at bus i, from I = Y V:</a:t>
+            </a:r>
+          </a:p>
+        </p:txBody>
+      </p:sp>
+      <p:pic>
+        <p:nvPicPr>
+          <p:cNvPr id="7" name="Picture 6" descr="image.png"/>
+          <p:cNvPicPr>
+            <a:picLocks noChangeAspect="1"/>
+          </p:cNvPicPr>
+          <p:nvPr/>
+        </p:nvPicPr>
+        <p:blipFill>
+          <a:blip r:embed="rId4"/>
+          <a:stretch>
+            <a:fillRect/>
+          </a:stretch>
+        </p:blipFill>
+        <p:spPr>
+          <a:xfrm>
+            <a:off x="3473196" y="1810512"/>
+            <a:ext cx="5251704" cy="533400"/>
+          </a:xfrm>
+          <a:prstGeom prst="rect">
+            <a:avLst/>
+          </a:prstGeom>
+        </p:spPr>
+      </p:pic>
+      <p:pic>
+        <p:nvPicPr>
+          <p:cNvPr id="8" name="Picture 7" descr="image.png"/>
+          <p:cNvPicPr>
+            <a:picLocks noChangeAspect="1"/>
+          </p:cNvPicPr>
+          <p:nvPr/>
+        </p:nvPicPr>
+        <p:blipFill>
+          <a:blip r:embed="rId5"/>
+          <a:stretch>
+            <a:fillRect/>
+          </a:stretch>
+        </p:blipFill>
+        <p:spPr>
+          <a:xfrm>
+            <a:off x="4226052" y="2487168"/>
+            <a:ext cx="3745992" cy="469392"/>
+          </a:xfrm>
+          <a:prstGeom prst="rect">
+            <a:avLst/>
+          </a:prstGeom>
+        </p:spPr>
+      </p:pic>
+      <p:pic>
+        <p:nvPicPr>
+          <p:cNvPr id="9" name="Picture 8" descr="image.png"/>
+          <p:cNvPicPr>
+            <a:picLocks noChangeAspect="1"/>
+          </p:cNvPicPr>
+          <p:nvPr/>
+        </p:nvPicPr>
+        <p:blipFill>
+          <a:blip r:embed="rId6"/>
+          <a:stretch>
+            <a:fillRect/>
+          </a:stretch>
+        </p:blipFill>
+        <p:spPr>
+          <a:xfrm>
+            <a:off x="4212336" y="3035808"/>
+            <a:ext cx="3773424" cy="469392"/>
+          </a:xfrm>
+          <a:prstGeom prst="rect">
+            <a:avLst/>
+          </a:prstGeom>
+        </p:spPr>
+      </p:pic>
+      <p:sp>
+        <p:nvSpPr>
+          <p:cNvPr id="10" name="TextBox 9"/>
+          <p:cNvSpPr txBox="1"/>
+          <p:nvPr/>
+        </p:nvSpPr>
+        <p:spPr>
+          <a:xfrm>
+            <a:off x="813816" y="3675887"/>
+            <a:ext cx="10881360" cy="310896"/>
+          </a:xfrm>
+          <a:prstGeom prst="rect">
+            <a:avLst/>
+          </a:prstGeom>
+          <a:noFill/>
+        </p:spPr>
+        <p:txBody>
+          <a:bodyPr wrap="square" lIns="0" rIns="0" tIns="0" bIns="0">
+            <a:spAutoFit/>
+          </a:bodyPr>
+          <a:lstStyle/>
+          <a:p>
+            <a:pPr algn="l" marL="0" indent="0">
+              <a:buNone/>
+            </a:pPr>
+            <a:r>
+              <a:rPr sz="1600" b="0" i="0">
+                <a:solidFill>
+                  <a:srgbClr val="1B1F2A"/>
+                </a:solidFill>
+                <a:latin typeface="IBM Plex Sans"/>
+                <a:ea typeface="IBM Plex Sans"/>
+                <a:cs typeface="IBM Plex Sans"/>
+              </a:rPr>
+              <a:t>Mismatch = computed − specified. Keep ΔP at PV and PQ buses, ΔQ at PQ buses:</a:t>
+            </a:r>
+          </a:p>
+        </p:txBody>
+      </p:sp>
+      <p:pic>
+        <p:nvPicPr>
+          <p:cNvPr id="11" name="Picture 10" descr="image.png"/>
+          <p:cNvPicPr>
+            <a:picLocks noChangeAspect="1"/>
+          </p:cNvPicPr>
+          <p:nvPr/>
+        </p:nvPicPr>
+        <p:blipFill>
+          <a:blip r:embed="rId7"/>
+          <a:stretch>
+            <a:fillRect/>
+          </a:stretch>
+        </p:blipFill>
+        <p:spPr>
+          <a:xfrm>
+            <a:off x="4008120" y="4069080"/>
+            <a:ext cx="4181856" cy="326136"/>
+          </a:xfrm>
+          <a:prstGeom prst="rect">
+            <a:avLst/>
+          </a:prstGeom>
+        </p:spPr>
+      </p:pic>
+      <p:sp>
+        <p:nvSpPr>
+          <p:cNvPr id="12" name="TextBox 11"/>
+          <p:cNvSpPr txBox="1"/>
+          <p:nvPr/>
+        </p:nvSpPr>
+        <p:spPr>
+          <a:xfrm>
+            <a:off x="813816" y="4663440"/>
+            <a:ext cx="10881360" cy="1097280"/>
+          </a:xfrm>
+          <a:prstGeom prst="rect">
+            <a:avLst/>
+          </a:prstGeom>
+          <a:noFill/>
+        </p:spPr>
+        <p:txBody>
+          <a:bodyPr wrap="square" lIns="0" rIns="0" tIns="0" bIns="0">
+            <a:spAutoFit/>
+          </a:bodyPr>
+          <a:lstStyle/>
+          <a:p>
+            <a:pPr algn="l" marL="243840" indent="-196342">
+              <a:lnSpc>
+                <a:spcPts val="2600"/>
+              </a:lnSpc>
+              <a:buSzPct val="100000"/>
+              <a:buChar char="•"/>
+            </a:pPr>
+            <a:r>
+              <a:rPr sz="1600" b="0" i="0">
+                <a:solidFill>
+                  <a:srgbClr val="1B1F2A"/>
+                </a:solidFill>
+                <a:latin typeface="IBM Plex Sans"/>
+                <a:ea typeface="IBM Plex Sans"/>
+                <a:cs typeface="IBM Plex Sans"/>
+              </a:rPr>
+              <a:t>n equations in n unknowns: a square system, as Newton needs</a:t>
+            </a:r>
+          </a:p>
+          <a:p>
+            <a:pPr algn="l" marL="243840" indent="-196342">
+              <a:lnSpc>
+                <a:spcPts val="2600"/>
+              </a:lnSpc>
+              <a:buSzPct val="100000"/>
+              <a:buChar char="•"/>
+            </a:pPr>
+            <a:r>
+              <a:rPr sz="1600" b="0" i="0">
+                <a:solidFill>
+                  <a:srgbClr val="1B1F2A"/>
+                </a:solidFill>
+                <a:latin typeface="IBM Plex Sans"/>
+                <a:ea typeface="IBM Plex Sans"/>
+                <a:cs typeface="IBM Plex Sans"/>
+              </a:rPr>
+              <a:t>In code, one line for all buses:  ΔS = V · conj(Y V) − S(spec)</a:t>
+            </a:r>
+          </a:p>
+          <a:p>
+            <a:pPr algn="l" marL="243840" indent="-196342">
+              <a:lnSpc>
+                <a:spcPts val="2600"/>
+              </a:lnSpc>
+              <a:buSzPct val="100000"/>
+              <a:buChar char="•"/>
+            </a:pPr>
+            <a:r>
+              <a:rPr sz="1600" b="0" i="0">
+                <a:solidFill>
+                  <a:srgbClr val="1B1F2A"/>
+                </a:solidFill>
+                <a:latin typeface="IBM Plex Sans"/>
+                <a:ea typeface="IBM Plex Sans"/>
+                <a:cs typeface="IBM Plex Sans"/>
+              </a:rPr>
+              <a:t>Jacobian J = ∂g/∂x: exact sparse derivatives, checked against finite differences</a:t>
+            </a:r>
+          </a:p>
+        </p:txBody>
+      </p:sp>
+    </p:spTree>
+  </p:cSld>
+  <p:clrMapOvr>
+    <a:masterClrMapping/>
+  </p:clrMapOvr>
+</p:sld>
+</file>
+
+<file path=ppt/slides/slide23.xml><?xml version="1.0" encoding="utf-8"?>
+<p:sld xmlns:a="http://schemas.openxmlformats.org/drawingml/2006/main" xmlns:p="http://schemas.openxmlformats.org/presentationml/2006/main" xmlns:r="http://schemas.openxmlformats.org/officeDocument/2006/relationships">
+  <p:cSld>
+    <p:bg>
+      <p:bgPr>
+        <a:solidFill>
+          <a:srgbClr val="FBFBF9"/>
+        </a:solidFill>
+        <a:effectLst/>
+      </p:bgPr>
+    </p:bg>
+    <p:spTree>
+      <p:nvGrpSpPr>
+        <p:cNvPr id="1" name=""/>
+        <p:cNvGrpSpPr/>
+        <p:nvPr/>
+      </p:nvGrpSpPr>
+      <p:grpSpPr/>
+      <p:sp>
+        <p:nvSpPr>
+          <p:cNvPr id="2" name="TextBox 1"/>
+          <p:cNvSpPr txBox="1"/>
+          <p:nvPr/>
+        </p:nvSpPr>
+        <p:spPr>
+          <a:xfrm>
+            <a:off x="813816" y="713232"/>
+            <a:ext cx="10881360" cy="429768"/>
+          </a:xfrm>
+          <a:prstGeom prst="rect">
+            <a:avLst/>
+          </a:prstGeom>
+          <a:noFill/>
+        </p:spPr>
+        <p:txBody>
+          <a:bodyPr wrap="square" lIns="0" rIns="0" tIns="0" bIns="0">
+            <a:spAutoFit/>
+          </a:bodyPr>
+          <a:lstStyle/>
+          <a:p>
+            <a:pPr algn="l" marL="0" indent="0">
+              <a:buNone/>
+            </a:pPr>
+            <a:r>
+              <a:rPr sz="2800" b="1" i="0">
+                <a:solidFill>
+                  <a:srgbClr val="1F3A5F"/>
+                </a:solidFill>
+                <a:latin typeface="IBM Plex Sans"/>
+                <a:ea typeface="IBM Plex Sans"/>
+                <a:cs typeface="IBM Plex Sans"/>
+              </a:rPr>
+              <a:t>Worked example: the 2-bus grid by hand</a:t>
+            </a:r>
+          </a:p>
+        </p:txBody>
+      </p:sp>
+      <p:pic>
+        <p:nvPicPr>
+          <p:cNvPr id="3" name="Picture 2" descr="image.png"/>
+          <p:cNvPicPr>
+            <a:picLocks noChangeAspect="1"/>
+          </p:cNvPicPr>
+          <p:nvPr/>
+        </p:nvPicPr>
+        <p:blipFill>
+          <a:blip r:embed="rId2"/>
+          <a:stretch>
+            <a:fillRect/>
+          </a:stretch>
+        </p:blipFill>
+        <p:spPr>
+          <a:xfrm>
+            <a:off x="812800" y="1221741"/>
+            <a:ext cx="10566400" cy="20320"/>
+          </a:xfrm>
+          <a:prstGeom prst="rect">
+            <a:avLst/>
+          </a:prstGeom>
+        </p:spPr>
+      </p:pic>
+      <p:sp>
+        <p:nvSpPr>
+          <p:cNvPr id="4" name="TextBox 3"/>
+          <p:cNvSpPr txBox="1"/>
+          <p:nvPr/>
+        </p:nvSpPr>
+        <p:spPr>
+          <a:xfrm>
+            <a:off x="813816" y="6236208"/>
+            <a:ext cx="7845552" cy="237744"/>
+          </a:xfrm>
+          <a:prstGeom prst="rect">
+            <a:avLst/>
+          </a:prstGeom>
+          <a:noFill/>
+        </p:spPr>
+        <p:txBody>
+          <a:bodyPr wrap="square" lIns="0" rIns="0" tIns="0" bIns="0">
+            <a:spAutoFit/>
+          </a:bodyPr>
+          <a:lstStyle/>
+          <a:p>
+            <a:pPr algn="l" marL="0" indent="0">
+              <a:buNone/>
+            </a:pPr>
+            <a:r>
+              <a:rPr sz="1200" b="0" i="0">
+                <a:solidFill>
+                  <a:srgbClr val="6B7280"/>
+                </a:solidFill>
+                <a:latin typeface="IBM Plex Sans"/>
+                <a:ea typeface="IBM Plex Sans"/>
+                <a:cs typeface="IBM Plex Sans"/>
+              </a:rPr>
+              <a:t>Lima-Silva &amp; Freitas (2024): reproduction and improvements</a:t>
+            </a:r>
+          </a:p>
+        </p:txBody>
+      </p:sp>
+      <p:sp>
+        <p:nvSpPr>
+          <p:cNvPr id="5" name="TextBox 4"/>
+          <p:cNvSpPr txBox="1"/>
+          <p:nvPr/>
+        </p:nvSpPr>
+        <p:spPr>
+          <a:xfrm>
+            <a:off x="10058400" y="6236208"/>
+            <a:ext cx="1316736" cy="237744"/>
+          </a:xfrm>
+          <a:prstGeom prst="rect">
+            <a:avLst/>
+          </a:prstGeom>
+          <a:noFill/>
+        </p:spPr>
+        <p:txBody>
+          <a:bodyPr wrap="square" lIns="0" rIns="0" tIns="0" bIns="0">
+            <a:spAutoFit/>
+          </a:bodyPr>
+          <a:lstStyle/>
+          <a:p>
+            <a:pPr algn="r" marL="0" indent="0">
+              <a:buNone/>
+            </a:pPr>
+            <a:r>
+              <a:rPr sz="1200" b="0" i="0">
+                <a:solidFill>
+                  <a:srgbClr val="6B7280"/>
+                </a:solidFill>
+                <a:latin typeface="IBM Plex Sans"/>
+                <a:ea typeface="IBM Plex Sans"/>
+                <a:cs typeface="IBM Plex Sans"/>
+              </a:rPr>
+              <a:t>6</a:t>
+            </a:r>
+          </a:p>
+        </p:txBody>
+      </p:sp>
+      <p:sp>
+        <p:nvSpPr>
+          <p:cNvPr id="6" name="Oval 5"/>
           <p:cNvSpPr/>
           <p:nvPr/>
         </p:nvSpPr>
         <p:spPr>
           <a:xfrm>
-            <a:off x="812800" y="1496060"/>
-            <a:ext cx="10883392" cy="635000"/>
+            <a:off x="1005840" y="1600200"/>
+            <a:ext cx="457200" cy="457200"/>
+          </a:xfrm>
+          <a:prstGeom prst="ellipse">
+            <a:avLst/>
+          </a:prstGeom>
+          <a:solidFill>
+            <a:srgbClr val="FBFBF9"/>
+          </a:solidFill>
+          <a:ln w="25400">
+            <a:solidFill>
+              <a:srgbClr val="1F3A5F"/>
+            </a:solidFill>
+          </a:ln>
+        </p:spPr>
+        <p:style>
+          <a:lnRef idx="1">
+            <a:schemeClr val="accent1"/>
+          </a:lnRef>
+          <a:fillRef idx="3">
+            <a:schemeClr val="accent1"/>
+          </a:fillRef>
+          <a:effectRef idx="2">
+            <a:schemeClr val="accent1"/>
+          </a:effectRef>
+          <a:fontRef idx="minor">
+            <a:schemeClr val="lt1"/>
+          </a:fontRef>
+        </p:style>
+        <p:txBody>
+          <a:bodyPr rtlCol="0" anchor="ctr" lIns="0" rIns="0" tIns="0" bIns="0"/>
+          <a:lstStyle/>
+          <a:p>
+            <a:pPr algn="ctr"/>
+            <a:r>
+              <a:rPr sz="1400" b="1" i="0">
+                <a:solidFill>
+                  <a:srgbClr val="1F3A5F"/>
+                </a:solidFill>
+                <a:latin typeface="IBM Plex Sans"/>
+                <a:ea typeface="IBM Plex Sans"/>
+                <a:cs typeface="IBM Plex Sans"/>
+              </a:rPr>
+              <a:t>1</a:t>
+            </a:r>
+          </a:p>
+        </p:txBody>
+      </p:sp>
+      <p:sp>
+        <p:nvSpPr>
+          <p:cNvPr id="7" name="Oval 6"/>
+          <p:cNvSpPr/>
+          <p:nvPr/>
+        </p:nvSpPr>
+        <p:spPr>
+          <a:xfrm>
+            <a:off x="4480560" y="1600200"/>
+            <a:ext cx="457200" cy="457200"/>
+          </a:xfrm>
+          <a:prstGeom prst="ellipse">
+            <a:avLst/>
+          </a:prstGeom>
+          <a:solidFill>
+            <a:srgbClr val="FBFBF9"/>
+          </a:solidFill>
+          <a:ln w="25400">
+            <a:solidFill>
+              <a:srgbClr val="1F3A5F"/>
+            </a:solidFill>
+          </a:ln>
+        </p:spPr>
+        <p:style>
+          <a:lnRef idx="1">
+            <a:schemeClr val="accent1"/>
+          </a:lnRef>
+          <a:fillRef idx="3">
+            <a:schemeClr val="accent1"/>
+          </a:fillRef>
+          <a:effectRef idx="2">
+            <a:schemeClr val="accent1"/>
+          </a:effectRef>
+          <a:fontRef idx="minor">
+            <a:schemeClr val="lt1"/>
+          </a:fontRef>
+        </p:style>
+        <p:txBody>
+          <a:bodyPr rtlCol="0" anchor="ctr" lIns="0" rIns="0" tIns="0" bIns="0"/>
+          <a:lstStyle/>
+          <a:p>
+            <a:pPr algn="ctr"/>
+            <a:r>
+              <a:rPr sz="1400" b="1" i="0">
+                <a:solidFill>
+                  <a:srgbClr val="1F3A5F"/>
+                </a:solidFill>
+                <a:latin typeface="IBM Plex Sans"/>
+                <a:ea typeface="IBM Plex Sans"/>
+                <a:cs typeface="IBM Plex Sans"/>
+              </a:rPr>
+              <a:t>2</a:t>
+            </a:r>
+          </a:p>
+        </p:txBody>
+      </p:sp>
+      <p:cxnSp>
+        <p:nvCxnSpPr>
+          <p:cNvPr id="8" name="Connector 7"/>
+          <p:cNvCxnSpPr/>
+          <p:nvPr/>
+        </p:nvCxnSpPr>
+        <p:spPr>
+          <a:xfrm>
+            <a:off x="1463040" y="1828800"/>
+            <a:ext cx="3017520" cy="0"/>
+          </a:xfrm>
+          <a:prstGeom prst="line">
+            <a:avLst/>
+          </a:prstGeom>
+          <a:ln w="25400">
+            <a:solidFill>
+              <a:srgbClr val="1F3A5F"/>
+            </a:solidFill>
+          </a:ln>
+        </p:spPr>
+        <p:style>
+          <a:lnRef idx="2">
+            <a:schemeClr val="accent1"/>
+          </a:lnRef>
+          <a:fillRef idx="0">
+            <a:schemeClr val="accent1"/>
+          </a:fillRef>
+          <a:effectRef idx="1">
+            <a:schemeClr val="accent1"/>
+          </a:effectRef>
+          <a:fontRef idx="minor">
+            <a:schemeClr val="tx1"/>
+          </a:fontRef>
+        </p:style>
+      </p:cxnSp>
+      <p:sp>
+        <p:nvSpPr>
+          <p:cNvPr id="9" name="TextBox 8"/>
+          <p:cNvSpPr txBox="1"/>
+          <p:nvPr/>
+        </p:nvSpPr>
+        <p:spPr>
+          <a:xfrm>
+            <a:off x="548640" y="2130552"/>
+            <a:ext cx="1463040" cy="457200"/>
           </a:xfrm>
           <a:prstGeom prst="rect">
             <a:avLst/>
           </a:prstGeom>
           <a:noFill/>
-          <a:ln/>
         </p:spPr>
         <p:txBody>
-          <a:bodyPr wrap="square" lIns="0" tIns="0" rIns="0" bIns="0" rtlCol="0" anchor="t">
-            <a:normAutofit/>
+          <a:bodyPr wrap="square" lIns="0" rIns="0" tIns="0" bIns="0">
+            <a:spAutoFit/>
           </a:bodyPr>
           <a:lstStyle/>
           <a:p>
-            <a:pPr marL="243840" indent="-196342" algn="l">
+            <a:pPr algn="ctr" marL="0" indent="0">
+              <a:buNone/>
+            </a:pPr>
+            <a:r>
+              <a:rPr sz="1100" b="0" i="0">
+                <a:solidFill>
+                  <a:srgbClr val="333A48"/>
+                </a:solidFill>
+                <a:latin typeface="IBM Plex Sans"/>
+                <a:ea typeface="IBM Plex Sans"/>
+                <a:cs typeface="IBM Plex Sans"/>
+              </a:rPr>
+              <a:t>slack</a:t>
+            </a:r>
+          </a:p>
+          <a:p>
+            <a:pPr algn="ctr" marL="0" indent="0">
+              <a:buNone/>
+            </a:pPr>
+            <a:r>
+              <a:rPr sz="1100" b="0" i="0">
+                <a:solidFill>
+                  <a:srgbClr val="333A48"/>
+                </a:solidFill>
+                <a:latin typeface="IBM Plex Sans"/>
+                <a:ea typeface="IBM Plex Sans"/>
+                <a:cs typeface="IBM Plex Sans"/>
+              </a:rPr>
+              <a:t>|V₁| = 1, θ₁ = 0</a:t>
+            </a:r>
+          </a:p>
+        </p:txBody>
+      </p:sp>
+      <p:sp>
+        <p:nvSpPr>
+          <p:cNvPr id="10" name="TextBox 9"/>
+          <p:cNvSpPr txBox="1"/>
+          <p:nvPr/>
+        </p:nvSpPr>
+        <p:spPr>
+          <a:xfrm>
+            <a:off x="2011680" y="1517904"/>
+            <a:ext cx="1920240" cy="274320"/>
+          </a:xfrm>
+          <a:prstGeom prst="rect">
+            <a:avLst/>
+          </a:prstGeom>
+          <a:noFill/>
+        </p:spPr>
+        <p:txBody>
+          <a:bodyPr wrap="square" lIns="0" rIns="0" tIns="0" bIns="0">
+            <a:spAutoFit/>
+          </a:bodyPr>
+          <a:lstStyle/>
+          <a:p>
+            <a:pPr algn="ctr" marL="0" indent="0">
+              <a:buNone/>
+            </a:pPr>
+            <a:r>
+              <a:rPr sz="1100" b="0" i="0">
+                <a:solidFill>
+                  <a:srgbClr val="333A48"/>
+                </a:solidFill>
+                <a:latin typeface="IBM Plex Sans"/>
+                <a:ea typeface="IBM Plex Sans"/>
+                <a:cs typeface="IBM Plex Sans"/>
+              </a:rPr>
+              <a:t>x = 0.1  (y = −10j)</a:t>
+            </a:r>
+          </a:p>
+        </p:txBody>
+      </p:sp>
+      <p:sp>
+        <p:nvSpPr>
+          <p:cNvPr id="11" name="TextBox 10"/>
+          <p:cNvSpPr txBox="1"/>
+          <p:nvPr/>
+        </p:nvSpPr>
+        <p:spPr>
+          <a:xfrm>
+            <a:off x="3931920" y="2130552"/>
+            <a:ext cx="1554480" cy="457200"/>
+          </a:xfrm>
+          <a:prstGeom prst="rect">
+            <a:avLst/>
+          </a:prstGeom>
+          <a:noFill/>
+        </p:spPr>
+        <p:txBody>
+          <a:bodyPr wrap="square" lIns="0" rIns="0" tIns="0" bIns="0">
+            <a:spAutoFit/>
+          </a:bodyPr>
+          <a:lstStyle/>
+          <a:p>
+            <a:pPr algn="ctr" marL="0" indent="0">
+              <a:buNone/>
+            </a:pPr>
+            <a:r>
+              <a:rPr sz="1100" b="0" i="0">
+                <a:solidFill>
+                  <a:srgbClr val="333A48"/>
+                </a:solidFill>
+                <a:latin typeface="IBM Plex Sans"/>
+                <a:ea typeface="IBM Plex Sans"/>
+                <a:cs typeface="IBM Plex Sans"/>
+              </a:rPr>
+              <a:t>load 50 MW + 20 MVAr</a:t>
+            </a:r>
+          </a:p>
+          <a:p>
+            <a:pPr algn="ctr" marL="0" indent="0">
+              <a:buNone/>
+            </a:pPr>
+            <a:r>
+              <a:rPr sz="1100" b="0" i="0">
+                <a:solidFill>
+                  <a:srgbClr val="333A48"/>
+                </a:solidFill>
+                <a:latin typeface="IBM Plex Sans"/>
+                <a:ea typeface="IBM Plex Sans"/>
+                <a:cs typeface="IBM Plex Sans"/>
+              </a:rPr>
+              <a:t>|V₂|, θ₂ unknown</a:t>
+            </a:r>
+          </a:p>
+        </p:txBody>
+      </p:sp>
+      <p:pic>
+        <p:nvPicPr>
+          <p:cNvPr id="12" name="Picture 11" descr="image.png"/>
+          <p:cNvPicPr>
+            <a:picLocks noChangeAspect="1"/>
+          </p:cNvPicPr>
+          <p:nvPr/>
+        </p:nvPicPr>
+        <p:blipFill>
+          <a:blip r:embed="rId4"/>
+          <a:stretch>
+            <a:fillRect/>
+          </a:stretch>
+        </p:blipFill>
+        <p:spPr>
+          <a:xfrm>
+            <a:off x="2292095" y="2743200"/>
+            <a:ext cx="2346960" cy="289560"/>
+          </a:xfrm>
+          <a:prstGeom prst="rect">
+            <a:avLst/>
+          </a:prstGeom>
+        </p:spPr>
+      </p:pic>
+      <p:pic>
+        <p:nvPicPr>
+          <p:cNvPr id="13" name="Picture 12" descr="image.png"/>
+          <p:cNvPicPr>
+            <a:picLocks noChangeAspect="1"/>
+          </p:cNvPicPr>
+          <p:nvPr/>
+        </p:nvPicPr>
+        <p:blipFill>
+          <a:blip r:embed="rId5"/>
+          <a:stretch>
+            <a:fillRect/>
+          </a:stretch>
+        </p:blipFill>
+        <p:spPr>
+          <a:xfrm>
+            <a:off x="1754124" y="3182112"/>
+            <a:ext cx="3422904" cy="323088"/>
+          </a:xfrm>
+          <a:prstGeom prst="rect">
+            <a:avLst/>
+          </a:prstGeom>
+        </p:spPr>
+      </p:pic>
+      <p:sp>
+        <p:nvSpPr>
+          <p:cNvPr id="14" name="TextBox 13"/>
+          <p:cNvSpPr txBox="1"/>
+          <p:nvPr/>
+        </p:nvSpPr>
+        <p:spPr>
+          <a:xfrm>
+            <a:off x="813816" y="3730752"/>
+            <a:ext cx="5303520" cy="1371600"/>
+          </a:xfrm>
+          <a:prstGeom prst="rect">
+            <a:avLst/>
+          </a:prstGeom>
+          <a:noFill/>
+        </p:spPr>
+        <p:txBody>
+          <a:bodyPr wrap="square" lIns="0" rIns="0" tIns="0" bIns="0">
+            <a:spAutoFit/>
+          </a:bodyPr>
+          <a:lstStyle/>
+          <a:p>
+            <a:pPr algn="l" marL="243840" indent="-196342">
               <a:lnSpc>
                 <a:spcPts val="2400"/>
               </a:lnSpc>
@@ -9887,20 +13950,19 @@
               <a:buChar char="•"/>
             </a:pPr>
             <a:r>
-              <a:rPr lang="en-US" sz="1600" dirty="0">
+              <a:rPr sz="1500" b="0" i="0">
                 <a:solidFill>
                   <a:srgbClr val="1B1F2A"/>
                 </a:solidFill>
-                <a:latin typeface="IBM Plex Sans" pitchFamily="34" charset="0"/>
-                <a:ea typeface="IBM Plex Sans" pitchFamily="34" charset="-122"/>
-                <a:cs typeface="IBM Plex Sans" pitchFamily="34" charset="-120"/>
+                <a:latin typeface="IBM Plex Sans"/>
+                <a:ea typeface="IBM Plex Sans"/>
+                <a:cs typeface="IBM Plex Sans"/>
               </a:rPr>
-              <a:t>Steady state of a grid: solve g(x) = 0, g : ℝⁿ → ℝⁿ</a:t>
+              <a:t>Flat start x₀ = [0, 1]: g = [0.5, 0.2], J = diag(10, 10)</a:t>
             </a:r>
-            <a:endParaRPr lang="en-US" sz="1600" dirty="0"/>
-          </a:p>
-          <a:p>
-            <a:pPr marL="243840" indent="-196342" algn="l">
+          </a:p>
+          <a:p>
+            <a:pPr algn="l" marL="243840" indent="-196342">
               <a:lnSpc>
                 <a:spcPts val="2400"/>
               </a:lnSpc>
@@ -9908,88 +13970,19 @@
               <a:buChar char="•"/>
             </a:pPr>
             <a:r>
-              <a:rPr lang="en-US" sz="1600" dirty="0">
+              <a:rPr sz="1500" b="0" i="0">
                 <a:solidFill>
                   <a:srgbClr val="1B1F2A"/>
                 </a:solidFill>
-                <a:latin typeface="IBM Plex Sans" pitchFamily="34" charset="0"/>
-                <a:ea typeface="IBM Plex Sans" pitchFamily="34" charset="-122"/>
-                <a:cs typeface="IBM Plex Sans" pitchFamily="34" charset="-120"/>
+                <a:latin typeface="IBM Plex Sans"/>
+                <a:ea typeface="IBM Plex Sans"/>
+                <a:cs typeface="IBM Plex Sans"/>
               </a:rPr>
-              <a:t>Each bus gives a power balance equation</a:t>
+              <a:t>Newton step 1: solve J Δx = −g, Δx = [−0.05, −0.02]</a:t>
             </a:r>
-            <a:endParaRPr lang="en-US" sz="1600" dirty="0"/>
-          </a:p>
-        </p:txBody>
-      </p:sp>
-      <p:sp>
-        <p:nvSpPr>
-          <p:cNvPr id="5" name="Text 2"/>
-          <p:cNvSpPr/>
-          <p:nvPr/>
-        </p:nvSpPr>
-        <p:spPr>
-          <a:xfrm>
-            <a:off x="654304" y="2359660"/>
-            <a:ext cx="10883392" cy="416560"/>
-          </a:xfrm>
-          <a:prstGeom prst="rect">
-            <a:avLst/>
-          </a:prstGeom>
-          <a:noFill/>
-          <a:ln/>
-        </p:spPr>
-        <p:txBody>
-          <a:bodyPr wrap="square" lIns="0" tIns="0" rIns="0" bIns="0" rtlCol="0" anchor="t">
-            <a:normAutofit/>
-          </a:bodyPr>
-          <a:lstStyle/>
-          <a:p>
-            <a:pPr marL="0" indent="0" algn="ctr">
-              <a:lnSpc>
-                <a:spcPts val="3080"/>
-              </a:lnSpc>
-              <a:buNone/>
-            </a:pPr>
-            <a:r>
-              <a:rPr lang="en-US" sz="2200" dirty="0">
-                <a:solidFill>
-                  <a:srgbClr val="1B1F2A"/>
-                </a:solidFill>
-                <a:latin typeface="STIX Two Text" pitchFamily="34" charset="0"/>
-                <a:ea typeface="STIX Two Text" pitchFamily="34" charset="-122"/>
-                <a:cs typeface="STIX Two Text" pitchFamily="34" charset="-120"/>
-              </a:rPr>
-              <a:t>ΔS = V · conj(Y V) − (generation − load)</a:t>
-            </a:r>
-            <a:endParaRPr lang="en-US" sz="2200" dirty="0"/>
-          </a:p>
-        </p:txBody>
-      </p:sp>
-      <p:sp>
-        <p:nvSpPr>
-          <p:cNvPr id="6" name="Text 3"/>
-          <p:cNvSpPr/>
-          <p:nvPr/>
-        </p:nvSpPr>
-        <p:spPr>
-          <a:xfrm>
-            <a:off x="812800" y="3004820"/>
-            <a:ext cx="10883392" cy="939800"/>
-          </a:xfrm>
-          <a:prstGeom prst="rect">
-            <a:avLst/>
-          </a:prstGeom>
-          <a:noFill/>
-          <a:ln/>
-        </p:spPr>
-        <p:txBody>
-          <a:bodyPr wrap="square" lIns="0" tIns="0" rIns="0" bIns="0" rtlCol="0" anchor="t">
-            <a:normAutofit/>
-          </a:bodyPr>
-          <a:lstStyle/>
-          <a:p>
-            <a:pPr marL="243840" indent="-196342" algn="l">
+          </a:p>
+          <a:p>
+            <a:pPr algn="l" marL="243840" indent="-196342">
               <a:lnSpc>
                 <a:spcPts val="2400"/>
               </a:lnSpc>
@@ -9997,20 +13990,1230 @@
               <a:buChar char="•"/>
             </a:pPr>
             <a:r>
-              <a:rPr lang="en-US" sz="1600" dirty="0">
+              <a:rPr sz="1500" b="0" i="0">
                 <a:solidFill>
                   <a:srgbClr val="1B1F2A"/>
                 </a:solidFill>
-                <a:latin typeface="IBM Plex Sans" pitchFamily="34" charset="0"/>
-                <a:ea typeface="IBM Plex Sans" pitchFamily="34" charset="-122"/>
-                <a:cs typeface="IBM Plex Sans" pitchFamily="34" charset="-120"/>
+                <a:latin typeface="IBM Plex Sans"/>
+                <a:ea typeface="IBM Plex Sans"/>
+                <a:cs typeface="IBM Plex Sans"/>
               </a:rPr>
-              <a:t>Unknowns x: voltage angles θ (PV and PQ buses) and magnitudes |V| (PQ buses)</a:t>
+              <a:t>so x₁ = [−0.05, 0.98]</a:t>
             </a:r>
-            <a:endParaRPr lang="en-US" sz="1600" dirty="0"/>
-          </a:p>
-          <a:p>
-            <a:pPr marL="243840" indent="-196342" algn="l">
+          </a:p>
+        </p:txBody>
+      </p:sp>
+      <p:graphicFrame>
+        <p:nvGraphicFramePr>
+          <p:cNvPr id="15" name="Table 14"/>
+          <p:cNvGraphicFramePr>
+            <a:graphicFrameLocks noGrp="1"/>
+          </p:cNvGraphicFramePr>
+          <p:nvPr/>
+        </p:nvGraphicFramePr>
+        <p:xfrm>
+          <a:off x="6400800" y="1554480"/>
+          <a:ext cx="4937760" cy="1828800"/>
+        </p:xfrm>
+        <a:graphic>
+          <a:graphicData uri="http://schemas.openxmlformats.org/drawingml/2006/table">
+            <a:tbl>
+              <a:tblPr/>
+              <a:tblGrid>
+                <a:gridCol w="731520"/>
+                <a:gridCol w="1463040"/>
+                <a:gridCol w="1280160"/>
+                <a:gridCol w="1463040"/>
+              </a:tblGrid>
+              <a:tr h="365760">
+                <a:tc>
+                  <a:txBody>
+                    <a:bodyPr/>
+                    <a:lstStyle/>
+                    <a:p>
+                      <a:r>
+                        <a:rPr sz="1400" b="1" i="0">
+                          <a:solidFill>
+                            <a:srgbClr val="1B1F2A"/>
+                          </a:solidFill>
+                          <a:latin typeface="IBM Plex Sans"/>
+                          <a:ea typeface="IBM Plex Sans"/>
+                          <a:cs typeface="IBM Plex Sans"/>
+                        </a:rPr>
+                        <a:t>It.</a:t>
+                      </a:r>
+                    </a:p>
+                  </a:txBody>
+                  <a:tcPr marL="66675" marR="66675" marT="66675" marB="66675">
+                    <a:lnL w="12700" cap="flat" cmpd="sng" algn="ctr">
+                      <a:solidFill>
+                        <a:srgbClr val="C8C8C6"/>
+                      </a:solidFill>
+                      <a:prstDash val="solid"/>
+                      <a:round/>
+                      <a:headEnd type="none" w="med" len="med"/>
+                      <a:tailEnd type="none" w="med" len="med"/>
+                    </a:lnL>
+                    <a:lnR w="12700" cap="flat" cmpd="sng" algn="ctr">
+                      <a:solidFill>
+                        <a:srgbClr val="BABAB8"/>
+                      </a:solidFill>
+                      <a:prstDash val="solid"/>
+                      <a:round/>
+                      <a:headEnd type="none" w="med" len="med"/>
+                      <a:tailEnd type="none" w="med" len="med"/>
+                    </a:lnR>
+                    <a:lnT w="12700" cap="flat" cmpd="sng" algn="ctr">
+                      <a:solidFill>
+                        <a:srgbClr val="C8C8C6"/>
+                      </a:solidFill>
+                      <a:prstDash val="solid"/>
+                      <a:round/>
+                      <a:headEnd type="none" w="med" len="med"/>
+                      <a:tailEnd type="none" w="med" len="med"/>
+                    </a:lnT>
+                    <a:lnB w="12700" cap="flat" cmpd="sng" algn="ctr">
+                      <a:solidFill>
+                        <a:srgbClr val="BABAB8"/>
+                      </a:solidFill>
+                      <a:prstDash val="solid"/>
+                      <a:round/>
+                      <a:headEnd type="none" w="med" len="med"/>
+                      <a:tailEnd type="none" w="med" len="med"/>
+                    </a:lnB>
+                    <a:solidFill>
+                      <a:srgbClr val="E9E9E7"/>
+                    </a:solidFill>
+                  </a:tcPr>
+                </a:tc>
+                <a:tc>
+                  <a:txBody>
+                    <a:bodyPr/>
+                    <a:lstStyle/>
+                    <a:p>
+                      <a:r>
+                        <a:rPr sz="1400" b="1" i="0">
+                          <a:solidFill>
+                            <a:srgbClr val="1B1F2A"/>
+                          </a:solidFill>
+                          <a:latin typeface="IBM Plex Sans"/>
+                          <a:ea typeface="IBM Plex Sans"/>
+                          <a:cs typeface="IBM Plex Sans"/>
+                        </a:rPr>
+                        <a:t>θ₂ (rad)</a:t>
+                      </a:r>
+                    </a:p>
+                  </a:txBody>
+                  <a:tcPr marL="66675" marR="66675" marT="66675" marB="66675">
+                    <a:lnL w="12700" cap="flat" cmpd="sng" algn="ctr">
+                      <a:solidFill>
+                        <a:srgbClr val="C8C8C6"/>
+                      </a:solidFill>
+                      <a:prstDash val="solid"/>
+                      <a:round/>
+                      <a:headEnd type="none" w="med" len="med"/>
+                      <a:tailEnd type="none" w="med" len="med"/>
+                    </a:lnL>
+                    <a:lnR w="12700" cap="flat" cmpd="sng" algn="ctr">
+                      <a:solidFill>
+                        <a:srgbClr val="BABAB8"/>
+                      </a:solidFill>
+                      <a:prstDash val="solid"/>
+                      <a:round/>
+                      <a:headEnd type="none" w="med" len="med"/>
+                      <a:tailEnd type="none" w="med" len="med"/>
+                    </a:lnR>
+                    <a:lnT w="12700" cap="flat" cmpd="sng" algn="ctr">
+                      <a:solidFill>
+                        <a:srgbClr val="C8C8C6"/>
+                      </a:solidFill>
+                      <a:prstDash val="solid"/>
+                      <a:round/>
+                      <a:headEnd type="none" w="med" len="med"/>
+                      <a:tailEnd type="none" w="med" len="med"/>
+                    </a:lnT>
+                    <a:lnB w="12700" cap="flat" cmpd="sng" algn="ctr">
+                      <a:solidFill>
+                        <a:srgbClr val="BABAB8"/>
+                      </a:solidFill>
+                      <a:prstDash val="solid"/>
+                      <a:round/>
+                      <a:headEnd type="none" w="med" len="med"/>
+                      <a:tailEnd type="none" w="med" len="med"/>
+                    </a:lnB>
+                    <a:solidFill>
+                      <a:srgbClr val="E9E9E7"/>
+                    </a:solidFill>
+                  </a:tcPr>
+                </a:tc>
+                <a:tc>
+                  <a:txBody>
+                    <a:bodyPr/>
+                    <a:lstStyle/>
+                    <a:p>
+                      <a:r>
+                        <a:rPr sz="1400" b="1" i="0">
+                          <a:solidFill>
+                            <a:srgbClr val="1B1F2A"/>
+                          </a:solidFill>
+                          <a:latin typeface="IBM Plex Sans"/>
+                          <a:ea typeface="IBM Plex Sans"/>
+                          <a:cs typeface="IBM Plex Sans"/>
+                        </a:rPr>
+                        <a:t>|V₂|</a:t>
+                      </a:r>
+                    </a:p>
+                  </a:txBody>
+                  <a:tcPr marL="66675" marR="66675" marT="66675" marB="66675">
+                    <a:lnL w="12700" cap="flat" cmpd="sng" algn="ctr">
+                      <a:solidFill>
+                        <a:srgbClr val="C8C8C6"/>
+                      </a:solidFill>
+                      <a:prstDash val="solid"/>
+                      <a:round/>
+                      <a:headEnd type="none" w="med" len="med"/>
+                      <a:tailEnd type="none" w="med" len="med"/>
+                    </a:lnL>
+                    <a:lnR w="12700" cap="flat" cmpd="sng" algn="ctr">
+                      <a:solidFill>
+                        <a:srgbClr val="BABAB8"/>
+                      </a:solidFill>
+                      <a:prstDash val="solid"/>
+                      <a:round/>
+                      <a:headEnd type="none" w="med" len="med"/>
+                      <a:tailEnd type="none" w="med" len="med"/>
+                    </a:lnR>
+                    <a:lnT w="12700" cap="flat" cmpd="sng" algn="ctr">
+                      <a:solidFill>
+                        <a:srgbClr val="C8C8C6"/>
+                      </a:solidFill>
+                      <a:prstDash val="solid"/>
+                      <a:round/>
+                      <a:headEnd type="none" w="med" len="med"/>
+                      <a:tailEnd type="none" w="med" len="med"/>
+                    </a:lnT>
+                    <a:lnB w="12700" cap="flat" cmpd="sng" algn="ctr">
+                      <a:solidFill>
+                        <a:srgbClr val="BABAB8"/>
+                      </a:solidFill>
+                      <a:prstDash val="solid"/>
+                      <a:round/>
+                      <a:headEnd type="none" w="med" len="med"/>
+                      <a:tailEnd type="none" w="med" len="med"/>
+                    </a:lnB>
+                    <a:solidFill>
+                      <a:srgbClr val="E9E9E7"/>
+                    </a:solidFill>
+                  </a:tcPr>
+                </a:tc>
+                <a:tc>
+                  <a:txBody>
+                    <a:bodyPr/>
+                    <a:lstStyle/>
+                    <a:p>
+                      <a:r>
+                        <a:rPr sz="1400" b="1" i="0">
+                          <a:solidFill>
+                            <a:srgbClr val="1B1F2A"/>
+                          </a:solidFill>
+                          <a:latin typeface="IBM Plex Sans"/>
+                          <a:ea typeface="IBM Plex Sans"/>
+                          <a:cs typeface="IBM Plex Sans"/>
+                        </a:rPr>
+                        <a:t>max |g|</a:t>
+                      </a:r>
+                    </a:p>
+                  </a:txBody>
+                  <a:tcPr marL="66675" marR="66675" marT="66675" marB="66675">
+                    <a:lnL w="12700" cap="flat" cmpd="sng" algn="ctr">
+                      <a:solidFill>
+                        <a:srgbClr val="C8C8C6"/>
+                      </a:solidFill>
+                      <a:prstDash val="solid"/>
+                      <a:round/>
+                      <a:headEnd type="none" w="med" len="med"/>
+                      <a:tailEnd type="none" w="med" len="med"/>
+                    </a:lnL>
+                    <a:lnR w="12700" cap="flat" cmpd="sng" algn="ctr">
+                      <a:solidFill>
+                        <a:srgbClr val="BABAB8"/>
+                      </a:solidFill>
+                      <a:prstDash val="solid"/>
+                      <a:round/>
+                      <a:headEnd type="none" w="med" len="med"/>
+                      <a:tailEnd type="none" w="med" len="med"/>
+                    </a:lnR>
+                    <a:lnT w="12700" cap="flat" cmpd="sng" algn="ctr">
+                      <a:solidFill>
+                        <a:srgbClr val="C8C8C6"/>
+                      </a:solidFill>
+                      <a:prstDash val="solid"/>
+                      <a:round/>
+                      <a:headEnd type="none" w="med" len="med"/>
+                      <a:tailEnd type="none" w="med" len="med"/>
+                    </a:lnT>
+                    <a:lnB w="12700" cap="flat" cmpd="sng" algn="ctr">
+                      <a:solidFill>
+                        <a:srgbClr val="BABAB8"/>
+                      </a:solidFill>
+                      <a:prstDash val="solid"/>
+                      <a:round/>
+                      <a:headEnd type="none" w="med" len="med"/>
+                      <a:tailEnd type="none" w="med" len="med"/>
+                    </a:lnB>
+                    <a:solidFill>
+                      <a:srgbClr val="E9E9E7"/>
+                    </a:solidFill>
+                  </a:tcPr>
+                </a:tc>
+              </a:tr>
+              <a:tr h="365760">
+                <a:tc>
+                  <a:txBody>
+                    <a:bodyPr/>
+                    <a:lstStyle/>
+                    <a:p>
+                      <a:r>
+                        <a:rPr sz="1400" b="0" i="0">
+                          <a:solidFill>
+                            <a:srgbClr val="1B1F2A"/>
+                          </a:solidFill>
+                          <a:latin typeface="IBM Plex Sans"/>
+                          <a:ea typeface="IBM Plex Sans"/>
+                          <a:cs typeface="IBM Plex Sans"/>
+                        </a:rPr>
+                        <a:t>0</a:t>
+                      </a:r>
+                    </a:p>
+                  </a:txBody>
+                  <a:tcPr marL="66675" marR="66675" marT="66675" marB="66675">
+                    <a:lnL w="12700" cap="flat" cmpd="sng" algn="ctr">
+                      <a:solidFill>
+                        <a:srgbClr val="C8C8C6"/>
+                      </a:solidFill>
+                      <a:prstDash val="solid"/>
+                      <a:round/>
+                      <a:headEnd type="none" w="med" len="med"/>
+                      <a:tailEnd type="none" w="med" len="med"/>
+                    </a:lnL>
+                    <a:lnR w="12700" cap="flat" cmpd="sng" algn="ctr">
+                      <a:solidFill>
+                        <a:srgbClr val="C8C8C6"/>
+                      </a:solidFill>
+                      <a:prstDash val="solid"/>
+                      <a:round/>
+                      <a:headEnd type="none" w="med" len="med"/>
+                      <a:tailEnd type="none" w="med" len="med"/>
+                    </a:lnR>
+                    <a:lnT w="12700" cap="flat" cmpd="sng" algn="ctr">
+                      <a:solidFill>
+                        <a:srgbClr val="BABAB8"/>
+                      </a:solidFill>
+                      <a:prstDash val="solid"/>
+                      <a:round/>
+                      <a:headEnd type="none" w="med" len="med"/>
+                      <a:tailEnd type="none" w="med" len="med"/>
+                    </a:lnT>
+                    <a:lnB w="12700" cap="flat" cmpd="sng" algn="ctr">
+                      <a:solidFill>
+                        <a:srgbClr val="C8C8C6"/>
+                      </a:solidFill>
+                      <a:prstDash val="solid"/>
+                      <a:round/>
+                      <a:headEnd type="none" w="med" len="med"/>
+                      <a:tailEnd type="none" w="med" len="med"/>
+                    </a:lnB>
+                  </a:tcPr>
+                </a:tc>
+                <a:tc>
+                  <a:txBody>
+                    <a:bodyPr/>
+                    <a:lstStyle/>
+                    <a:p>
+                      <a:r>
+                        <a:rPr sz="1400" b="0" i="0">
+                          <a:solidFill>
+                            <a:srgbClr val="1B1F2A"/>
+                          </a:solidFill>
+                          <a:latin typeface="IBM Plex Sans"/>
+                          <a:ea typeface="IBM Plex Sans"/>
+                          <a:cs typeface="IBM Plex Sans"/>
+                        </a:rPr>
+                        <a:t>0</a:t>
+                      </a:r>
+                    </a:p>
+                  </a:txBody>
+                  <a:tcPr marL="66675" marR="66675" marT="66675" marB="66675">
+                    <a:lnL w="12700" cap="flat" cmpd="sng" algn="ctr">
+                      <a:solidFill>
+                        <a:srgbClr val="C8C8C6"/>
+                      </a:solidFill>
+                      <a:prstDash val="solid"/>
+                      <a:round/>
+                      <a:headEnd type="none" w="med" len="med"/>
+                      <a:tailEnd type="none" w="med" len="med"/>
+                    </a:lnL>
+                    <a:lnR w="12700" cap="flat" cmpd="sng" algn="ctr">
+                      <a:solidFill>
+                        <a:srgbClr val="C8C8C6"/>
+                      </a:solidFill>
+                      <a:prstDash val="solid"/>
+                      <a:round/>
+                      <a:headEnd type="none" w="med" len="med"/>
+                      <a:tailEnd type="none" w="med" len="med"/>
+                    </a:lnR>
+                    <a:lnT w="12700" cap="flat" cmpd="sng" algn="ctr">
+                      <a:solidFill>
+                        <a:srgbClr val="BABAB8"/>
+                      </a:solidFill>
+                      <a:prstDash val="solid"/>
+                      <a:round/>
+                      <a:headEnd type="none" w="med" len="med"/>
+                      <a:tailEnd type="none" w="med" len="med"/>
+                    </a:lnT>
+                    <a:lnB w="12700" cap="flat" cmpd="sng" algn="ctr">
+                      <a:solidFill>
+                        <a:srgbClr val="C8C8C6"/>
+                      </a:solidFill>
+                      <a:prstDash val="solid"/>
+                      <a:round/>
+                      <a:headEnd type="none" w="med" len="med"/>
+                      <a:tailEnd type="none" w="med" len="med"/>
+                    </a:lnB>
+                  </a:tcPr>
+                </a:tc>
+                <a:tc>
+                  <a:txBody>
+                    <a:bodyPr/>
+                    <a:lstStyle/>
+                    <a:p>
+                      <a:r>
+                        <a:rPr sz="1400" b="0" i="0">
+                          <a:solidFill>
+                            <a:srgbClr val="1B1F2A"/>
+                          </a:solidFill>
+                          <a:latin typeface="IBM Plex Sans"/>
+                          <a:ea typeface="IBM Plex Sans"/>
+                          <a:cs typeface="IBM Plex Sans"/>
+                        </a:rPr>
+                        <a:t>1</a:t>
+                      </a:r>
+                    </a:p>
+                  </a:txBody>
+                  <a:tcPr marL="66675" marR="66675" marT="66675" marB="66675">
+                    <a:lnL w="12700" cap="flat" cmpd="sng" algn="ctr">
+                      <a:solidFill>
+                        <a:srgbClr val="C8C8C6"/>
+                      </a:solidFill>
+                      <a:prstDash val="solid"/>
+                      <a:round/>
+                      <a:headEnd type="none" w="med" len="med"/>
+                      <a:tailEnd type="none" w="med" len="med"/>
+                    </a:lnL>
+                    <a:lnR w="12700" cap="flat" cmpd="sng" algn="ctr">
+                      <a:solidFill>
+                        <a:srgbClr val="C8C8C6"/>
+                      </a:solidFill>
+                      <a:prstDash val="solid"/>
+                      <a:round/>
+                      <a:headEnd type="none" w="med" len="med"/>
+                      <a:tailEnd type="none" w="med" len="med"/>
+                    </a:lnR>
+                    <a:lnT w="12700" cap="flat" cmpd="sng" algn="ctr">
+                      <a:solidFill>
+                        <a:srgbClr val="BABAB8"/>
+                      </a:solidFill>
+                      <a:prstDash val="solid"/>
+                      <a:round/>
+                      <a:headEnd type="none" w="med" len="med"/>
+                      <a:tailEnd type="none" w="med" len="med"/>
+                    </a:lnT>
+                    <a:lnB w="12700" cap="flat" cmpd="sng" algn="ctr">
+                      <a:solidFill>
+                        <a:srgbClr val="C8C8C6"/>
+                      </a:solidFill>
+                      <a:prstDash val="solid"/>
+                      <a:round/>
+                      <a:headEnd type="none" w="med" len="med"/>
+                      <a:tailEnd type="none" w="med" len="med"/>
+                    </a:lnB>
+                  </a:tcPr>
+                </a:tc>
+                <a:tc>
+                  <a:txBody>
+                    <a:bodyPr/>
+                    <a:lstStyle/>
+                    <a:p>
+                      <a:r>
+                        <a:rPr sz="1400" b="0" i="0">
+                          <a:solidFill>
+                            <a:srgbClr val="1B1F2A"/>
+                          </a:solidFill>
+                          <a:latin typeface="IBM Plex Sans"/>
+                          <a:ea typeface="IBM Plex Sans"/>
+                          <a:cs typeface="IBM Plex Sans"/>
+                        </a:rPr>
+                        <a:t>0.5</a:t>
+                      </a:r>
+                    </a:p>
+                  </a:txBody>
+                  <a:tcPr marL="66675" marR="66675" marT="66675" marB="66675">
+                    <a:lnL w="12700" cap="flat" cmpd="sng" algn="ctr">
+                      <a:solidFill>
+                        <a:srgbClr val="C8C8C6"/>
+                      </a:solidFill>
+                      <a:prstDash val="solid"/>
+                      <a:round/>
+                      <a:headEnd type="none" w="med" len="med"/>
+                      <a:tailEnd type="none" w="med" len="med"/>
+                    </a:lnL>
+                    <a:lnR w="12700" cap="flat" cmpd="sng" algn="ctr">
+                      <a:solidFill>
+                        <a:srgbClr val="C8C8C6"/>
+                      </a:solidFill>
+                      <a:prstDash val="solid"/>
+                      <a:round/>
+                      <a:headEnd type="none" w="med" len="med"/>
+                      <a:tailEnd type="none" w="med" len="med"/>
+                    </a:lnR>
+                    <a:lnT w="12700" cap="flat" cmpd="sng" algn="ctr">
+                      <a:solidFill>
+                        <a:srgbClr val="BABAB8"/>
+                      </a:solidFill>
+                      <a:prstDash val="solid"/>
+                      <a:round/>
+                      <a:headEnd type="none" w="med" len="med"/>
+                      <a:tailEnd type="none" w="med" len="med"/>
+                    </a:lnT>
+                    <a:lnB w="12700" cap="flat" cmpd="sng" algn="ctr">
+                      <a:solidFill>
+                        <a:srgbClr val="C8C8C6"/>
+                      </a:solidFill>
+                      <a:prstDash val="solid"/>
+                      <a:round/>
+                      <a:headEnd type="none" w="med" len="med"/>
+                      <a:tailEnd type="none" w="med" len="med"/>
+                    </a:lnB>
+                  </a:tcPr>
+                </a:tc>
+              </a:tr>
+              <a:tr h="365760">
+                <a:tc>
+                  <a:txBody>
+                    <a:bodyPr/>
+                    <a:lstStyle/>
+                    <a:p>
+                      <a:r>
+                        <a:rPr sz="1400" b="0" i="0">
+                          <a:solidFill>
+                            <a:srgbClr val="1B1F2A"/>
+                          </a:solidFill>
+                          <a:latin typeface="IBM Plex Sans"/>
+                          <a:ea typeface="IBM Plex Sans"/>
+                          <a:cs typeface="IBM Plex Sans"/>
+                        </a:rPr>
+                        <a:t>1</a:t>
+                      </a:r>
+                    </a:p>
+                  </a:txBody>
+                  <a:tcPr marL="66675" marR="66675" marT="66675" marB="66675">
+                    <a:lnL w="12700" cap="flat" cmpd="sng" algn="ctr">
+                      <a:solidFill>
+                        <a:srgbClr val="C8C8C6"/>
+                      </a:solidFill>
+                      <a:prstDash val="solid"/>
+                      <a:round/>
+                      <a:headEnd type="none" w="med" len="med"/>
+                      <a:tailEnd type="none" w="med" len="med"/>
+                    </a:lnL>
+                    <a:lnR w="12700" cap="flat" cmpd="sng" algn="ctr">
+                      <a:solidFill>
+                        <a:srgbClr val="C8C8C6"/>
+                      </a:solidFill>
+                      <a:prstDash val="solid"/>
+                      <a:round/>
+                      <a:headEnd type="none" w="med" len="med"/>
+                      <a:tailEnd type="none" w="med" len="med"/>
+                    </a:lnR>
+                    <a:lnT w="12700" cap="flat" cmpd="sng" algn="ctr">
+                      <a:solidFill>
+                        <a:srgbClr val="BABAB8"/>
+                      </a:solidFill>
+                      <a:prstDash val="solid"/>
+                      <a:round/>
+                      <a:headEnd type="none" w="med" len="med"/>
+                      <a:tailEnd type="none" w="med" len="med"/>
+                    </a:lnT>
+                    <a:lnB w="12700" cap="flat" cmpd="sng" algn="ctr">
+                      <a:solidFill>
+                        <a:srgbClr val="C8C8C6"/>
+                      </a:solidFill>
+                      <a:prstDash val="solid"/>
+                      <a:round/>
+                      <a:headEnd type="none" w="med" len="med"/>
+                      <a:tailEnd type="none" w="med" len="med"/>
+                    </a:lnB>
+                  </a:tcPr>
+                </a:tc>
+                <a:tc>
+                  <a:txBody>
+                    <a:bodyPr/>
+                    <a:lstStyle/>
+                    <a:p>
+                      <a:r>
+                        <a:rPr sz="1400" b="0" i="0">
+                          <a:solidFill>
+                            <a:srgbClr val="1B1F2A"/>
+                          </a:solidFill>
+                          <a:latin typeface="IBM Plex Sans"/>
+                          <a:ea typeface="IBM Plex Sans"/>
+                          <a:cs typeface="IBM Plex Sans"/>
+                        </a:rPr>
+                        <a:t>−0.05</a:t>
+                      </a:r>
+                    </a:p>
+                  </a:txBody>
+                  <a:tcPr marL="66675" marR="66675" marT="66675" marB="66675">
+                    <a:lnL w="12700" cap="flat" cmpd="sng" algn="ctr">
+                      <a:solidFill>
+                        <a:srgbClr val="C8C8C6"/>
+                      </a:solidFill>
+                      <a:prstDash val="solid"/>
+                      <a:round/>
+                      <a:headEnd type="none" w="med" len="med"/>
+                      <a:tailEnd type="none" w="med" len="med"/>
+                    </a:lnL>
+                    <a:lnR w="12700" cap="flat" cmpd="sng" algn="ctr">
+                      <a:solidFill>
+                        <a:srgbClr val="C8C8C6"/>
+                      </a:solidFill>
+                      <a:prstDash val="solid"/>
+                      <a:round/>
+                      <a:headEnd type="none" w="med" len="med"/>
+                      <a:tailEnd type="none" w="med" len="med"/>
+                    </a:lnR>
+                    <a:lnT w="12700" cap="flat" cmpd="sng" algn="ctr">
+                      <a:solidFill>
+                        <a:srgbClr val="BABAB8"/>
+                      </a:solidFill>
+                      <a:prstDash val="solid"/>
+                      <a:round/>
+                      <a:headEnd type="none" w="med" len="med"/>
+                      <a:tailEnd type="none" w="med" len="med"/>
+                    </a:lnT>
+                    <a:lnB w="12700" cap="flat" cmpd="sng" algn="ctr">
+                      <a:solidFill>
+                        <a:srgbClr val="C8C8C6"/>
+                      </a:solidFill>
+                      <a:prstDash val="solid"/>
+                      <a:round/>
+                      <a:headEnd type="none" w="med" len="med"/>
+                      <a:tailEnd type="none" w="med" len="med"/>
+                    </a:lnB>
+                  </a:tcPr>
+                </a:tc>
+                <a:tc>
+                  <a:txBody>
+                    <a:bodyPr/>
+                    <a:lstStyle/>
+                    <a:p>
+                      <a:r>
+                        <a:rPr sz="1400" b="0" i="0">
+                          <a:solidFill>
+                            <a:srgbClr val="1B1F2A"/>
+                          </a:solidFill>
+                          <a:latin typeface="IBM Plex Sans"/>
+                          <a:ea typeface="IBM Plex Sans"/>
+                          <a:cs typeface="IBM Plex Sans"/>
+                        </a:rPr>
+                        <a:t>0.98</a:t>
+                      </a:r>
+                    </a:p>
+                  </a:txBody>
+                  <a:tcPr marL="66675" marR="66675" marT="66675" marB="66675">
+                    <a:lnL w="12700" cap="flat" cmpd="sng" algn="ctr">
+                      <a:solidFill>
+                        <a:srgbClr val="C8C8C6"/>
+                      </a:solidFill>
+                      <a:prstDash val="solid"/>
+                      <a:round/>
+                      <a:headEnd type="none" w="med" len="med"/>
+                      <a:tailEnd type="none" w="med" len="med"/>
+                    </a:lnL>
+                    <a:lnR w="12700" cap="flat" cmpd="sng" algn="ctr">
+                      <a:solidFill>
+                        <a:srgbClr val="C8C8C6"/>
+                      </a:solidFill>
+                      <a:prstDash val="solid"/>
+                      <a:round/>
+                      <a:headEnd type="none" w="med" len="med"/>
+                      <a:tailEnd type="none" w="med" len="med"/>
+                    </a:lnR>
+                    <a:lnT w="12700" cap="flat" cmpd="sng" algn="ctr">
+                      <a:solidFill>
+                        <a:srgbClr val="BABAB8"/>
+                      </a:solidFill>
+                      <a:prstDash val="solid"/>
+                      <a:round/>
+                      <a:headEnd type="none" w="med" len="med"/>
+                      <a:tailEnd type="none" w="med" len="med"/>
+                    </a:lnT>
+                    <a:lnB w="12700" cap="flat" cmpd="sng" algn="ctr">
+                      <a:solidFill>
+                        <a:srgbClr val="C8C8C6"/>
+                      </a:solidFill>
+                      <a:prstDash val="solid"/>
+                      <a:round/>
+                      <a:headEnd type="none" w="med" len="med"/>
+                      <a:tailEnd type="none" w="med" len="med"/>
+                    </a:lnB>
+                  </a:tcPr>
+                </a:tc>
+                <a:tc>
+                  <a:txBody>
+                    <a:bodyPr/>
+                    <a:lstStyle/>
+                    <a:p>
+                      <a:r>
+                        <a:rPr sz="1400" b="0" i="0">
+                          <a:solidFill>
+                            <a:srgbClr val="1B1F2A"/>
+                          </a:solidFill>
+                          <a:latin typeface="IBM Plex Sans"/>
+                          <a:ea typeface="IBM Plex Sans"/>
+                          <a:cs typeface="IBM Plex Sans"/>
+                        </a:rPr>
+                        <a:t>0.016</a:t>
+                      </a:r>
+                    </a:p>
+                  </a:txBody>
+                  <a:tcPr marL="66675" marR="66675" marT="66675" marB="66675">
+                    <a:lnL w="12700" cap="flat" cmpd="sng" algn="ctr">
+                      <a:solidFill>
+                        <a:srgbClr val="C8C8C6"/>
+                      </a:solidFill>
+                      <a:prstDash val="solid"/>
+                      <a:round/>
+                      <a:headEnd type="none" w="med" len="med"/>
+                      <a:tailEnd type="none" w="med" len="med"/>
+                    </a:lnL>
+                    <a:lnR w="12700" cap="flat" cmpd="sng" algn="ctr">
+                      <a:solidFill>
+                        <a:srgbClr val="C8C8C6"/>
+                      </a:solidFill>
+                      <a:prstDash val="solid"/>
+                      <a:round/>
+                      <a:headEnd type="none" w="med" len="med"/>
+                      <a:tailEnd type="none" w="med" len="med"/>
+                    </a:lnR>
+                    <a:lnT w="12700" cap="flat" cmpd="sng" algn="ctr">
+                      <a:solidFill>
+                        <a:srgbClr val="BABAB8"/>
+                      </a:solidFill>
+                      <a:prstDash val="solid"/>
+                      <a:round/>
+                      <a:headEnd type="none" w="med" len="med"/>
+                      <a:tailEnd type="none" w="med" len="med"/>
+                    </a:lnT>
+                    <a:lnB w="12700" cap="flat" cmpd="sng" algn="ctr">
+                      <a:solidFill>
+                        <a:srgbClr val="C8C8C6"/>
+                      </a:solidFill>
+                      <a:prstDash val="solid"/>
+                      <a:round/>
+                      <a:headEnd type="none" w="med" len="med"/>
+                      <a:tailEnd type="none" w="med" len="med"/>
+                    </a:lnB>
+                  </a:tcPr>
+                </a:tc>
+              </a:tr>
+              <a:tr h="365760">
+                <a:tc>
+                  <a:txBody>
+                    <a:bodyPr/>
+                    <a:lstStyle/>
+                    <a:p>
+                      <a:r>
+                        <a:rPr sz="1400" b="0" i="0">
+                          <a:solidFill>
+                            <a:srgbClr val="1B1F2A"/>
+                          </a:solidFill>
+                          <a:latin typeface="IBM Plex Sans"/>
+                          <a:ea typeface="IBM Plex Sans"/>
+                          <a:cs typeface="IBM Plex Sans"/>
+                        </a:rPr>
+                        <a:t>2</a:t>
+                      </a:r>
+                    </a:p>
+                  </a:txBody>
+                  <a:tcPr marL="66675" marR="66675" marT="66675" marB="66675">
+                    <a:lnL w="12700" cap="flat" cmpd="sng" algn="ctr">
+                      <a:solidFill>
+                        <a:srgbClr val="C8C8C6"/>
+                      </a:solidFill>
+                      <a:prstDash val="solid"/>
+                      <a:round/>
+                      <a:headEnd type="none" w="med" len="med"/>
+                      <a:tailEnd type="none" w="med" len="med"/>
+                    </a:lnL>
+                    <a:lnR w="12700" cap="flat" cmpd="sng" algn="ctr">
+                      <a:solidFill>
+                        <a:srgbClr val="C8C8C6"/>
+                      </a:solidFill>
+                      <a:prstDash val="solid"/>
+                      <a:round/>
+                      <a:headEnd type="none" w="med" len="med"/>
+                      <a:tailEnd type="none" w="med" len="med"/>
+                    </a:lnR>
+                    <a:lnT w="12700" cap="flat" cmpd="sng" algn="ctr">
+                      <a:solidFill>
+                        <a:srgbClr val="BABAB8"/>
+                      </a:solidFill>
+                      <a:prstDash val="solid"/>
+                      <a:round/>
+                      <a:headEnd type="none" w="med" len="med"/>
+                      <a:tailEnd type="none" w="med" len="med"/>
+                    </a:lnT>
+                    <a:lnB w="12700" cap="flat" cmpd="sng" algn="ctr">
+                      <a:solidFill>
+                        <a:srgbClr val="C8C8C6"/>
+                      </a:solidFill>
+                      <a:prstDash val="solid"/>
+                      <a:round/>
+                      <a:headEnd type="none" w="med" len="med"/>
+                      <a:tailEnd type="none" w="med" len="med"/>
+                    </a:lnB>
+                  </a:tcPr>
+                </a:tc>
+                <a:tc>
+                  <a:txBody>
+                    <a:bodyPr/>
+                    <a:lstStyle/>
+                    <a:p>
+                      <a:r>
+                        <a:rPr sz="1400" b="0" i="0">
+                          <a:solidFill>
+                            <a:srgbClr val="1B1F2A"/>
+                          </a:solidFill>
+                          <a:latin typeface="IBM Plex Sans"/>
+                          <a:ea typeface="IBM Plex Sans"/>
+                          <a:cs typeface="IBM Plex Sans"/>
+                        </a:rPr>
+                        <a:t>−0.051132</a:t>
+                      </a:r>
+                    </a:p>
+                  </a:txBody>
+                  <a:tcPr marL="66675" marR="66675" marT="66675" marB="66675">
+                    <a:lnL w="12700" cap="flat" cmpd="sng" algn="ctr">
+                      <a:solidFill>
+                        <a:srgbClr val="C8C8C6"/>
+                      </a:solidFill>
+                      <a:prstDash val="solid"/>
+                      <a:round/>
+                      <a:headEnd type="none" w="med" len="med"/>
+                      <a:tailEnd type="none" w="med" len="med"/>
+                    </a:lnL>
+                    <a:lnR w="12700" cap="flat" cmpd="sng" algn="ctr">
+                      <a:solidFill>
+                        <a:srgbClr val="C8C8C6"/>
+                      </a:solidFill>
+                      <a:prstDash val="solid"/>
+                      <a:round/>
+                      <a:headEnd type="none" w="med" len="med"/>
+                      <a:tailEnd type="none" w="med" len="med"/>
+                    </a:lnR>
+                    <a:lnT w="12700" cap="flat" cmpd="sng" algn="ctr">
+                      <a:solidFill>
+                        <a:srgbClr val="BABAB8"/>
+                      </a:solidFill>
+                      <a:prstDash val="solid"/>
+                      <a:round/>
+                      <a:headEnd type="none" w="med" len="med"/>
+                      <a:tailEnd type="none" w="med" len="med"/>
+                    </a:lnT>
+                    <a:lnB w="12700" cap="flat" cmpd="sng" algn="ctr">
+                      <a:solidFill>
+                        <a:srgbClr val="C8C8C6"/>
+                      </a:solidFill>
+                      <a:prstDash val="solid"/>
+                      <a:round/>
+                      <a:headEnd type="none" w="med" len="med"/>
+                      <a:tailEnd type="none" w="med" len="med"/>
+                    </a:lnB>
+                  </a:tcPr>
+                </a:tc>
+                <a:tc>
+                  <a:txBody>
+                    <a:bodyPr/>
+                    <a:lstStyle/>
+                    <a:p>
+                      <a:r>
+                        <a:rPr sz="1400" b="0" i="0">
+                          <a:solidFill>
+                            <a:srgbClr val="1B1F2A"/>
+                          </a:solidFill>
+                          <a:latin typeface="IBM Plex Sans"/>
+                          <a:ea typeface="IBM Plex Sans"/>
+                          <a:cs typeface="IBM Plex Sans"/>
+                        </a:rPr>
+                        <a:t>0.978252</a:t>
+                      </a:r>
+                    </a:p>
+                  </a:txBody>
+                  <a:tcPr marL="66675" marR="66675" marT="66675" marB="66675">
+                    <a:lnL w="12700" cap="flat" cmpd="sng" algn="ctr">
+                      <a:solidFill>
+                        <a:srgbClr val="C8C8C6"/>
+                      </a:solidFill>
+                      <a:prstDash val="solid"/>
+                      <a:round/>
+                      <a:headEnd type="none" w="med" len="med"/>
+                      <a:tailEnd type="none" w="med" len="med"/>
+                    </a:lnL>
+                    <a:lnR w="12700" cap="flat" cmpd="sng" algn="ctr">
+                      <a:solidFill>
+                        <a:srgbClr val="C8C8C6"/>
+                      </a:solidFill>
+                      <a:prstDash val="solid"/>
+                      <a:round/>
+                      <a:headEnd type="none" w="med" len="med"/>
+                      <a:tailEnd type="none" w="med" len="med"/>
+                    </a:lnR>
+                    <a:lnT w="12700" cap="flat" cmpd="sng" algn="ctr">
+                      <a:solidFill>
+                        <a:srgbClr val="BABAB8"/>
+                      </a:solidFill>
+                      <a:prstDash val="solid"/>
+                      <a:round/>
+                      <a:headEnd type="none" w="med" len="med"/>
+                      <a:tailEnd type="none" w="med" len="med"/>
+                    </a:lnT>
+                    <a:lnB w="12700" cap="flat" cmpd="sng" algn="ctr">
+                      <a:solidFill>
+                        <a:srgbClr val="C8C8C6"/>
+                      </a:solidFill>
+                      <a:prstDash val="solid"/>
+                      <a:round/>
+                      <a:headEnd type="none" w="med" len="med"/>
+                      <a:tailEnd type="none" w="med" len="med"/>
+                    </a:lnB>
+                  </a:tcPr>
+                </a:tc>
+                <a:tc>
+                  <a:txBody>
+                    <a:bodyPr/>
+                    <a:lstStyle/>
+                    <a:p>
+                      <a:r>
+                        <a:rPr sz="1400" b="0" i="0">
+                          <a:solidFill>
+                            <a:srgbClr val="1B1F2A"/>
+                          </a:solidFill>
+                          <a:latin typeface="IBM Plex Sans"/>
+                          <a:ea typeface="IBM Plex Sans"/>
+                          <a:cs typeface="IBM Plex Sans"/>
+                        </a:rPr>
+                        <a:t>3.6e-5</a:t>
+                      </a:r>
+                    </a:p>
+                  </a:txBody>
+                  <a:tcPr marL="66675" marR="66675" marT="66675" marB="66675">
+                    <a:lnL w="12700" cap="flat" cmpd="sng" algn="ctr">
+                      <a:solidFill>
+                        <a:srgbClr val="C8C8C6"/>
+                      </a:solidFill>
+                      <a:prstDash val="solid"/>
+                      <a:round/>
+                      <a:headEnd type="none" w="med" len="med"/>
+                      <a:tailEnd type="none" w="med" len="med"/>
+                    </a:lnL>
+                    <a:lnR w="12700" cap="flat" cmpd="sng" algn="ctr">
+                      <a:solidFill>
+                        <a:srgbClr val="C8C8C6"/>
+                      </a:solidFill>
+                      <a:prstDash val="solid"/>
+                      <a:round/>
+                      <a:headEnd type="none" w="med" len="med"/>
+                      <a:tailEnd type="none" w="med" len="med"/>
+                    </a:lnR>
+                    <a:lnT w="12700" cap="flat" cmpd="sng" algn="ctr">
+                      <a:solidFill>
+                        <a:srgbClr val="BABAB8"/>
+                      </a:solidFill>
+                      <a:prstDash val="solid"/>
+                      <a:round/>
+                      <a:headEnd type="none" w="med" len="med"/>
+                      <a:tailEnd type="none" w="med" len="med"/>
+                    </a:lnT>
+                    <a:lnB w="12700" cap="flat" cmpd="sng" algn="ctr">
+                      <a:solidFill>
+                        <a:srgbClr val="C8C8C6"/>
+                      </a:solidFill>
+                      <a:prstDash val="solid"/>
+                      <a:round/>
+                      <a:headEnd type="none" w="med" len="med"/>
+                      <a:tailEnd type="none" w="med" len="med"/>
+                    </a:lnB>
+                  </a:tcPr>
+                </a:tc>
+              </a:tr>
+              <a:tr h="365760">
+                <a:tc>
+                  <a:txBody>
+                    <a:bodyPr/>
+                    <a:lstStyle/>
+                    <a:p>
+                      <a:r>
+                        <a:rPr sz="1400" b="0" i="0">
+                          <a:solidFill>
+                            <a:srgbClr val="1B1F2A"/>
+                          </a:solidFill>
+                          <a:latin typeface="IBM Plex Sans"/>
+                          <a:ea typeface="IBM Plex Sans"/>
+                          <a:cs typeface="IBM Plex Sans"/>
+                        </a:rPr>
+                        <a:t>3</a:t>
+                      </a:r>
+                    </a:p>
+                  </a:txBody>
+                  <a:tcPr marL="66675" marR="66675" marT="66675" marB="66675">
+                    <a:lnL w="12700" cap="flat" cmpd="sng" algn="ctr">
+                      <a:solidFill>
+                        <a:srgbClr val="C8C8C6"/>
+                      </a:solidFill>
+                      <a:prstDash val="solid"/>
+                      <a:round/>
+                      <a:headEnd type="none" w="med" len="med"/>
+                      <a:tailEnd type="none" w="med" len="med"/>
+                    </a:lnL>
+                    <a:lnR w="12700" cap="flat" cmpd="sng" algn="ctr">
+                      <a:solidFill>
+                        <a:srgbClr val="C8C8C6"/>
+                      </a:solidFill>
+                      <a:prstDash val="solid"/>
+                      <a:round/>
+                      <a:headEnd type="none" w="med" len="med"/>
+                      <a:tailEnd type="none" w="med" len="med"/>
+                    </a:lnR>
+                    <a:lnT w="12700" cap="flat" cmpd="sng" algn="ctr">
+                      <a:solidFill>
+                        <a:srgbClr val="BABAB8"/>
+                      </a:solidFill>
+                      <a:prstDash val="solid"/>
+                      <a:round/>
+                      <a:headEnd type="none" w="med" len="med"/>
+                      <a:tailEnd type="none" w="med" len="med"/>
+                    </a:lnT>
+                    <a:lnB w="12700" cap="flat" cmpd="sng" algn="ctr">
+                      <a:solidFill>
+                        <a:srgbClr val="C8C8C6"/>
+                      </a:solidFill>
+                      <a:prstDash val="solid"/>
+                      <a:round/>
+                      <a:headEnd type="none" w="med" len="med"/>
+                      <a:tailEnd type="none" w="med" len="med"/>
+                    </a:lnB>
+                  </a:tcPr>
+                </a:tc>
+                <a:tc>
+                  <a:txBody>
+                    <a:bodyPr/>
+                    <a:lstStyle/>
+                    <a:p>
+                      <a:r>
+                        <a:rPr sz="1400" b="0" i="0">
+                          <a:solidFill>
+                            <a:srgbClr val="1B1F2A"/>
+                          </a:solidFill>
+                          <a:latin typeface="IBM Plex Sans"/>
+                          <a:ea typeface="IBM Plex Sans"/>
+                          <a:cs typeface="IBM Plex Sans"/>
+                        </a:rPr>
+                        <a:t>−0.051134</a:t>
+                      </a:r>
+                    </a:p>
+                  </a:txBody>
+                  <a:tcPr marL="66675" marR="66675" marT="66675" marB="66675">
+                    <a:lnL w="12700" cap="flat" cmpd="sng" algn="ctr">
+                      <a:solidFill>
+                        <a:srgbClr val="C8C8C6"/>
+                      </a:solidFill>
+                      <a:prstDash val="solid"/>
+                      <a:round/>
+                      <a:headEnd type="none" w="med" len="med"/>
+                      <a:tailEnd type="none" w="med" len="med"/>
+                    </a:lnL>
+                    <a:lnR w="12700" cap="flat" cmpd="sng" algn="ctr">
+                      <a:solidFill>
+                        <a:srgbClr val="C8C8C6"/>
+                      </a:solidFill>
+                      <a:prstDash val="solid"/>
+                      <a:round/>
+                      <a:headEnd type="none" w="med" len="med"/>
+                      <a:tailEnd type="none" w="med" len="med"/>
+                    </a:lnR>
+                    <a:lnT w="12700" cap="flat" cmpd="sng" algn="ctr">
+                      <a:solidFill>
+                        <a:srgbClr val="BABAB8"/>
+                      </a:solidFill>
+                      <a:prstDash val="solid"/>
+                      <a:round/>
+                      <a:headEnd type="none" w="med" len="med"/>
+                      <a:tailEnd type="none" w="med" len="med"/>
+                    </a:lnT>
+                    <a:lnB w="12700" cap="flat" cmpd="sng" algn="ctr">
+                      <a:solidFill>
+                        <a:srgbClr val="C8C8C6"/>
+                      </a:solidFill>
+                      <a:prstDash val="solid"/>
+                      <a:round/>
+                      <a:headEnd type="none" w="med" len="med"/>
+                      <a:tailEnd type="none" w="med" len="med"/>
+                    </a:lnB>
+                  </a:tcPr>
+                </a:tc>
+                <a:tc>
+                  <a:txBody>
+                    <a:bodyPr/>
+                    <a:lstStyle/>
+                    <a:p>
+                      <a:r>
+                        <a:rPr sz="1400" b="0" i="0">
+                          <a:solidFill>
+                            <a:srgbClr val="1B1F2A"/>
+                          </a:solidFill>
+                          <a:latin typeface="IBM Plex Sans"/>
+                          <a:ea typeface="IBM Plex Sans"/>
+                          <a:cs typeface="IBM Plex Sans"/>
+                        </a:rPr>
+                        <a:t>0.978248</a:t>
+                      </a:r>
+                    </a:p>
+                  </a:txBody>
+                  <a:tcPr marL="66675" marR="66675" marT="66675" marB="66675">
+                    <a:lnL w="12700" cap="flat" cmpd="sng" algn="ctr">
+                      <a:solidFill>
+                        <a:srgbClr val="C8C8C6"/>
+                      </a:solidFill>
+                      <a:prstDash val="solid"/>
+                      <a:round/>
+                      <a:headEnd type="none" w="med" len="med"/>
+                      <a:tailEnd type="none" w="med" len="med"/>
+                    </a:lnL>
+                    <a:lnR w="12700" cap="flat" cmpd="sng" algn="ctr">
+                      <a:solidFill>
+                        <a:srgbClr val="C8C8C6"/>
+                      </a:solidFill>
+                      <a:prstDash val="solid"/>
+                      <a:round/>
+                      <a:headEnd type="none" w="med" len="med"/>
+                      <a:tailEnd type="none" w="med" len="med"/>
+                    </a:lnR>
+                    <a:lnT w="12700" cap="flat" cmpd="sng" algn="ctr">
+                      <a:solidFill>
+                        <a:srgbClr val="BABAB8"/>
+                      </a:solidFill>
+                      <a:prstDash val="solid"/>
+                      <a:round/>
+                      <a:headEnd type="none" w="med" len="med"/>
+                      <a:tailEnd type="none" w="med" len="med"/>
+                    </a:lnT>
+                    <a:lnB w="12700" cap="flat" cmpd="sng" algn="ctr">
+                      <a:solidFill>
+                        <a:srgbClr val="C8C8C6"/>
+                      </a:solidFill>
+                      <a:prstDash val="solid"/>
+                      <a:round/>
+                      <a:headEnd type="none" w="med" len="med"/>
+                      <a:tailEnd type="none" w="med" len="med"/>
+                    </a:lnB>
+                  </a:tcPr>
+                </a:tc>
+                <a:tc>
+                  <a:txBody>
+                    <a:bodyPr/>
+                    <a:lstStyle/>
+                    <a:p>
+                      <a:r>
+                        <a:rPr sz="1400" b="0" i="0">
+                          <a:solidFill>
+                            <a:srgbClr val="1B1F2A"/>
+                          </a:solidFill>
+                          <a:latin typeface="IBM Plex Sans"/>
+                          <a:ea typeface="IBM Plex Sans"/>
+                          <a:cs typeface="IBM Plex Sans"/>
+                        </a:rPr>
+                        <a:t>1.7e-10</a:t>
+                      </a:r>
+                    </a:p>
+                  </a:txBody>
+                  <a:tcPr marL="66675" marR="66675" marT="66675" marB="66675">
+                    <a:lnL w="12700" cap="flat" cmpd="sng" algn="ctr">
+                      <a:solidFill>
+                        <a:srgbClr val="C8C8C6"/>
+                      </a:solidFill>
+                      <a:prstDash val="solid"/>
+                      <a:round/>
+                      <a:headEnd type="none" w="med" len="med"/>
+                      <a:tailEnd type="none" w="med" len="med"/>
+                    </a:lnL>
+                    <a:lnR w="12700" cap="flat" cmpd="sng" algn="ctr">
+                      <a:solidFill>
+                        <a:srgbClr val="C8C8C6"/>
+                      </a:solidFill>
+                      <a:prstDash val="solid"/>
+                      <a:round/>
+                      <a:headEnd type="none" w="med" len="med"/>
+                      <a:tailEnd type="none" w="med" len="med"/>
+                    </a:lnR>
+                    <a:lnT w="12700" cap="flat" cmpd="sng" algn="ctr">
+                      <a:solidFill>
+                        <a:srgbClr val="BABAB8"/>
+                      </a:solidFill>
+                      <a:prstDash val="solid"/>
+                      <a:round/>
+                      <a:headEnd type="none" w="med" len="med"/>
+                      <a:tailEnd type="none" w="med" len="med"/>
+                    </a:lnT>
+                    <a:lnB w="12700" cap="flat" cmpd="sng" algn="ctr">
+                      <a:solidFill>
+                        <a:srgbClr val="C8C8C6"/>
+                      </a:solidFill>
+                      <a:prstDash val="solid"/>
+                      <a:round/>
+                      <a:headEnd type="none" w="med" len="med"/>
+                      <a:tailEnd type="none" w="med" len="med"/>
+                    </a:lnB>
+                  </a:tcPr>
+                </a:tc>
+              </a:tr>
+            </a:tbl>
+          </a:graphicData>
+        </a:graphic>
+      </p:graphicFrame>
+      <p:sp>
+        <p:nvSpPr>
+          <p:cNvPr id="16" name="TextBox 15"/>
+          <p:cNvSpPr txBox="1"/>
+          <p:nvPr/>
+        </p:nvSpPr>
+        <p:spPr>
+          <a:xfrm>
+            <a:off x="6400800" y="3611880"/>
+            <a:ext cx="4937760" cy="1554480"/>
+          </a:xfrm>
+          <a:prstGeom prst="rect">
+            <a:avLst/>
+          </a:prstGeom>
+          <a:noFill/>
+        </p:spPr>
+        <p:txBody>
+          <a:bodyPr wrap="square" lIns="0" rIns="0" tIns="0" bIns="0">
+            <a:spAutoFit/>
+          </a:bodyPr>
+          <a:lstStyle/>
+          <a:p>
+            <a:pPr algn="l" marL="243840" indent="-196342">
               <a:lnSpc>
                 <a:spcPts val="2400"/>
               </a:lnSpc>
@@ -10018,20 +15221,19 @@
               <a:buChar char="•"/>
             </a:pPr>
             <a:r>
-              <a:rPr lang="en-US" sz="1600" dirty="0">
+              <a:rPr sz="1500" b="0" i="0">
                 <a:solidFill>
                   <a:srgbClr val="1B1F2A"/>
                 </a:solidFill>
-                <a:latin typeface="IBM Plex Sans" pitchFamily="34" charset="0"/>
-                <a:ea typeface="IBM Plex Sans" pitchFamily="34" charset="-122"/>
-                <a:cs typeface="IBM Plex Sans" pitchFamily="34" charset="-120"/>
+                <a:latin typeface="IBM Plex Sans"/>
+                <a:ea typeface="IBM Plex Sans"/>
+                <a:cs typeface="IBM Plex Sans"/>
               </a:rPr>
-              <a:t>Flat start x₀: all θ = 0, all |V| = 1</a:t>
+              <a:t>|V₂| = 0.978 pu at −2.93°</a:t>
             </a:r>
-            <a:endParaRPr lang="en-US" sz="1600" dirty="0"/>
-          </a:p>
-          <a:p>
-            <a:pPr marL="243840" indent="-196342" algn="l">
+          </a:p>
+          <a:p>
+            <a:pPr algn="l" marL="243840" indent="-196342">
               <a:lnSpc>
                 <a:spcPts val="2400"/>
               </a:lnSpc>
@@ -10039,108 +15241,353 @@
               <a:buChar char="•"/>
             </a:pPr>
             <a:r>
-              <a:rPr lang="en-US" sz="1600" dirty="0">
+              <a:rPr sz="1500" b="0" i="0">
                 <a:solidFill>
                   <a:srgbClr val="1B1F2A"/>
                 </a:solidFill>
-                <a:latin typeface="IBM Plex Sans" pitchFamily="34" charset="0"/>
-                <a:ea typeface="IBM Plex Sans" pitchFamily="34" charset="-122"/>
-                <a:cs typeface="IBM Plex Sans" pitchFamily="34" charset="-120"/>
+                <a:latin typeface="IBM Plex Sans"/>
+                <a:ea typeface="IBM Plex Sans"/>
+                <a:cs typeface="IBM Plex Sans"/>
               </a:rPr>
-              <a:t>Newton from the flat start diverges on all 5 large grids of the paper</a:t>
+              <a:t>Slack supplies 0.5 + 0.23j pu: the load's 0.5 + 0.2j plus 0.03 used by the line</a:t>
             </a:r>
-            <a:endParaRPr lang="en-US" sz="1600" dirty="0"/>
+          </a:p>
+          <a:p>
+            <a:pPr algn="l" marL="243840" indent="-196342">
+              <a:lnSpc>
+                <a:spcPts val="2400"/>
+              </a:lnSpc>
+              <a:buSzPct val="100000"/>
+              <a:buChar char="•"/>
+            </a:pPr>
+            <a:r>
+              <a:rPr sz="1500" b="0" i="0">
+                <a:solidFill>
+                  <a:srgbClr val="1B1F2A"/>
+                </a:solidFill>
+                <a:latin typeface="IBM Plex Sans"/>
+                <a:ea typeface="IBM Plex Sans"/>
+                <a:cs typeface="IBM Plex Sans"/>
+              </a:rPr>
+              <a:t>The error squares each step: quadratic convergence</a:t>
+            </a:r>
           </a:p>
         </p:txBody>
       </p:sp>
+    </p:spTree>
+  </p:cSld>
+  <p:clrMapOvr>
+    <a:masterClrMapping/>
+  </p:clrMapOvr>
+</p:sld>
+</file>
+
+<file path=ppt/slides/slide24.xml><?xml version="1.0" encoding="utf-8"?>
+<p:sld xmlns:a="http://schemas.openxmlformats.org/drawingml/2006/main" xmlns:p="http://schemas.openxmlformats.org/presentationml/2006/main" xmlns:r="http://schemas.openxmlformats.org/officeDocument/2006/relationships">
+  <p:cSld>
+    <p:bg>
+      <p:bgPr>
+        <a:solidFill>
+          <a:srgbClr val="FBFBF9"/>
+        </a:solidFill>
+        <a:effectLst/>
+      </p:bgPr>
+    </p:bg>
+    <p:spTree>
+      <p:nvGrpSpPr>
+        <p:cNvPr id="1" name=""/>
+        <p:cNvGrpSpPr/>
+        <p:nvPr/>
+      </p:nvGrpSpPr>
+      <p:grpSpPr/>
       <p:sp>
         <p:nvSpPr>
-          <p:cNvPr id="7" name="Text 4"/>
-          <p:cNvSpPr/>
+          <p:cNvPr id="2" name="TextBox 1"/>
+          <p:cNvSpPr txBox="1"/>
           <p:nvPr/>
         </p:nvSpPr>
         <p:spPr>
           <a:xfrm>
-            <a:off x="812800" y="6238241"/>
-            <a:ext cx="7848600" cy="238760"/>
+            <a:off x="813816" y="713232"/>
+            <a:ext cx="10881360" cy="429768"/>
           </a:xfrm>
           <a:prstGeom prst="rect">
             <a:avLst/>
           </a:prstGeom>
           <a:noFill/>
-          <a:ln/>
         </p:spPr>
         <p:txBody>
-          <a:bodyPr wrap="square" lIns="0" tIns="0" rIns="0" bIns="0" rtlCol="0" anchor="t">
-            <a:normAutofit/>
+          <a:bodyPr wrap="square" lIns="0" rIns="0" tIns="0" bIns="0">
+            <a:spAutoFit/>
           </a:bodyPr>
           <a:lstStyle/>
           <a:p>
-            <a:pPr marL="0" indent="0" algn="l">
-              <a:lnSpc>
-                <a:spcPts val="1680"/>
-              </a:lnSpc>
+            <a:pPr algn="l" marL="0" indent="0">
               <a:buNone/>
             </a:pPr>
             <a:r>
-              <a:rPr lang="en-US" sz="1200" dirty="0">
+              <a:rPr sz="2800" b="1" i="0">
                 <a:solidFill>
-                  <a:srgbClr val="6B7280"/>
+                  <a:srgbClr val="1F3A5F"/>
                 </a:solidFill>
-                <a:latin typeface="IBM Plex Sans" pitchFamily="34" charset="0"/>
-                <a:ea typeface="IBM Plex Sans" pitchFamily="34" charset="-122"/>
-                <a:cs typeface="IBM Plex Sans" pitchFamily="34" charset="-120"/>
+                <a:latin typeface="IBM Plex Sans"/>
+                <a:ea typeface="IBM Plex Sans"/>
+                <a:cs typeface="IBM Plex Sans"/>
               </a:rPr>
-              <a:t>Lima-Silva &amp; Freitas (2024): reproduction and improvements</a:t>
+              <a:t>Test systems</a:t>
             </a:r>
-            <a:endParaRPr lang="en-US" sz="1200" dirty="0"/>
           </a:p>
         </p:txBody>
       </p:sp>
+      <p:pic>
+        <p:nvPicPr>
+          <p:cNvPr id="3" name="Picture 2" descr="image.png"/>
+          <p:cNvPicPr>
+            <a:picLocks noChangeAspect="1"/>
+          </p:cNvPicPr>
+          <p:nvPr/>
+        </p:nvPicPr>
+        <p:blipFill>
+          <a:blip r:embed="rId2"/>
+          <a:stretch>
+            <a:fillRect/>
+          </a:stretch>
+        </p:blipFill>
+        <p:spPr>
+          <a:xfrm>
+            <a:off x="812800" y="1221741"/>
+            <a:ext cx="10566400" cy="20320"/>
+          </a:xfrm>
+          <a:prstGeom prst="rect">
+            <a:avLst/>
+          </a:prstGeom>
+        </p:spPr>
+      </p:pic>
       <p:sp>
         <p:nvSpPr>
-          <p:cNvPr id="8" name="Text 5"/>
-          <p:cNvSpPr/>
+          <p:cNvPr id="4" name="TextBox 3"/>
+          <p:cNvSpPr txBox="1"/>
           <p:nvPr/>
         </p:nvSpPr>
         <p:spPr>
           <a:xfrm>
-            <a:off x="10058400" y="6238241"/>
-            <a:ext cx="1320800" cy="238760"/>
+            <a:off x="813816" y="6236208"/>
+            <a:ext cx="7845552" cy="237744"/>
           </a:xfrm>
           <a:prstGeom prst="rect">
             <a:avLst/>
           </a:prstGeom>
           <a:noFill/>
-          <a:ln/>
         </p:spPr>
         <p:txBody>
-          <a:bodyPr wrap="square" lIns="0" tIns="0" rIns="0" bIns="0" rtlCol="0" anchor="t">
-            <a:normAutofit/>
+          <a:bodyPr wrap="square" lIns="0" rIns="0" tIns="0" bIns="0">
+            <a:spAutoFit/>
           </a:bodyPr>
           <a:lstStyle/>
           <a:p>
-            <a:pPr marL="0" indent="0" algn="r">
-              <a:lnSpc>
-                <a:spcPts val="1680"/>
-              </a:lnSpc>
+            <a:pPr algn="l" marL="0" indent="0">
               <a:buNone/>
             </a:pPr>
             <a:r>
-              <a:rPr lang="en-US" sz="1200" dirty="0">
+              <a:rPr sz="1200" b="0" i="0">
                 <a:solidFill>
                   <a:srgbClr val="6B7280"/>
                 </a:solidFill>
-                <a:latin typeface="IBM Plex Sans" pitchFamily="34" charset="0"/>
-                <a:ea typeface="IBM Plex Sans" pitchFamily="34" charset="-122"/>
-                <a:cs typeface="IBM Plex Sans" pitchFamily="34" charset="-120"/>
+                <a:latin typeface="IBM Plex Sans"/>
+                <a:ea typeface="IBM Plex Sans"/>
+                <a:cs typeface="IBM Plex Sans"/>
               </a:rPr>
-              <a:t>2</a:t>
+              <a:t>Lima-Silva &amp; Freitas (2024): reproduction and improvements</a:t>
             </a:r>
-            <a:endParaRPr lang="en-US" sz="1200" dirty="0"/>
           </a:p>
         </p:txBody>
       </p:sp>
+      <p:sp>
+        <p:nvSpPr>
+          <p:cNvPr id="5" name="TextBox 4"/>
+          <p:cNvSpPr txBox="1"/>
+          <p:nvPr/>
+        </p:nvSpPr>
+        <p:spPr>
+          <a:xfrm>
+            <a:off x="10058400" y="6236208"/>
+            <a:ext cx="1316736" cy="237744"/>
+          </a:xfrm>
+          <a:prstGeom prst="rect">
+            <a:avLst/>
+          </a:prstGeom>
+          <a:noFill/>
+        </p:spPr>
+        <p:txBody>
+          <a:bodyPr wrap="square" lIns="0" rIns="0" tIns="0" bIns="0">
+            <a:spAutoFit/>
+          </a:bodyPr>
+          <a:lstStyle/>
+          <a:p>
+            <a:pPr algn="r" marL="0" indent="0">
+              <a:buNone/>
+            </a:pPr>
+            <a:r>
+              <a:rPr sz="1200" b="0" i="0">
+                <a:solidFill>
+                  <a:srgbClr val="6B7280"/>
+                </a:solidFill>
+                <a:latin typeface="IBM Plex Sans"/>
+                <a:ea typeface="IBM Plex Sans"/>
+                <a:cs typeface="IBM Plex Sans"/>
+              </a:rPr>
+              <a:t>7</a:t>
+            </a:r>
+          </a:p>
+        </p:txBody>
+      </p:sp>
+      <p:sp>
+        <p:nvSpPr>
+          <p:cNvPr id="6" name="TextBox 5"/>
+          <p:cNvSpPr txBox="1"/>
+          <p:nvPr/>
+        </p:nvSpPr>
+        <p:spPr>
+          <a:xfrm>
+            <a:off x="813816" y="1517904"/>
+            <a:ext cx="5212080" cy="4206240"/>
+          </a:xfrm>
+          <a:prstGeom prst="rect">
+            <a:avLst/>
+          </a:prstGeom>
+          <a:noFill/>
+        </p:spPr>
+        <p:txBody>
+          <a:bodyPr wrap="square" lIns="0" rIns="0" tIns="0" bIns="0">
+            <a:spAutoFit/>
+          </a:bodyPr>
+          <a:lstStyle/>
+          <a:p>
+            <a:pPr algn="l" marL="243840" indent="-196342">
+              <a:lnSpc>
+                <a:spcPts val="2500"/>
+              </a:lnSpc>
+              <a:buSzPct val="100000"/>
+              <a:buChar char="•"/>
+            </a:pPr>
+            <a:r>
+              <a:rPr sz="1600" b="0" i="0">
+                <a:solidFill>
+                  <a:srgbClr val="1B1F2A"/>
+                </a:solidFill>
+                <a:latin typeface="IBM Plex Sans"/>
+                <a:ea typeface="IBM Plex Sans"/>
+                <a:cs typeface="IBM Plex Sans"/>
+              </a:rPr>
+              <a:t>The paper's 9 grids from Zenodo: 5 ill-conditioned (18,482 to 109,272 buses), 4 near their load limit</a:t>
+            </a:r>
+          </a:p>
+          <a:p>
+            <a:pPr algn="l" marL="243840" indent="-196342">
+              <a:lnSpc>
+                <a:spcPts val="2500"/>
+              </a:lnSpc>
+              <a:buSzPct val="100000"/>
+              <a:buChar char="•"/>
+            </a:pPr>
+            <a:r>
+              <a:rPr sz="1600" b="0" i="0">
+                <a:solidFill>
+                  <a:srgbClr val="1B1F2A"/>
+                </a:solidFill>
+                <a:latin typeface="IBM Plex Sans"/>
+                <a:ea typeface="IBM Plex Sans"/>
+                <a:cs typeface="IBM Plex Sans"/>
+              </a:rPr>
+              <a:t>Model check: flat-start mismatch matches the paper, e.g. 533 vs 532 pu on case18482</a:t>
+            </a:r>
+          </a:p>
+          <a:p>
+            <a:pPr algn="l" marL="243840" indent="-196342">
+              <a:lnSpc>
+                <a:spcPts val="2500"/>
+              </a:lnSpc>
+              <a:buSzPct val="100000"/>
+              <a:buChar char="•"/>
+            </a:pPr>
+            <a:r>
+              <a:rPr sz="1600" b="0" i="0">
+                <a:solidFill>
+                  <a:srgbClr val="1B1F2A"/>
+                </a:solidFill>
+                <a:latin typeface="IBM Plex Sans"/>
+                <a:ea typeface="IBM Plex Sans"/>
+                <a:cs typeface="IBM Plex Sans"/>
+              </a:rPr>
+              <a:t>Two small grids were off by exactly 10: their files store 10 MVA, the paper uses 100 MVA</a:t>
+            </a:r>
+          </a:p>
+          <a:p>
+            <a:pPr algn="l" marL="243840" indent="-196342">
+              <a:lnSpc>
+                <a:spcPts val="2500"/>
+              </a:lnSpc>
+              <a:buSzPct val="100000"/>
+              <a:buChar char="•"/>
+            </a:pPr>
+            <a:r>
+              <a:rPr sz="1600" b="0" i="0">
+                <a:solidFill>
+                  <a:srgbClr val="1B1F2A"/>
+                </a:solidFill>
+                <a:latin typeface="IBM Plex Sans"/>
+                <a:ea typeface="IBM Plex Sans"/>
+                <a:cs typeface="IBM Plex Sans"/>
+              </a:rPr>
+              <a:t>25 more grids from the same records: 34 in total, used for the 170-run study</a:t>
+            </a:r>
+          </a:p>
+          <a:p>
+            <a:pPr algn="l" marL="243840" indent="-196342">
+              <a:lnSpc>
+                <a:spcPts val="2500"/>
+              </a:lnSpc>
+              <a:buSzPct val="100000"/>
+              <a:buChar char="•"/>
+            </a:pPr>
+            <a:r>
+              <a:rPr sz="1600" b="0" i="0">
+                <a:solidFill>
+                  <a:srgbClr val="1B1F2A"/>
+                </a:solidFill>
+                <a:latin typeface="IBM Plex Sans"/>
+                <a:ea typeface="IBM Plex Sans"/>
+                <a:cs typeface="IBM Plex Sans"/>
+              </a:rPr>
+              <a:t>Newton from the flat start fails on all 5 large grids (crosses in the figure)</a:t>
+            </a:r>
+          </a:p>
+        </p:txBody>
+      </p:sp>
+      <p:pic>
+        <p:nvPicPr>
+          <p:cNvPr id="7" name="Picture 6" descr="systems.png"/>
+          <p:cNvPicPr>
+            <a:picLocks noChangeAspect="1"/>
+          </p:cNvPicPr>
+          <p:nvPr/>
+        </p:nvPicPr>
+        <p:blipFill>
+          <a:blip r:embed="rId4"/>
+          <a:stretch>
+            <a:fillRect/>
+          </a:stretch>
+        </p:blipFill>
+        <p:spPr>
+          <a:xfrm>
+            <a:off x="6172200" y="1481328"/>
+            <a:ext cx="5257800" cy="3634024"/>
+          </a:xfrm>
+          <a:prstGeom prst="rect">
+            <a:avLst/>
+          </a:prstGeom>
+        </p:spPr>
+      </p:pic>
     </p:spTree>
   </p:cSld>
   <p:clrMapOvr>
@@ -10498,7 +15945,7 @@
                 <a:ea typeface="IBM Plex Sans" pitchFamily="34" charset="-122"/>
                 <a:cs typeface="IBM Plex Sans" pitchFamily="34" charset="-120"/>
               </a:rPr>
-              <a:t>3</a:t>
+              <a:t>8</a:t>
             </a:r>
             <a:endParaRPr lang="en-US" sz="1200" dirty="0"/>
           </a:p>
@@ -10882,7 +16329,7 @@
                 <a:ea typeface="IBM Plex Sans" pitchFamily="34" charset="-122"/>
                 <a:cs typeface="IBM Plex Sans" pitchFamily="34" charset="-120"/>
               </a:rPr>
-              <a:t>4</a:t>
+              <a:t>9</a:t>
             </a:r>
             <a:endParaRPr lang="en-US" sz="1200" dirty="0"/>
           </a:p>
@@ -11349,7 +16796,7 @@
                 <a:ea typeface="IBM Plex Sans" pitchFamily="34" charset="-122"/>
                 <a:cs typeface="IBM Plex Sans" pitchFamily="34" charset="-120"/>
               </a:rPr>
-              <a:t>5</a:t>
+              <a:t>10</a:t>
             </a:r>
             <a:endParaRPr lang="en-US" sz="1200" dirty="0"/>
           </a:p>
@@ -12831,7 +18278,7 @@
                 <a:ea typeface="IBM Plex Sans" pitchFamily="34" charset="-122"/>
                 <a:cs typeface="IBM Plex Sans" pitchFamily="34" charset="-120"/>
               </a:rPr>
-              <a:t>6</a:t>
+              <a:t>11</a:t>
             </a:r>
             <a:endParaRPr lang="en-US" sz="1200" dirty="0"/>
           </a:p>
@@ -13398,7 +18845,7 @@
                 <a:ea typeface="IBM Plex Sans" pitchFamily="34" charset="-122"/>
                 <a:cs typeface="IBM Plex Sans" pitchFamily="34" charset="-120"/>
               </a:rPr>
-              <a:t>7</a:t>
+              <a:t>12</a:t>
             </a:r>
             <a:endParaRPr lang="en-US" sz="1200" dirty="0"/>
           </a:p>
@@ -13809,7 +19256,7 @@
                 <a:ea typeface="IBM Plex Sans" pitchFamily="34" charset="-122"/>
                 <a:cs typeface="IBM Plex Sans" pitchFamily="34" charset="-120"/>
               </a:rPr>
-              <a:t>8</a:t>
+              <a:t>13</a:t>
             </a:r>
             <a:endParaRPr lang="en-US" sz="1200" dirty="0"/>
           </a:p>
@@ -16113,7 +21560,7 @@
                 <a:ea typeface="IBM Plex Sans" pitchFamily="34" charset="-122"/>
                 <a:cs typeface="IBM Plex Sans" pitchFamily="34" charset="-120"/>
               </a:rPr>
-              <a:t>10</a:t>
+              <a:t>14</a:t>
             </a:r>
             <a:endParaRPr lang="en-US" sz="1200" dirty="0"/>
           </a:p>
